--- a/Instructional_Response_to_SOL_Data_Reading.pptx
+++ b/Instructional_Response_to_SOL_Data_Reading.pptx
@@ -6368,7 +6368,7 @@
                       </a:pPr>
                       <a:r>
                         <a:rPr lang="en" sz="750" b="1"/>
-                        <a:t>Evaluate which details confirm or disprove an argument</a:t>
+                        <a:t>Evaluate details in a text, determining which could confirm or disprove an argument or position</a:t>
                       </a:r>
                       <a:r>
                         <a:rPr lang="en" sz="750"/>
@@ -6389,7 +6389,7 @@
                       </a:pPr>
                       <a:r>
                         <a:rPr lang="en" sz="750" b="1"/>
-                        <a:t>Analyze how dialogue and events reveal characters</a:t>
+                        <a:t>Analyze how characters are revealed through particular lines of dialogue or events</a:t>
                       </a:r>
                       <a:r>
                         <a:rPr lang="en" sz="750"/>
@@ -6410,7 +6410,7 @@
                       </a:pPr>
                       <a:r>
                         <a:rPr lang="en" sz="750" b="1"/>
-                        <a:t>Use context clues to clarify word meaning</a:t>
+                        <a:t>Use context and sentence structure clues to clarify the meaning of words</a:t>
                       </a:r>
                       <a:r>
                         <a:rPr lang="en" sz="750"/>
@@ -7303,7 +7303,7 @@
                       </a:pPr>
                       <a:r>
                         <a:rPr lang="en" sz="800" b="1"/>
-                        <a:t>Evaluate which details confirm or disprove an argument (10.RI.1.C)</a:t>
+                        <a:t>Evaluate details in a text, determining which could confirm or disprove an argument or position (10.RI.1.C)</a:t>
                       </a:r>
                       <a:endParaRPr sz="800"/>
                     </a:p>
@@ -7538,7 +7538,7 @@
                       </a:pPr>
                       <a:r>
                         <a:rPr lang="en" sz="800" b="1"/>
-                        <a:t>Analyze how dialogue and events reveal characters (11.RL.1.C)</a:t>
+                        <a:t>Analyze how characters are revealed through particular lines of dialogue or events (11.RL.1.C)</a:t>
                       </a:r>
                       <a:endParaRPr sz="800"/>
                     </a:p>
@@ -7773,7 +7773,7 @@
                       </a:pPr>
                       <a:r>
                         <a:rPr lang="en" sz="800" b="1"/>
-                        <a:t>Use context and sentence clues to clarify word meaning (11.RVN.1.B)</a:t>
+                        <a:t>Use context and sentence structure clues to clarify the meaning of words (11.RVN.1.B)</a:t>
                       </a:r>
                       <a:endParaRPr sz="800"/>
                     </a:p>
@@ -8609,7 +8609,7 @@
                   <a:srgbClr val="214F93"/>
                 </a:solidFill>
               </a:rPr>
-              <a:t>Evaluate which details confirm or disprove an argument</a:t>
+              <a:t>Evaluate details in a text, determining which could confirm or disprove an argument or position</a:t>
             </a:r>
           </a:p>
         </p:txBody>
@@ -9521,7 +9521,7 @@
                   <a:srgbClr val="214F93"/>
                 </a:solidFill>
               </a:rPr>
-              <a:t>Analyze how dialogue and events reveal characters</a:t>
+              <a:t>Analyze how characters are revealed through particular lines of dialogue or events</a:t>
             </a:r>
           </a:p>
         </p:txBody>
@@ -10433,7 +10433,7 @@
                   <a:srgbClr val="214F93"/>
                 </a:solidFill>
               </a:rPr>
-              <a:t>Use context clues to clarify word meaning</a:t>
+              <a:t>Use context and sentence structure clues to clarify the meaning of words</a:t>
             </a:r>
           </a:p>
         </p:txBody>

--- a/Instructional_Response_to_SOL_Data_Reading.pptx
+++ b/Instructional_Response_to_SOL_Data_Reading.pptx
@@ -9,8 +9,6 @@
   </p:notesMasterIdLst>
   <p:sldIdLst>
     <p:sldId id="256" r:id="rId7"/>
-    <p:sldId id="257" r:id="rId16"/>
-    <p:sldId id="258" r:id="rId17"/>
   </p:sldIdLst>
   <p:sldSz cy="5143500" cx="9144000"/>
   <p:notesSz cx="6858000" cy="9144000"/>
@@ -5980,7 +5978,7 @@
             <a:tbl>
               <a:tblPr bandRow="1" firstRow="1">
                 <a:noFill/>
-                <a:tableStyleId>{A47E61B7-C1A4-47CA-91F6-83AEB93D0619}</a:tableStyleId>
+                <a:tableStyleId>{04BF01AC-D0E0-46D9-A612-D0EBE1C7AC7D}</a:tableStyleId>
               </a:tblPr>
               <a:tblGrid>
                 <a:gridCol w="2145375"/>
@@ -6321,23 +6319,658 @@
                     <a:lstStyle/>
                     <a:p>
                       <a:pPr indent="0" lvl="0" marL="0" rtl="0" algn="l">
+                        <a:lnSpc>
+                          <a:spcPct val="115000"/>
+                        </a:lnSpc>
                         <a:spcBef>
                           <a:spcPts val="0"/>
                         </a:spcBef>
                         <a:spcAft>
                           <a:spcPts val="0"/>
                         </a:spcAft>
+                        <a:buClr>
+                          <a:schemeClr val="dk1"/>
+                        </a:buClr>
+                        <a:buSzPts val="1100"/>
+                        <a:buFont typeface="Arial"/>
                         <a:buNone/>
                       </a:pPr>
                       <a:r>
-                        <a:rPr lang="en" sz="900" b="1">
+                        <a:rPr b="1" lang="en" sz="800">
                           <a:solidFill>
                             <a:srgbClr val="214F93"/>
                           </a:solidFill>
+                          <a:latin typeface="Arial"/>
+                          <a:ea typeface="Arial"/>
+                          <a:cs typeface="Arial"/>
+                          <a:sym typeface="Arial"/>
                         </a:rPr>
                         <a:t>Significant Gaps</a:t>
                       </a:r>
-                      <a:endParaRPr sz="900"/>
+                      <a:endParaRPr b="1" sz="800">
+                        <a:solidFill>
+                          <a:srgbClr val="214F93"/>
+                        </a:solidFill>
+                        <a:latin typeface="Arial"/>
+                        <a:ea typeface="Arial"/>
+                        <a:cs typeface="Arial"/>
+                        <a:sym typeface="Arial"/>
+                      </a:endParaRPr>
+                    </a:p>
+                    <a:p>
+                      <a:pPr indent="0" lvl="0" marL="0" rtl="0" algn="l">
+                        <a:lnSpc>
+                          <a:spcPct val="115000"/>
+                        </a:lnSpc>
+                        <a:spcBef>
+                          <a:spcPts val="0"/>
+                        </a:spcBef>
+                        <a:spcAft>
+                          <a:spcPts val="0"/>
+                        </a:spcAft>
+                        <a:buClr>
+                          <a:schemeClr val="dk1"/>
+                        </a:buClr>
+                        <a:buSzPts val="1100"/>
+                        <a:buFont typeface="Arial"/>
+                        <a:buNone/>
+                      </a:pPr>
+                      <a:r>
+                        <a:rPr lang="en" sz="650">
+                          <a:solidFill>
+                            <a:schemeClr val="dk1"/>
+                          </a:solidFill>
+                          <a:latin typeface="Arial"/>
+                          <a:ea typeface="Arial"/>
+                          <a:cs typeface="Arial"/>
+                          <a:sym typeface="Arial"/>
+                        </a:rPr>
+                        <a:t>% of items correct: all students 63%, SWD 49%, ELL 44%. Three skills to improve (all / SWD / ELL):</a:t>
+                      </a:r>
+                      <a:endParaRPr sz="650">
+                        <a:solidFill>
+                          <a:schemeClr val="dk1"/>
+                        </a:solidFill>
+                        <a:latin typeface="Arial"/>
+                        <a:ea typeface="Arial"/>
+                        <a:cs typeface="Arial"/>
+                        <a:sym typeface="Arial"/>
+                      </a:endParaRPr>
+                    </a:p>
+                    <a:p>
+                      <a:pPr indent="0" lvl="0" marL="0" rtl="0" algn="l">
+                        <a:lnSpc>
+                          <a:spcPct val="115000"/>
+                        </a:lnSpc>
+                        <a:spcBef>
+                          <a:spcPts val="100"/>
+                        </a:spcBef>
+                        <a:spcAft>
+                          <a:spcPts val="0"/>
+                        </a:spcAft>
+                        <a:buClr>
+                          <a:schemeClr val="dk1"/>
+                        </a:buClr>
+                        <a:buSzPts val="1100"/>
+                        <a:buFont typeface="Arial"/>
+                        <a:buNone/>
+                      </a:pPr>
+                      <a:r>
+                        <a:rPr lang="en" sz="650">
+                          <a:solidFill>
+                            <a:schemeClr val="dk1"/>
+                          </a:solidFill>
+                          <a:latin typeface="Arial"/>
+                          <a:ea typeface="Arial"/>
+                          <a:cs typeface="Arial"/>
+                          <a:sym typeface="Arial"/>
+                        </a:rPr>
+                        <a:t>•</a:t>
+                      </a:r>
+                      <a:r>
+                        <a:rPr b="1" lang="en" sz="650">
+                          <a:solidFill>
+                            <a:schemeClr val="dk1"/>
+                          </a:solidFill>
+                          <a:latin typeface="Arial"/>
+                          <a:ea typeface="Arial"/>
+                          <a:cs typeface="Arial"/>
+                          <a:sym typeface="Arial"/>
+                        </a:rPr>
+                        <a:t>Evaluate details in a text, determining which could confirm or disprove an argument or position</a:t>
+                      </a:r>
+                      <a:r>
+                        <a:rPr lang="en" sz="650">
+                          <a:solidFill>
+                            <a:schemeClr val="dk1"/>
+                          </a:solidFill>
+                          <a:latin typeface="Arial"/>
+                          <a:ea typeface="Arial"/>
+                          <a:cs typeface="Arial"/>
+                          <a:sym typeface="Arial"/>
+                        </a:rPr>
+                        <a:t> (10.RI.1.C): 52% / 41% / 32%.</a:t>
+                      </a:r>
+                      <a:endParaRPr sz="650">
+                        <a:solidFill>
+                          <a:schemeClr val="dk1"/>
+                        </a:solidFill>
+                        <a:latin typeface="Arial"/>
+                        <a:ea typeface="Arial"/>
+                        <a:cs typeface="Arial"/>
+                        <a:sym typeface="Arial"/>
+                      </a:endParaRPr>
+                    </a:p>
+                    <a:p>
+                      <a:pPr indent="0" lvl="0" marL="0" rtl="0" algn="l">
+                        <a:lnSpc>
+                          <a:spcPct val="115000"/>
+                        </a:lnSpc>
+                        <a:spcBef>
+                          <a:spcPts val="100"/>
+                        </a:spcBef>
+                        <a:spcAft>
+                          <a:spcPts val="0"/>
+                        </a:spcAft>
+                        <a:buClr>
+                          <a:schemeClr val="dk1"/>
+                        </a:buClr>
+                        <a:buSzPts val="1100"/>
+                        <a:buFont typeface="Arial"/>
+                        <a:buNone/>
+                      </a:pPr>
+                      <a:r>
+                        <a:rPr lang="en" sz="650">
+                          <a:solidFill>
+                            <a:schemeClr val="dk1"/>
+                          </a:solidFill>
+                          <a:latin typeface="Arial"/>
+                          <a:ea typeface="Arial"/>
+                          <a:cs typeface="Arial"/>
+                          <a:sym typeface="Arial"/>
+                        </a:rPr>
+                        <a:t>•</a:t>
+                      </a:r>
+                      <a:r>
+                        <a:rPr b="1" lang="en" sz="650">
+                          <a:solidFill>
+                            <a:schemeClr val="dk1"/>
+                          </a:solidFill>
+                          <a:latin typeface="Arial"/>
+                          <a:ea typeface="Arial"/>
+                          <a:cs typeface="Arial"/>
+                          <a:sym typeface="Arial"/>
+                        </a:rPr>
+                        <a:t>Analyze the author's purpose and impact of literary techniques in a text</a:t>
+                      </a:r>
+                      <a:r>
+                        <a:rPr lang="en" sz="650">
+                          <a:solidFill>
+                            <a:schemeClr val="dk1"/>
+                          </a:solidFill>
+                          <a:latin typeface="Arial"/>
+                          <a:ea typeface="Arial"/>
+                          <a:cs typeface="Arial"/>
+                          <a:sym typeface="Arial"/>
+                        </a:rPr>
+                        <a:t> (11.RI.2.C): 36% / 20% / 100%.</a:t>
+                      </a:r>
+                      <a:endParaRPr sz="650">
+                        <a:solidFill>
+                          <a:schemeClr val="dk1"/>
+                        </a:solidFill>
+                        <a:latin typeface="Arial"/>
+                        <a:ea typeface="Arial"/>
+                        <a:cs typeface="Arial"/>
+                        <a:sym typeface="Arial"/>
+                      </a:endParaRPr>
+                    </a:p>
+                    <a:p>
+                      <a:pPr indent="0" lvl="0" marL="0" rtl="0" algn="l">
+                        <a:lnSpc>
+                          <a:spcPct val="115000"/>
+                        </a:lnSpc>
+                        <a:spcBef>
+                          <a:spcPts val="100"/>
+                        </a:spcBef>
+                        <a:spcAft>
+                          <a:spcPts val="0"/>
+                        </a:spcAft>
+                        <a:buClr>
+                          <a:schemeClr val="dk1"/>
+                        </a:buClr>
+                        <a:buSzPts val="1100"/>
+                        <a:buFont typeface="Arial"/>
+                        <a:buNone/>
+                      </a:pPr>
+                      <a:r>
+                        <a:rPr lang="en" sz="650">
+                          <a:solidFill>
+                            <a:schemeClr val="dk1"/>
+                          </a:solidFill>
+                          <a:latin typeface="Arial"/>
+                          <a:ea typeface="Arial"/>
+                          <a:cs typeface="Arial"/>
+                          <a:sym typeface="Arial"/>
+                        </a:rPr>
+                        <a:t>•</a:t>
+                      </a:r>
+                      <a:r>
+                        <a:rPr b="1" lang="en" sz="650">
+                          <a:solidFill>
+                            <a:schemeClr val="dk1"/>
+                          </a:solidFill>
+                          <a:latin typeface="Arial"/>
+                          <a:ea typeface="Arial"/>
+                          <a:cs typeface="Arial"/>
+                          <a:sym typeface="Arial"/>
+                        </a:rPr>
+                        <a:t>Evaluate how word choice, syntax, tone or voice conveys an author's intent and viewpoint</a:t>
+                      </a:r>
+                      <a:r>
+                        <a:rPr lang="en" sz="650">
+                          <a:solidFill>
+                            <a:schemeClr val="dk1"/>
+                          </a:solidFill>
+                          <a:latin typeface="Arial"/>
+                          <a:ea typeface="Arial"/>
+                          <a:cs typeface="Arial"/>
+                          <a:sym typeface="Arial"/>
+                        </a:rPr>
+                        <a:t> (11.RL.2.B): 58% / 41% / 20%.</a:t>
+                      </a:r>
+                      <a:endParaRPr sz="650">
+                        <a:solidFill>
+                          <a:schemeClr val="dk1"/>
+                        </a:solidFill>
+                        <a:latin typeface="Arial"/>
+                        <a:ea typeface="Arial"/>
+                        <a:cs typeface="Arial"/>
+                        <a:sym typeface="Arial"/>
+                      </a:endParaRPr>
+                    </a:p>
+                    <a:p>
+                      <a:pPr indent="0" lvl="0" marL="0" rtl="0" algn="l">
+                        <a:lnSpc>
+                          <a:spcPct val="115000"/>
+                        </a:lnSpc>
+                        <a:spcBef>
+                          <a:spcPts val="200"/>
+                        </a:spcBef>
+                        <a:spcAft>
+                          <a:spcPts val="0"/>
+                        </a:spcAft>
+                        <a:buClr>
+                          <a:schemeClr val="dk1"/>
+                        </a:buClr>
+                        <a:buSzPts val="1100"/>
+                        <a:buFont typeface="Arial"/>
+                        <a:buNone/>
+                      </a:pPr>
+                      <a:r>
+                        <a:rPr b="1" lang="en" sz="800">
+                          <a:solidFill>
+                            <a:srgbClr val="214F93"/>
+                          </a:solidFill>
+                          <a:latin typeface="Arial"/>
+                          <a:ea typeface="Arial"/>
+                          <a:cs typeface="Arial"/>
+                          <a:sym typeface="Arial"/>
+                        </a:rPr>
+                        <a:t>Changes to Tier 1</a:t>
+                      </a:r>
+                      <a:endParaRPr b="1" sz="800">
+                        <a:solidFill>
+                          <a:srgbClr val="214F93"/>
+                        </a:solidFill>
+                        <a:latin typeface="Arial"/>
+                        <a:ea typeface="Arial"/>
+                        <a:cs typeface="Arial"/>
+                        <a:sym typeface="Arial"/>
+                      </a:endParaRPr>
+                    </a:p>
+                    <a:p>
+                      <a:pPr indent="0" lvl="0" marL="0" rtl="0" algn="l">
+                        <a:lnSpc>
+                          <a:spcPct val="115000"/>
+                        </a:lnSpc>
+                        <a:spcBef>
+                          <a:spcPts val="100"/>
+                        </a:spcBef>
+                        <a:spcAft>
+                          <a:spcPts val="0"/>
+                        </a:spcAft>
+                        <a:buClr>
+                          <a:schemeClr val="dk1"/>
+                        </a:buClr>
+                        <a:buSzPts val="1100"/>
+                        <a:buFont typeface="Arial"/>
+                        <a:buNone/>
+                      </a:pPr>
+                      <a:r>
+                        <a:rPr lang="en" sz="650">
+                          <a:solidFill>
+                            <a:schemeClr val="dk1"/>
+                          </a:solidFill>
+                          <a:latin typeface="Arial"/>
+                          <a:ea typeface="Arial"/>
+                          <a:cs typeface="Arial"/>
+                          <a:sym typeface="Arial"/>
+                        </a:rPr>
+                        <a:t>•</a:t>
+                      </a:r>
+                      <a:r>
+                        <a:rPr b="1" lang="en" sz="650">
+                          <a:solidFill>
+                            <a:schemeClr val="dk1"/>
+                          </a:solidFill>
+                          <a:latin typeface="Arial"/>
+                          <a:ea typeface="Arial"/>
+                          <a:cs typeface="Arial"/>
+                          <a:sym typeface="Arial"/>
+                        </a:rPr>
+                        <a:t>Claim check:</a:t>
+                      </a:r>
+                      <a:r>
+                        <a:rPr lang="en" sz="650">
+                          <a:solidFill>
+                            <a:schemeClr val="dk1"/>
+                          </a:solidFill>
+                          <a:latin typeface="Arial"/>
+                          <a:ea typeface="Arial"/>
+                          <a:cs typeface="Arial"/>
+                          <a:sym typeface="Arial"/>
+                        </a:rPr>
+                        <a:t> bi-weekly paired-passage task analyzing details to confirm or disprove a claim; teacher think-aloud + PEE/CER.</a:t>
+                      </a:r>
+                      <a:endParaRPr sz="650">
+                        <a:solidFill>
+                          <a:schemeClr val="dk1"/>
+                        </a:solidFill>
+                        <a:latin typeface="Arial"/>
+                        <a:ea typeface="Arial"/>
+                        <a:cs typeface="Arial"/>
+                        <a:sym typeface="Arial"/>
+                      </a:endParaRPr>
+                    </a:p>
+                    <a:p>
+                      <a:pPr indent="0" lvl="0" marL="0" rtl="0" algn="l">
+                        <a:lnSpc>
+                          <a:spcPct val="115000"/>
+                        </a:lnSpc>
+                        <a:spcBef>
+                          <a:spcPts val="100"/>
+                        </a:spcBef>
+                        <a:spcAft>
+                          <a:spcPts val="0"/>
+                        </a:spcAft>
+                        <a:buClr>
+                          <a:schemeClr val="dk1"/>
+                        </a:buClr>
+                        <a:buSzPts val="1100"/>
+                        <a:buFont typeface="Arial"/>
+                        <a:buNone/>
+                      </a:pPr>
+                      <a:r>
+                        <a:rPr lang="en" sz="650">
+                          <a:solidFill>
+                            <a:schemeClr val="dk1"/>
+                          </a:solidFill>
+                          <a:latin typeface="Arial"/>
+                          <a:ea typeface="Arial"/>
+                          <a:cs typeface="Arial"/>
+                          <a:sym typeface="Arial"/>
+                        </a:rPr>
+                        <a:t>•</a:t>
+                      </a:r>
+                      <a:r>
+                        <a:rPr b="1" lang="en" sz="650">
+                          <a:solidFill>
+                            <a:schemeClr val="dk1"/>
+                          </a:solidFill>
+                          <a:latin typeface="Arial"/>
+                          <a:ea typeface="Arial"/>
+                          <a:cs typeface="Arial"/>
+                          <a:sym typeface="Arial"/>
+                        </a:rPr>
+                        <a:t>Character annotation:</a:t>
+                      </a:r>
+                      <a:r>
+                        <a:rPr lang="en" sz="650">
+                          <a:solidFill>
+                            <a:schemeClr val="dk1"/>
+                          </a:solidFill>
+                          <a:latin typeface="Arial"/>
+                          <a:ea typeface="Arial"/>
+                          <a:cs typeface="Arial"/>
+                          <a:sym typeface="Arial"/>
+                        </a:rPr>
+                        <a:t> written analytical paragraph of dialogue or an event explaining what  it reveals; organizer for SWD/ELL.</a:t>
+                      </a:r>
+                      <a:endParaRPr sz="650">
+                        <a:solidFill>
+                          <a:schemeClr val="dk1"/>
+                        </a:solidFill>
+                        <a:latin typeface="Arial"/>
+                        <a:ea typeface="Arial"/>
+                        <a:cs typeface="Arial"/>
+                        <a:sym typeface="Arial"/>
+                      </a:endParaRPr>
+                    </a:p>
+                    <a:p>
+                      <a:pPr indent="0" lvl="0" marL="0" rtl="0" algn="l">
+                        <a:lnSpc>
+                          <a:spcPct val="115000"/>
+                        </a:lnSpc>
+                        <a:spcBef>
+                          <a:spcPts val="100"/>
+                        </a:spcBef>
+                        <a:spcAft>
+                          <a:spcPts val="0"/>
+                        </a:spcAft>
+                        <a:buClr>
+                          <a:schemeClr val="dk1"/>
+                        </a:buClr>
+                        <a:buSzPts val="1100"/>
+                        <a:buFont typeface="Arial"/>
+                        <a:buNone/>
+                      </a:pPr>
+                      <a:r>
+                        <a:rPr lang="en" sz="650">
+                          <a:solidFill>
+                            <a:schemeClr val="dk1"/>
+                          </a:solidFill>
+                          <a:latin typeface="Arial"/>
+                          <a:ea typeface="Arial"/>
+                          <a:cs typeface="Arial"/>
+                          <a:sym typeface="Arial"/>
+                        </a:rPr>
+                        <a:t>•</a:t>
+                      </a:r>
+                      <a:r>
+                        <a:rPr b="1" lang="en" sz="650">
+                          <a:solidFill>
+                            <a:schemeClr val="dk1"/>
+                          </a:solidFill>
+                          <a:latin typeface="Arial"/>
+                          <a:ea typeface="Arial"/>
+                          <a:cs typeface="Arial"/>
+                          <a:sym typeface="Arial"/>
+                        </a:rPr>
+                        <a:t>Context-clue routine:</a:t>
+                      </a:r>
+                      <a:r>
+                        <a:rPr lang="en" sz="650">
+                          <a:solidFill>
+                            <a:schemeClr val="dk1"/>
+                          </a:solidFill>
+                          <a:latin typeface="Arial"/>
+                          <a:ea typeface="Arial"/>
+                          <a:cs typeface="Arial"/>
+                          <a:sym typeface="Arial"/>
+                        </a:rPr>
+                        <a:t> weekly 5-10 minute word-meaning practice using context or word structure; pre-teach key words for ELL.</a:t>
+                      </a:r>
+                      <a:endParaRPr sz="650">
+                        <a:solidFill>
+                          <a:schemeClr val="dk1"/>
+                        </a:solidFill>
+                        <a:latin typeface="Arial"/>
+                        <a:ea typeface="Arial"/>
+                        <a:cs typeface="Arial"/>
+                        <a:sym typeface="Arial"/>
+                      </a:endParaRPr>
+                    </a:p>
+                    <a:p>
+                      <a:pPr indent="0" lvl="0" marL="0" rtl="0" algn="l">
+                        <a:lnSpc>
+                          <a:spcPct val="115000"/>
+                        </a:lnSpc>
+                        <a:spcBef>
+                          <a:spcPts val="200"/>
+                        </a:spcBef>
+                        <a:spcAft>
+                          <a:spcPts val="0"/>
+                        </a:spcAft>
+                        <a:buClr>
+                          <a:schemeClr val="dk1"/>
+                        </a:buClr>
+                        <a:buSzPts val="1100"/>
+                        <a:buFont typeface="Arial"/>
+                        <a:buNone/>
+                      </a:pPr>
+                      <a:r>
+                        <a:rPr b="1" lang="en" sz="800">
+                          <a:solidFill>
+                            <a:srgbClr val="214F93"/>
+                          </a:solidFill>
+                          <a:latin typeface="Arial"/>
+                          <a:ea typeface="Arial"/>
+                          <a:cs typeface="Arial"/>
+                          <a:sym typeface="Arial"/>
+                        </a:rPr>
+                        <a:t>Monitoring</a:t>
+                      </a:r>
+                      <a:endParaRPr b="1" sz="800">
+                        <a:solidFill>
+                          <a:srgbClr val="214F93"/>
+                        </a:solidFill>
+                        <a:latin typeface="Arial"/>
+                        <a:ea typeface="Arial"/>
+                        <a:cs typeface="Arial"/>
+                        <a:sym typeface="Arial"/>
+                      </a:endParaRPr>
+                    </a:p>
+                    <a:p>
+                      <a:pPr indent="0" lvl="0" marL="0" rtl="0" algn="l">
+                        <a:lnSpc>
+                          <a:spcPct val="115000"/>
+                        </a:lnSpc>
+                        <a:spcBef>
+                          <a:spcPts val="100"/>
+                        </a:spcBef>
+                        <a:spcAft>
+                          <a:spcPts val="0"/>
+                        </a:spcAft>
+                        <a:buClr>
+                          <a:schemeClr val="dk1"/>
+                        </a:buClr>
+                        <a:buSzPts val="1100"/>
+                        <a:buFont typeface="Arial"/>
+                        <a:buNone/>
+                      </a:pPr>
+                      <a:r>
+                        <a:rPr lang="en" sz="650">
+                          <a:solidFill>
+                            <a:schemeClr val="dk1"/>
+                          </a:solidFill>
+                          <a:latin typeface="Arial"/>
+                          <a:ea typeface="Arial"/>
+                          <a:cs typeface="Arial"/>
+                          <a:sym typeface="Arial"/>
+                        </a:rPr>
+                        <a:t>•One 5-item CFU per skill every 3 weeks; MP1 benchmark on these three SOLs for all/SWD/ELL.</a:t>
+                      </a:r>
+                      <a:endParaRPr sz="650">
+                        <a:solidFill>
+                          <a:schemeClr val="dk1"/>
+                        </a:solidFill>
+                        <a:latin typeface="Arial"/>
+                        <a:ea typeface="Arial"/>
+                        <a:cs typeface="Arial"/>
+                        <a:sym typeface="Arial"/>
+                      </a:endParaRPr>
+                    </a:p>
+                    <a:p>
+                      <a:pPr indent="0" lvl="0" marL="0" rtl="0" algn="l">
+                        <a:lnSpc>
+                          <a:spcPct val="115000"/>
+                        </a:lnSpc>
+                        <a:spcBef>
+                          <a:spcPts val="100"/>
+                        </a:spcBef>
+                        <a:spcAft>
+                          <a:spcPts val="0"/>
+                        </a:spcAft>
+                        <a:buClr>
+                          <a:schemeClr val="dk1"/>
+                        </a:buClr>
+                        <a:buSzPts val="1100"/>
+                        <a:buFont typeface="Arial"/>
+                        <a:buNone/>
+                      </a:pPr>
+                      <a:r>
+                        <a:rPr lang="en" sz="650">
+                          <a:solidFill>
+                            <a:schemeClr val="dk1"/>
+                          </a:solidFill>
+                          <a:latin typeface="Arial"/>
+                          <a:ea typeface="Arial"/>
+                          <a:cs typeface="Arial"/>
+                          <a:sym typeface="Arial"/>
+                        </a:rPr>
+                        <a:t>•Walkthroughs check the three routines; PLC reviews student samples monthly.</a:t>
+                      </a:r>
+                      <a:endParaRPr sz="650">
+                        <a:solidFill>
+                          <a:schemeClr val="dk1"/>
+                        </a:solidFill>
+                        <a:latin typeface="Arial"/>
+                        <a:ea typeface="Arial"/>
+                        <a:cs typeface="Arial"/>
+                        <a:sym typeface="Arial"/>
+                      </a:endParaRPr>
+                    </a:p>
+                    <a:p>
+                      <a:pPr indent="0" lvl="0" marL="0" rtl="0" algn="l">
+                        <a:lnSpc>
+                          <a:spcPct val="115000"/>
+                        </a:lnSpc>
+                        <a:spcBef>
+                          <a:spcPts val="100"/>
+                        </a:spcBef>
+                        <a:spcAft>
+                          <a:spcPts val="0"/>
+                        </a:spcAft>
+                        <a:buClr>
+                          <a:schemeClr val="dk1"/>
+                        </a:buClr>
+                        <a:buSzPts val="1100"/>
+                        <a:buFont typeface="Arial"/>
+                        <a:buNone/>
+                      </a:pPr>
+                      <a:r>
+                        <a:t/>
+                      </a:r>
+                      <a:endParaRPr b="1" sz="800">
+                        <a:solidFill>
+                          <a:srgbClr val="214F93"/>
+                        </a:solidFill>
+                        <a:latin typeface="Arial"/>
+                        <a:ea typeface="Arial"/>
+                        <a:cs typeface="Arial"/>
+                        <a:sym typeface="Arial"/>
+                      </a:endParaRPr>
                     </a:p>
                     <a:p>
                       <a:pPr indent="0" lvl="0" marL="0" rtl="0" algn="l">
@@ -6350,213 +6983,12 @@
                         <a:buNone/>
                       </a:pPr>
                       <a:r>
-                        <a:rPr lang="en" sz="750"/>
-                        <a:t>% of items correct: all students 63%, SWD 49%, ELL 44%. Three skills to improve (all / SWD / ELL):</a:t>
+                        <a:t/>
                       </a:r>
-                      <a:endParaRPr sz="750"/>
-                    </a:p>
-                    <a:p>
-                      <a:pPr indent="-101600" lvl="0" marL="101600" rtl="0" algn="l">
-                        <a:spcBef>
-                          <a:spcPts val="100"/>
-                        </a:spcBef>
-                        <a:spcAft>
-                          <a:spcPts val="0"/>
-                        </a:spcAft>
-                        <a:buSzPct val="100000"/>
-                        <a:buChar char="•"/>
-                      </a:pPr>
-                      <a:r>
-                        <a:rPr lang="en" sz="750" b="1"/>
-                        <a:t>Evaluate details in a text, determining which could confirm or disprove an argument or position</a:t>
-                      </a:r>
-                      <a:r>
-                        <a:rPr lang="en" sz="750"/>
-                        <a:t xml:space="preserve"> (10.RI.1.C): 53% / 40% / 32%.</a:t>
-                      </a:r>
-                      <a:endParaRPr sz="750"/>
-                    </a:p>
-                    <a:p>
-                      <a:pPr indent="-101600" lvl="0" marL="101600" rtl="0" algn="l">
-                        <a:spcBef>
-                          <a:spcPts val="100"/>
-                        </a:spcBef>
-                        <a:spcAft>
-                          <a:spcPts val="0"/>
-                        </a:spcAft>
-                        <a:buSzPct val="100000"/>
-                        <a:buChar char="•"/>
-                      </a:pPr>
-                      <a:r>
-                        <a:rPr lang="en" sz="750" b="1"/>
-                        <a:t>Analyze how characters are revealed through particular lines of dialogue or events</a:t>
-                      </a:r>
-                      <a:r>
-                        <a:rPr lang="en" sz="750"/>
-                        <a:t xml:space="preserve"> (11.RL.1.C): 61% / 53% / 30%; most-tested standard.</a:t>
-                      </a:r>
-                      <a:endParaRPr sz="750"/>
-                    </a:p>
-                    <a:p>
-                      <a:pPr indent="-101600" lvl="0" marL="101600" rtl="0" algn="l">
-                        <a:spcBef>
-                          <a:spcPts val="100"/>
-                        </a:spcBef>
-                        <a:spcAft>
-                          <a:spcPts val="0"/>
-                        </a:spcAft>
-                        <a:buSzPct val="100000"/>
-                        <a:buChar char="•"/>
-                      </a:pPr>
-                      <a:r>
-                        <a:rPr lang="en" sz="750" b="1"/>
-                        <a:t>Use context and sentence structure clues to clarify the meaning of words</a:t>
-                      </a:r>
-                      <a:r>
-                        <a:rPr lang="en" sz="750"/>
-                        <a:t xml:space="preserve"> (11.RVN.1.B): 52% / 51% / 40%.</a:t>
-                      </a:r>
-                      <a:endParaRPr sz="750"/>
-                    </a:p>
-                    <a:p>
-                      <a:pPr indent="0" lvl="0" marL="0" rtl="0" algn="l">
-                        <a:spcBef>
-                          <a:spcPts val="200"/>
-                        </a:spcBef>
-                        <a:spcAft>
-                          <a:spcPts val="0"/>
-                        </a:spcAft>
-                        <a:buNone/>
-                      </a:pPr>
-                      <a:r>
-                        <a:rPr lang="en" sz="900" b="1">
-                          <a:solidFill>
-                            <a:srgbClr val="214F93"/>
-                          </a:solidFill>
-                        </a:rPr>
-                        <a:t>Changes to Tier 1</a:t>
-                      </a:r>
-                      <a:endParaRPr sz="900"/>
-                    </a:p>
-                    <a:p>
-                      <a:pPr indent="-101600" lvl="0" marL="101600" rtl="0" algn="l">
-                        <a:spcBef>
-                          <a:spcPts val="100"/>
-                        </a:spcBef>
-                        <a:spcAft>
-                          <a:spcPts val="0"/>
-                        </a:spcAft>
-                        <a:buSzPct val="100000"/>
-                        <a:buChar char="•"/>
-                      </a:pPr>
-                      <a:r>
-                        <a:rPr lang="en" sz="750" b="1"/>
-                        <a:t>Claim check:</a:t>
-                      </a:r>
-                      <a:r>
-                        <a:rPr lang="en" sz="750"/>
-                        <a:t xml:space="preserve"> weekly paired-passage task where students decide which details confirm or disprove a claim; teacher think-aloud + PEE/CER.</a:t>
-                      </a:r>
-                      <a:endParaRPr sz="750"/>
-                    </a:p>
-                    <a:p>
-                      <a:pPr indent="-101600" lvl="0" marL="101600" rtl="0" algn="l">
-                        <a:spcBef>
-                          <a:spcPts val="100"/>
-                        </a:spcBef>
-                        <a:spcAft>
-                          <a:spcPts val="0"/>
-                        </a:spcAft>
-                        <a:buSzPct val="100000"/>
-                        <a:buChar char="•"/>
-                      </a:pPr>
-                      <a:r>
-                        <a:rPr lang="en" sz="750" b="1"/>
-                        <a:t>Character annotation:</a:t>
-                      </a:r>
-                      <a:r>
-                        <a:rPr lang="en" sz="750"/>
-                        <a:t xml:space="preserve"> mark a line of dialogue or an event, then write what it reveals; organizer for SWD/ELL.</a:t>
-                      </a:r>
-                      <a:endParaRPr sz="750"/>
-                    </a:p>
-                    <a:p>
-                      <a:pPr indent="-101600" lvl="0" marL="101600" rtl="0" algn="l">
-                        <a:spcBef>
-                          <a:spcPts val="100"/>
-                        </a:spcBef>
-                        <a:spcAft>
-                          <a:spcPts val="0"/>
-                        </a:spcAft>
-                        <a:buSzPct val="100000"/>
-                        <a:buChar char="•"/>
-                      </a:pPr>
-                      <a:r>
-                        <a:rPr lang="en" sz="750" b="1"/>
-                        <a:t>Context-clue routine:</a:t>
-                      </a:r>
-                      <a:r>
-                        <a:rPr lang="en" sz="750"/>
-                        <a:t xml:space="preserve"> daily 5-minute word-meaning practice; pre-teach key words for ELL.</a:t>
-                      </a:r>
-                      <a:endParaRPr sz="750"/>
-                    </a:p>
-                    <a:p>
-                      <a:pPr indent="0" lvl="0" marL="0" rtl="0" algn="l">
-                        <a:spcBef>
-                          <a:spcPts val="200"/>
-                        </a:spcBef>
-                        <a:spcAft>
-                          <a:spcPts val="0"/>
-                        </a:spcAft>
-                        <a:buNone/>
-                      </a:pPr>
-                      <a:r>
-                        <a:rPr lang="en" sz="900" b="1">
-                          <a:solidFill>
-                            <a:srgbClr val="214F93"/>
-                          </a:solidFill>
-                        </a:rPr>
-                        <a:t>Monitoring</a:t>
-                      </a:r>
-                      <a:endParaRPr sz="900"/>
-                    </a:p>
-                    <a:p>
-                      <a:pPr indent="-101600" lvl="0" marL="101600" rtl="0" algn="l">
-                        <a:spcBef>
-                          <a:spcPts val="100"/>
-                        </a:spcBef>
-                        <a:spcAft>
-                          <a:spcPts val="0"/>
-                        </a:spcAft>
-                        <a:buSzPct val="100000"/>
-                        <a:buChar char="•"/>
-                      </a:pPr>
-                      <a:r>
-                        <a:rPr lang="en" sz="750"/>
-                        <a:t>One 5-item CFU per skill every 3 weeks; MP1 benchmark on these three SOLs for all/SWD/ELL.</a:t>
-                      </a:r>
-                      <a:endParaRPr sz="750"/>
-                    </a:p>
-                    <a:p>
-                      <a:pPr indent="-101600" lvl="0" marL="101600" rtl="0" algn="l">
-                        <a:spcBef>
-                          <a:spcPts val="100"/>
-                        </a:spcBef>
-                        <a:spcAft>
-                          <a:spcPts val="0"/>
-                        </a:spcAft>
-                        <a:buSzPct val="100000"/>
-                        <a:buChar char="•"/>
-                      </a:pPr>
-                      <a:r>
-                        <a:rPr lang="en" sz="750"/>
-                        <a:t>Walkthroughs check the three routines; PLC reviews student samples monthly.</a:t>
-                      </a:r>
-                      <a:endParaRPr sz="750"/>
+                      <a:endParaRPr sz="1000"/>
                     </a:p>
                   </a:txBody>
-                  <a:tcPr marT="45725" marB="45725" marR="54864" marL="54864">
+                  <a:tcPr marT="45725" marB="45725" marR="91450" marL="91450">
                     <a:lnL cap="flat" cmpd="sng" w="9525">
                       <a:solidFill>
                         <a:srgbClr val="000000"/>
@@ -6604,8 +7036,670 @@
                     <a:lstStyle/>
                     <a:p>
                       <a:pPr indent="0" lvl="0" marL="0" rtl="0" algn="l">
+                        <a:lnSpc>
+                          <a:spcPct val="115000"/>
+                        </a:lnSpc>
                         <a:spcBef>
+                          <a:spcPts val="1200"/>
+                        </a:spcBef>
+                        <a:spcAft>
                           <a:spcPts val="0"/>
+                        </a:spcAft>
+                        <a:buNone/>
+                      </a:pPr>
+                      <a:r>
+                        <a:rPr lang="en" sz="800">
+                          <a:solidFill>
+                            <a:schemeClr val="dk1"/>
+                          </a:solidFill>
+                          <a:latin typeface="Arial"/>
+                          <a:ea typeface="Arial"/>
+                          <a:cs typeface="Arial"/>
+                          <a:sym typeface="Arial"/>
+                        </a:rPr>
+                        <a:t>Overall student achievement data demonstrated positive growth from 2025 to 2026, with performance increasing by 3 percentage points overall. However, during the same period, performance among English Language Learners (ELL/MLL) decreased by 17 percentage points. This decline identifies a significant subgroup performance gap and establishes ELL/MLL achievement as a priority area for continued improvement.</a:t>
+                      </a:r>
+                      <a:endParaRPr sz="800">
+                        <a:solidFill>
+                          <a:schemeClr val="dk1"/>
+                        </a:solidFill>
+                        <a:latin typeface="Arial"/>
+                        <a:ea typeface="Arial"/>
+                        <a:cs typeface="Arial"/>
+                        <a:sym typeface="Arial"/>
+                      </a:endParaRPr>
+                    </a:p>
+                    <a:p>
+                      <a:pPr indent="0" lvl="0" marL="0" rtl="0" algn="l">
+                        <a:lnSpc>
+                          <a:spcPct val="115000"/>
+                        </a:lnSpc>
+                        <a:spcBef>
+                          <a:spcPts val="1200"/>
+                        </a:spcBef>
+                        <a:spcAft>
+                          <a:spcPts val="0"/>
+                        </a:spcAft>
+                        <a:buNone/>
+                      </a:pPr>
+                      <a:r>
+                        <a:rPr lang="en" sz="800">
+                          <a:solidFill>
+                            <a:schemeClr val="dk1"/>
+                          </a:solidFill>
+                          <a:latin typeface="Arial"/>
+                          <a:ea typeface="Arial"/>
+                          <a:cs typeface="Arial"/>
+                          <a:sym typeface="Arial"/>
+                        </a:rPr>
+                        <a:t>To address the identified performance gap, Tier 1 instruction will focus on strengthening students’ access to grade-level content while maintaining appropriate academic rigor. Particular attention will be given to embedding consistent language and instructional scaffolds into daily instruction to support ELL/MLL students in both developing content knowledge and demonstrating their understanding.</a:t>
+                      </a:r>
+                      <a:endParaRPr sz="800">
+                        <a:solidFill>
+                          <a:schemeClr val="dk1"/>
+                        </a:solidFill>
+                        <a:latin typeface="Arial"/>
+                        <a:ea typeface="Arial"/>
+                        <a:cs typeface="Arial"/>
+                        <a:sym typeface="Arial"/>
+                      </a:endParaRPr>
+                    </a:p>
+                    <a:p>
+                      <a:pPr indent="0" lvl="0" marL="0" rtl="0" algn="l">
+                        <a:lnSpc>
+                          <a:spcPct val="115000"/>
+                        </a:lnSpc>
+                        <a:spcBef>
+                          <a:spcPts val="1200"/>
+                        </a:spcBef>
+                        <a:spcAft>
+                          <a:spcPts val="0"/>
+                        </a:spcAft>
+                        <a:buNone/>
+                      </a:pPr>
+                      <a:r>
+                        <a:rPr lang="en" sz="800">
+                          <a:solidFill>
+                            <a:schemeClr val="dk1"/>
+                          </a:solidFill>
+                          <a:latin typeface="Arial"/>
+                          <a:ea typeface="Arial"/>
+                          <a:cs typeface="Arial"/>
+                          <a:sym typeface="Arial"/>
+                        </a:rPr>
+                        <a:t>Tier 1 instructional strategies will include  reinforcing academic and content-specific vocabulary, incorporating visuals and models, utilizing anchor charts and other reference tools, chunking complex texts and multi-step directions, explicitly modeling problems and key processes, and providing structured opportunities for academic discussion and student discourse.</a:t>
+                      </a:r>
+                      <a:endParaRPr sz="800">
+                        <a:solidFill>
+                          <a:schemeClr val="dk1"/>
+                        </a:solidFill>
+                        <a:latin typeface="Arial"/>
+                        <a:ea typeface="Arial"/>
+                        <a:cs typeface="Arial"/>
+                        <a:sym typeface="Arial"/>
+                      </a:endParaRPr>
+                    </a:p>
+                    <a:p>
+                      <a:pPr indent="0" lvl="0" marL="0" rtl="0" algn="l">
+                        <a:lnSpc>
+                          <a:spcPct val="115000"/>
+                        </a:lnSpc>
+                        <a:spcBef>
+                          <a:spcPts val="1200"/>
+                        </a:spcBef>
+                        <a:spcAft>
+                          <a:spcPts val="0"/>
+                        </a:spcAft>
+                        <a:buNone/>
+                      </a:pPr>
+                      <a:r>
+                        <a:rPr lang="en" sz="800">
+                          <a:solidFill>
+                            <a:schemeClr val="dk1"/>
+                          </a:solidFill>
+                          <a:latin typeface="Arial"/>
+                          <a:ea typeface="Arial"/>
+                          <a:cs typeface="Arial"/>
+                          <a:sym typeface="Arial"/>
+                        </a:rPr>
+                        <a:t>Teachers will use frequent checks for understanding and formative assessment data to identify misconceptions and determine when additional modeling, scaffolding, small-group instruction, or reteaching is necessary.</a:t>
+                      </a:r>
+                      <a:endParaRPr sz="800">
+                        <a:solidFill>
+                          <a:schemeClr val="dk1"/>
+                        </a:solidFill>
+                        <a:latin typeface="Arial"/>
+                        <a:ea typeface="Arial"/>
+                        <a:cs typeface="Arial"/>
+                        <a:sym typeface="Arial"/>
+                      </a:endParaRPr>
+                    </a:p>
+                    <a:p>
+                      <a:pPr indent="0" lvl="0" marL="0" rtl="0" algn="l">
+                        <a:lnSpc>
+                          <a:spcPct val="115000"/>
+                        </a:lnSpc>
+                        <a:spcBef>
+                          <a:spcPts val="1400"/>
+                        </a:spcBef>
+                        <a:spcAft>
+                          <a:spcPts val="0"/>
+                        </a:spcAft>
+                        <a:buNone/>
+                      </a:pPr>
+                      <a:r>
+                        <a:rPr lang="en" sz="800">
+                          <a:solidFill>
+                            <a:schemeClr val="dk1"/>
+                          </a:solidFill>
+                          <a:latin typeface="Arial"/>
+                          <a:ea typeface="Arial"/>
+                          <a:cs typeface="Arial"/>
+                          <a:sym typeface="Arial"/>
+                        </a:rPr>
+                        <a:t>The goal is to maintain or improve upon the 3-percentage-point overall growth while reversing the 17-percentage-point decline among ELL/MLL students. Tier 1 instruction will intentionally integrate language development with content instruction so that ELL/MLL students have increased opportunities to access grade-level standards and independently demonstrate mastery.</a:t>
+                      </a:r>
+                      <a:endParaRPr sz="800">
+                        <a:solidFill>
+                          <a:schemeClr val="dk1"/>
+                        </a:solidFill>
+                        <a:latin typeface="Arial"/>
+                        <a:ea typeface="Arial"/>
+                        <a:cs typeface="Arial"/>
+                        <a:sym typeface="Arial"/>
+                      </a:endParaRPr>
+                    </a:p>
+                    <a:p>
+                      <a:pPr indent="0" lvl="0" marL="0" rtl="0" algn="l">
+                        <a:lnSpc>
+                          <a:spcPct val="115000"/>
+                        </a:lnSpc>
+                        <a:spcBef>
+                          <a:spcPts val="1200"/>
+                        </a:spcBef>
+                        <a:spcAft>
+                          <a:spcPts val="0"/>
+                        </a:spcAft>
+                        <a:buNone/>
+                      </a:pPr>
+                      <a:r>
+                        <a:rPr lang="en" sz="800">
+                          <a:solidFill>
+                            <a:schemeClr val="dk1"/>
+                          </a:solidFill>
+                          <a:latin typeface="Arial"/>
+                          <a:ea typeface="Arial"/>
+                          <a:cs typeface="Arial"/>
+                          <a:sym typeface="Arial"/>
+                        </a:rPr>
+                        <a:t>Progress will be monitored through formative assessments, constructed responses, unit assessments, and benchmark data, with results regularly disaggregated by ELL/MLL status. Data will be reviewed at established checkpoints to identify trends, evaluate the effectiveness of Tier 1 instructional strategies, and make timely adjustments to instruction based on student needs.</a:t>
+                      </a:r>
+                      <a:endParaRPr sz="800">
+                        <a:solidFill>
+                          <a:schemeClr val="dk1"/>
+                        </a:solidFill>
+                        <a:latin typeface="Arial"/>
+                        <a:ea typeface="Arial"/>
+                        <a:cs typeface="Arial"/>
+                        <a:sym typeface="Arial"/>
+                      </a:endParaRPr>
+                    </a:p>
+                    <a:p>
+                      <a:pPr indent="0" lvl="0" marL="0" rtl="0" algn="l">
+                        <a:lnSpc>
+                          <a:spcPct val="115000"/>
+                        </a:lnSpc>
+                        <a:spcBef>
+                          <a:spcPts val="1200"/>
+                        </a:spcBef>
+                        <a:spcAft>
+                          <a:spcPts val="0"/>
+                        </a:spcAft>
+                        <a:buNone/>
+                      </a:pPr>
+                      <a:r>
+                        <a:rPr lang="en" sz="800">
+                          <a:solidFill>
+                            <a:schemeClr val="dk1"/>
+                          </a:solidFill>
+                          <a:latin typeface="Arial"/>
+                          <a:ea typeface="Arial"/>
+                          <a:cs typeface="Arial"/>
+                          <a:sym typeface="Arial"/>
+                        </a:rPr>
+                        <a:t>Evidence of success will include increased ELL/MLL performance across assessment checkpoints, a reduction in the achievement gap between ELL/MLL students and the overall student population, and continued growth in overall student achievement.</a:t>
+                      </a:r>
+                      <a:endParaRPr sz="800">
+                        <a:solidFill>
+                          <a:schemeClr val="dk1"/>
+                        </a:solidFill>
+                        <a:latin typeface="Arial"/>
+                        <a:ea typeface="Arial"/>
+                        <a:cs typeface="Arial"/>
+                        <a:sym typeface="Arial"/>
+                      </a:endParaRPr>
+                    </a:p>
+                    <a:p>
+                      <a:pPr indent="0" lvl="0" marL="0" rtl="0" algn="l">
+                        <a:lnSpc>
+                          <a:spcPct val="115000"/>
+                        </a:lnSpc>
+                        <a:spcBef>
+                          <a:spcPts val="1200"/>
+                        </a:spcBef>
+                        <a:spcAft>
+                          <a:spcPts val="1200"/>
+                        </a:spcAft>
+                        <a:buNone/>
+                      </a:pPr>
+                      <a:r>
+                        <a:t/>
+                      </a:r>
+                      <a:endParaRPr sz="800">
+                        <a:solidFill>
+                          <a:schemeClr val="dk1"/>
+                        </a:solidFill>
+                        <a:latin typeface="Arial"/>
+                        <a:ea typeface="Arial"/>
+                        <a:cs typeface="Arial"/>
+                        <a:sym typeface="Arial"/>
+                      </a:endParaRPr>
+                    </a:p>
+                  </a:txBody>
+                  <a:tcPr marT="45725" marB="45725" marR="91450" marL="91450">
+                    <a:lnL cap="flat" cmpd="sng" w="9525">
+                      <a:solidFill>
+                        <a:srgbClr val="000000"/>
+                      </a:solidFill>
+                      <a:prstDash val="solid"/>
+                      <a:round/>
+                      <a:headEnd len="sm" w="sm" type="none"/>
+                      <a:tailEnd len="sm" w="sm" type="none"/>
+                    </a:lnL>
+                    <a:lnR cap="flat" cmpd="sng" w="9525">
+                      <a:solidFill>
+                        <a:srgbClr val="000000"/>
+                      </a:solidFill>
+                      <a:prstDash val="solid"/>
+                      <a:round/>
+                      <a:headEnd len="sm" w="sm" type="none"/>
+                      <a:tailEnd len="sm" w="sm" type="none"/>
+                    </a:lnR>
+                    <a:lnT cap="flat" cmpd="sng" w="9525">
+                      <a:solidFill>
+                        <a:srgbClr val="000000"/>
+                      </a:solidFill>
+                      <a:prstDash val="solid"/>
+                      <a:round/>
+                      <a:headEnd len="sm" w="sm" type="none"/>
+                      <a:tailEnd len="sm" w="sm" type="none"/>
+                    </a:lnT>
+                    <a:lnB cap="flat" cmpd="sng" w="9525">
+                      <a:solidFill>
+                        <a:srgbClr val="000000"/>
+                      </a:solidFill>
+                      <a:prstDash val="solid"/>
+                      <a:round/>
+                      <a:headEnd len="sm" w="sm" type="none"/>
+                      <a:tailEnd len="sm" w="sm" type="none"/>
+                    </a:lnB>
+                    <a:solidFill>
+                      <a:srgbClr val="FFFFFF"/>
+                    </a:solidFill>
+                  </a:tcPr>
+                </a:tc>
+                <a:tc rowSpan="6">
+                  <a:txBody>
+                    <a:bodyPr/>
+                    <a:lstStyle/>
+                    <a:p>
+                      <a:pPr indent="0" lvl="0" marL="0" rtl="0" algn="l">
+                        <a:lnSpc>
+                          <a:spcPct val="115000"/>
+                        </a:lnSpc>
+                        <a:spcBef>
+                          <a:spcPts val="1200"/>
+                        </a:spcBef>
+                        <a:spcAft>
+                          <a:spcPts val="0"/>
+                        </a:spcAft>
+                        <a:buClr>
+                          <a:schemeClr val="dk1"/>
+                        </a:buClr>
+                        <a:buSzPts val="1100"/>
+                        <a:buFont typeface="Arial"/>
+                        <a:buNone/>
+                      </a:pPr>
+                      <a:r>
+                        <a:rPr lang="en" sz="800">
+                          <a:solidFill>
+                            <a:schemeClr val="dk1"/>
+                          </a:solidFill>
+                          <a:latin typeface="Arial"/>
+                          <a:ea typeface="Arial"/>
+                          <a:cs typeface="Arial"/>
+                          <a:sym typeface="Arial"/>
+                        </a:rPr>
+                        <a:t>Significant Gaps</a:t>
+                      </a:r>
+                      <a:endParaRPr sz="800">
+                        <a:solidFill>
+                          <a:schemeClr val="dk1"/>
+                        </a:solidFill>
+                        <a:latin typeface="Arial"/>
+                        <a:ea typeface="Arial"/>
+                        <a:cs typeface="Arial"/>
+                        <a:sym typeface="Arial"/>
+                      </a:endParaRPr>
+                    </a:p>
+                    <a:p>
+                      <a:pPr indent="0" lvl="0" marL="0" rtl="0" algn="l">
+                        <a:lnSpc>
+                          <a:spcPct val="115000"/>
+                        </a:lnSpc>
+                        <a:spcBef>
+                          <a:spcPts val="1200"/>
+                        </a:spcBef>
+                        <a:spcAft>
+                          <a:spcPts val="0"/>
+                        </a:spcAft>
+                        <a:buClr>
+                          <a:schemeClr val="dk1"/>
+                        </a:buClr>
+                        <a:buSzPts val="1100"/>
+                        <a:buFont typeface="Arial"/>
+                        <a:buNone/>
+                      </a:pPr>
+                      <a:r>
+                        <a:rPr lang="en" sz="800">
+                          <a:solidFill>
+                            <a:schemeClr val="dk1"/>
+                          </a:solidFill>
+                          <a:latin typeface="Arial"/>
+                          <a:ea typeface="Arial"/>
+                          <a:cs typeface="Arial"/>
+                          <a:sym typeface="Arial"/>
+                        </a:rPr>
+                        <a:t>Prior-year analysis showed students performing well on recall tasks (75–82%) but substantially lower on reasoning tasks (50–56%). The gap is in applying content through analysis, interpretation, prediction, and justification, not in content knowledge. End-of-year SOL results support continuing last year's instructional adjustments.</a:t>
+                      </a:r>
+                      <a:endParaRPr sz="800">
+                        <a:solidFill>
+                          <a:schemeClr val="dk1"/>
+                        </a:solidFill>
+                        <a:latin typeface="Arial"/>
+                        <a:ea typeface="Arial"/>
+                        <a:cs typeface="Arial"/>
+                        <a:sym typeface="Arial"/>
+                      </a:endParaRPr>
+                    </a:p>
+                    <a:p>
+                      <a:pPr indent="0" lvl="0" marL="0" rtl="0" algn="l">
+                        <a:lnSpc>
+                          <a:spcPct val="115000"/>
+                        </a:lnSpc>
+                        <a:spcBef>
+                          <a:spcPts val="1200"/>
+                        </a:spcBef>
+                        <a:spcAft>
+                          <a:spcPts val="0"/>
+                        </a:spcAft>
+                        <a:buClr>
+                          <a:schemeClr val="dk1"/>
+                        </a:buClr>
+                        <a:buSzPts val="1100"/>
+                        <a:buFont typeface="Arial"/>
+                        <a:buNone/>
+                      </a:pPr>
+                      <a:r>
+                        <a:rPr lang="en" sz="800">
+                          <a:solidFill>
+                            <a:schemeClr val="dk1"/>
+                          </a:solidFill>
+                          <a:latin typeface="Arial"/>
+                          <a:ea typeface="Arial"/>
+                          <a:cs typeface="Arial"/>
+                          <a:sym typeface="Arial"/>
+                        </a:rPr>
+                        <a:t>Changes &amp; Adjustments to Tier 1</a:t>
+                      </a:r>
+                      <a:endParaRPr sz="800">
+                        <a:solidFill>
+                          <a:schemeClr val="dk1"/>
+                        </a:solidFill>
+                        <a:latin typeface="Arial"/>
+                        <a:ea typeface="Arial"/>
+                        <a:cs typeface="Arial"/>
+                        <a:sym typeface="Arial"/>
+                      </a:endParaRPr>
+                    </a:p>
+                    <a:p>
+                      <a:pPr indent="0" lvl="0" marL="0" rtl="0" algn="l">
+                        <a:lnSpc>
+                          <a:spcPct val="115000"/>
+                        </a:lnSpc>
+                        <a:spcBef>
+                          <a:spcPts val="1200"/>
+                        </a:spcBef>
+                        <a:spcAft>
+                          <a:spcPts val="0"/>
+                        </a:spcAft>
+                        <a:buClr>
+                          <a:schemeClr val="dk1"/>
+                        </a:buClr>
+                        <a:buSzPts val="1100"/>
+                        <a:buFont typeface="Arial"/>
+                        <a:buNone/>
+                      </a:pPr>
+                      <a:r>
+                        <a:rPr lang="en" sz="800">
+                          <a:solidFill>
+                            <a:schemeClr val="dk1"/>
+                          </a:solidFill>
+                          <a:latin typeface="Arial"/>
+                          <a:ea typeface="Arial"/>
+                          <a:cs typeface="Arial"/>
+                          <a:sym typeface="Arial"/>
+                        </a:rPr>
+                        <a:t>Teachers explicitly teach task verbs and raise cognitive demand through graphing and data analysis, CERs, mind mapping, and multistep questions and problem sets. Think-alouds and structured supports model reasoning while maintaining rigor. Instruction anticipates prerequisite gaps and misconceptions and addresses them </a:t>
+                      </a:r>
+                      <a:r>
+                        <a:rPr lang="en" sz="800">
+                          <a:solidFill>
+                            <a:schemeClr val="dk1"/>
+                          </a:solidFill>
+                          <a:latin typeface="Arial"/>
+                          <a:ea typeface="Arial"/>
+                          <a:cs typeface="Arial"/>
+                          <a:sym typeface="Arial"/>
+                        </a:rPr>
+                        <a:t>preemptively</a:t>
+                      </a:r>
+                      <a:r>
+                        <a:rPr lang="en" sz="800">
+                          <a:solidFill>
+                            <a:schemeClr val="dk1"/>
+                          </a:solidFill>
+                          <a:latin typeface="Arial"/>
+                          <a:ea typeface="Arial"/>
+                          <a:cs typeface="Arial"/>
+                          <a:sym typeface="Arial"/>
+                        </a:rPr>
+                        <a:t>.</a:t>
+                      </a:r>
+                      <a:endParaRPr sz="800">
+                        <a:solidFill>
+                          <a:schemeClr val="dk1"/>
+                        </a:solidFill>
+                        <a:latin typeface="Arial"/>
+                        <a:ea typeface="Arial"/>
+                        <a:cs typeface="Arial"/>
+                        <a:sym typeface="Arial"/>
+                      </a:endParaRPr>
+                    </a:p>
+                    <a:p>
+                      <a:pPr indent="0" lvl="0" marL="0" rtl="0" algn="l">
+                        <a:lnSpc>
+                          <a:spcPct val="115000"/>
+                        </a:lnSpc>
+                        <a:spcBef>
+                          <a:spcPts val="1200"/>
+                        </a:spcBef>
+                        <a:spcAft>
+                          <a:spcPts val="0"/>
+                        </a:spcAft>
+                        <a:buClr>
+                          <a:schemeClr val="dk1"/>
+                        </a:buClr>
+                        <a:buSzPts val="1100"/>
+                        <a:buFont typeface="Arial"/>
+                        <a:buNone/>
+                      </a:pPr>
+                      <a:r>
+                        <a:rPr lang="en" sz="800">
+                          <a:solidFill>
+                            <a:schemeClr val="dk1"/>
+                          </a:solidFill>
+                          <a:latin typeface="Arial"/>
+                          <a:ea typeface="Arial"/>
+                          <a:cs typeface="Arial"/>
+                          <a:sym typeface="Arial"/>
+                        </a:rPr>
+                        <a:t>Adjustments this year: continue targeting most-missed strands, reflect on student responses and redesign instruction, and adjust scaffolds while holding cognitive demand. A consistent routine of unpack the verb, identify evidence, justify the answer builds student independence.</a:t>
+                      </a:r>
+                      <a:endParaRPr sz="800">
+                        <a:solidFill>
+                          <a:schemeClr val="dk1"/>
+                        </a:solidFill>
+                        <a:latin typeface="Arial"/>
+                        <a:ea typeface="Arial"/>
+                        <a:cs typeface="Arial"/>
+                        <a:sym typeface="Arial"/>
+                      </a:endParaRPr>
+                    </a:p>
+                    <a:p>
+                      <a:pPr indent="0" lvl="0" marL="0" rtl="0" algn="l">
+                        <a:lnSpc>
+                          <a:spcPct val="115000"/>
+                        </a:lnSpc>
+                        <a:spcBef>
+                          <a:spcPts val="1200"/>
+                        </a:spcBef>
+                        <a:spcAft>
+                          <a:spcPts val="0"/>
+                        </a:spcAft>
+                        <a:buClr>
+                          <a:schemeClr val="dk1"/>
+                        </a:buClr>
+                        <a:buSzPts val="1100"/>
+                        <a:buFont typeface="Arial"/>
+                        <a:buNone/>
+                      </a:pPr>
+                      <a:r>
+                        <a:rPr lang="en" sz="800">
+                          <a:solidFill>
+                            <a:schemeClr val="dk1"/>
+                          </a:solidFill>
+                          <a:latin typeface="Arial"/>
+                          <a:ea typeface="Arial"/>
+                          <a:cs typeface="Arial"/>
+                          <a:sym typeface="Arial"/>
+                        </a:rPr>
+                        <a:t>Monitoring &amp; Evidence</a:t>
+                      </a:r>
+                      <a:endParaRPr sz="800">
+                        <a:solidFill>
+                          <a:schemeClr val="dk1"/>
+                        </a:solidFill>
+                        <a:latin typeface="Arial"/>
+                        <a:ea typeface="Arial"/>
+                        <a:cs typeface="Arial"/>
+                        <a:sym typeface="Arial"/>
+                      </a:endParaRPr>
+                    </a:p>
+                    <a:p>
+                      <a:pPr indent="0" lvl="0" marL="0" rtl="0" algn="l">
+                        <a:lnSpc>
+                          <a:spcPct val="115000"/>
+                        </a:lnSpc>
+                        <a:spcBef>
+                          <a:spcPts val="1200"/>
+                        </a:spcBef>
+                        <a:spcAft>
+                          <a:spcPts val="0"/>
+                        </a:spcAft>
+                        <a:buClr>
+                          <a:schemeClr val="dk1"/>
+                        </a:buClr>
+                        <a:buSzPts val="1100"/>
+                        <a:buFont typeface="Arial"/>
+                        <a:buNone/>
+                      </a:pPr>
+                      <a:r>
+                        <a:rPr lang="en" sz="800">
+                          <a:solidFill>
+                            <a:schemeClr val="dk1"/>
+                          </a:solidFill>
+                          <a:latin typeface="Arial"/>
+                          <a:ea typeface="Arial"/>
+                          <a:cs typeface="Arial"/>
+                          <a:sym typeface="Arial"/>
+                        </a:rPr>
+                        <a:t>PLC review of unit packets, shared instructional tasks, student work, and common formative assessments documents consistent implementation and drives collaborative revision.</a:t>
+                      </a:r>
+                      <a:endParaRPr sz="800">
+                        <a:solidFill>
+                          <a:schemeClr val="dk1"/>
+                        </a:solidFill>
+                        <a:latin typeface="Arial"/>
+                        <a:ea typeface="Arial"/>
+                        <a:cs typeface="Arial"/>
+                        <a:sym typeface="Arial"/>
+                      </a:endParaRPr>
+                    </a:p>
+                    <a:p>
+                      <a:pPr indent="0" lvl="0" marL="0" rtl="0" algn="l">
+                        <a:lnSpc>
+                          <a:spcPct val="115000"/>
+                        </a:lnSpc>
+                        <a:spcBef>
+                          <a:spcPts val="1200"/>
+                        </a:spcBef>
+                        <a:spcAft>
+                          <a:spcPts val="0"/>
+                        </a:spcAft>
+                        <a:buClr>
+                          <a:schemeClr val="dk1"/>
+                        </a:buClr>
+                        <a:buSzPts val="1100"/>
+                        <a:buFont typeface="Arial"/>
+                        <a:buNone/>
+                      </a:pPr>
+                      <a:r>
+                        <a:rPr lang="en" sz="800">
+                          <a:solidFill>
+                            <a:schemeClr val="dk1"/>
+                          </a:solidFill>
+                          <a:latin typeface="Arial"/>
+                          <a:ea typeface="Arial"/>
+                          <a:cs typeface="Arial"/>
+                          <a:sym typeface="Arial"/>
+                        </a:rPr>
+                        <a:t>Evidence to date is implementation evidence: unit packets, anchor charts, and shared reasoning tasks. Outcome data begins at the first common assessment, with strand-level SOL analysis to follow once results are released.</a:t>
+                      </a:r>
+                      <a:endParaRPr sz="800">
+                        <a:solidFill>
+                          <a:schemeClr val="dk1"/>
+                        </a:solidFill>
+                        <a:latin typeface="Arial"/>
+                        <a:ea typeface="Arial"/>
+                        <a:cs typeface="Arial"/>
+                        <a:sym typeface="Arial"/>
+                      </a:endParaRPr>
+                    </a:p>
+                    <a:p>
+                      <a:pPr indent="0" lvl="0" marL="0" rtl="0" algn="l">
+                        <a:spcBef>
+                          <a:spcPts val="1200"/>
                         </a:spcBef>
                         <a:spcAft>
                           <a:spcPts val="0"/>
@@ -6615,7 +7709,15 @@
                       <a:r>
                         <a:t/>
                       </a:r>
-                      <a:endParaRPr sz="1100"/>
+                      <a:endParaRPr sz="800">
+                        <a:solidFill>
+                          <a:schemeClr val="dk1"/>
+                        </a:solidFill>
+                        <a:latin typeface="Arial"/>
+                        <a:ea typeface="Arial"/>
+                        <a:cs typeface="Arial"/>
+                        <a:sym typeface="Arial"/>
+                      </a:endParaRPr>
                     </a:p>
                   </a:txBody>
                   <a:tcPr marT="45725" marB="45725" marR="91450" marL="91450">
@@ -6675,57 +7777,11 @@
                         <a:buNone/>
                       </a:pPr>
                       <a:r>
-                        <a:t/>
+                        <a:rPr lang="en" sz="900"/>
+                        <a:t>Overall data showed significant improvement and notable gains from 2025 to 2026. While overall performance increased, a small performance gap emerged among MLL students, highlighting an area for continued focus and targeted support.</a:t>
                       </a:r>
-                      <a:endParaRPr sz="1100"/>
+                      <a:endParaRPr sz="900"/>
                     </a:p>
-                  </a:txBody>
-                  <a:tcPr marT="45725" marB="45725" marR="91450" marL="91450">
-                    <a:lnL cap="flat" cmpd="sng" w="9525">
-                      <a:solidFill>
-                        <a:srgbClr val="000000"/>
-                      </a:solidFill>
-                      <a:prstDash val="solid"/>
-                      <a:round/>
-                      <a:headEnd len="sm" w="sm" type="none"/>
-                      <a:tailEnd len="sm" w="sm" type="none"/>
-                    </a:lnL>
-                    <a:lnR cap="flat" cmpd="sng" w="9525">
-                      <a:solidFill>
-                        <a:srgbClr val="000000"/>
-                      </a:solidFill>
-                      <a:prstDash val="solid"/>
-                      <a:round/>
-                      <a:headEnd len="sm" w="sm" type="none"/>
-                      <a:tailEnd len="sm" w="sm" type="none"/>
-                    </a:lnR>
-                    <a:lnT cap="flat" cmpd="sng" w="9525">
-                      <a:solidFill>
-                        <a:srgbClr val="000000"/>
-                      </a:solidFill>
-                      <a:prstDash val="solid"/>
-                      <a:round/>
-                      <a:headEnd len="sm" w="sm" type="none"/>
-                      <a:tailEnd len="sm" w="sm" type="none"/>
-                    </a:lnT>
-                    <a:lnB cap="flat" cmpd="sng" w="9525">
-                      <a:solidFill>
-                        <a:srgbClr val="000000"/>
-                      </a:solidFill>
-                      <a:prstDash val="solid"/>
-                      <a:round/>
-                      <a:headEnd len="sm" w="sm" type="none"/>
-                      <a:tailEnd len="sm" w="sm" type="none"/>
-                    </a:lnB>
-                    <a:solidFill>
-                      <a:srgbClr val="FFFFFF"/>
-                    </a:solidFill>
-                  </a:tcPr>
-                </a:tc>
-                <a:tc rowSpan="6">
-                  <a:txBody>
-                    <a:bodyPr/>
-                    <a:lstStyle/>
                     <a:p>
                       <a:pPr indent="0" lvl="0" marL="0" rtl="0" algn="l">
                         <a:spcBef>
@@ -6739,7 +7795,86 @@
                       <a:r>
                         <a:t/>
                       </a:r>
-                      <a:endParaRPr sz="1100"/>
+                      <a:endParaRPr sz="900"/>
+                    </a:p>
+                    <a:p>
+                      <a:pPr indent="0" lvl="0" marL="0" rtl="0" algn="l">
+                        <a:spcBef>
+                          <a:spcPts val="0"/>
+                        </a:spcBef>
+                        <a:spcAft>
+                          <a:spcPts val="0"/>
+                        </a:spcAft>
+                        <a:buNone/>
+                      </a:pPr>
+                      <a:r>
+                        <a:rPr lang="en" sz="900"/>
+                        <a:t>Social Studies will incorporate the strategies used in Marking Period 3 and 4 of last year. All students are being provided scaffolded organizers and essay composition strategies to prepare for PBA’s. Students are working with geographic and primary sources each lesson to develop key skills and practice, as well as frequent checks for understanding to help prepare for Unit and Benchmark assessments.</a:t>
+                      </a:r>
+                      <a:endParaRPr sz="900"/>
+                    </a:p>
+                    <a:p>
+                      <a:pPr indent="0" lvl="0" marL="0" rtl="0" algn="l">
+                        <a:spcBef>
+                          <a:spcPts val="0"/>
+                        </a:spcBef>
+                        <a:spcAft>
+                          <a:spcPts val="0"/>
+                        </a:spcAft>
+                        <a:buNone/>
+                      </a:pPr>
+                      <a:r>
+                        <a:t/>
+                      </a:r>
+                      <a:endParaRPr sz="900"/>
+                    </a:p>
+                    <a:p>
+                      <a:pPr indent="0" lvl="0" marL="0" rtl="0" algn="l">
+                        <a:spcBef>
+                          <a:spcPts val="0"/>
+                        </a:spcBef>
+                        <a:spcAft>
+                          <a:spcPts val="0"/>
+                        </a:spcAft>
+                        <a:buNone/>
+                      </a:pPr>
+                      <a:r>
+                        <a:rPr lang="en" sz="900"/>
+                        <a:t>Unit 1 Test Data (Pass Rate)</a:t>
+                      </a:r>
+                      <a:endParaRPr sz="900"/>
+                    </a:p>
+                    <a:p>
+                      <a:pPr indent="0" lvl="0" marL="0" rtl="0" algn="l">
+                        <a:spcBef>
+                          <a:spcPts val="0"/>
+                        </a:spcBef>
+                        <a:spcAft>
+                          <a:spcPts val="0"/>
+                        </a:spcAft>
+                        <a:buNone/>
+                      </a:pPr>
+                      <a:r>
+                        <a:rPr lang="en" sz="900"/>
+                        <a:t>WHI improved from 80% to 83%</a:t>
+                      </a:r>
+                      <a:endParaRPr sz="900"/>
+                    </a:p>
+                    <a:p>
+                      <a:pPr indent="0" lvl="0" marL="0" rtl="0" algn="l">
+                        <a:spcBef>
+                          <a:spcPts val="0"/>
+                        </a:spcBef>
+                        <a:spcAft>
+                          <a:spcPts val="0"/>
+                        </a:spcAft>
+                        <a:buNone/>
+                      </a:pPr>
+                      <a:r>
+                        <a:rPr lang="en" sz="1000"/>
+                        <a:t>US improved from 66% to 79%</a:t>
+                      </a:r>
+                      <a:endParaRPr sz="1000"/>
                     </a:p>
                   </a:txBody>
                   <a:tcPr marT="45725" marB="45725" marR="91450" marL="91450">
@@ -6819,4613 +7954,6 @@
           </a:graphicData>
         </a:graphic>
       </p:graphicFrame>
-    </p:spTree>
-  </p:cSld>
-  <p:clrMapOvr>
-    <a:masterClrMapping/>
-  </p:clrMapOvr>
-</p:sld>
-</file>
-
-<file path=ppt/slides/slide2.xml><?xml version="1.0" encoding="utf-8"?>
-<p:sld xmlns:a="http://schemas.openxmlformats.org/drawingml/2006/main" xmlns:r="http://schemas.openxmlformats.org/officeDocument/2006/relationships" xmlns:mc="http://schemas.openxmlformats.org/markup-compatibility/2006" xmlns:mv="urn:schemas-microsoft-com:mac:vml" xmlns:p="http://schemas.openxmlformats.org/presentationml/2006/main" xmlns:c="http://schemas.openxmlformats.org/drawingml/2006/chart" xmlns:dgm="http://schemas.openxmlformats.org/drawingml/2006/diagram" xmlns:o="urn:schemas-microsoft-com:office:office" xmlns:v="urn:schemas-microsoft-com:vml" xmlns:pvml="urn:schemas-microsoft-com:office:powerpoint" xmlns:com="http://schemas.openxmlformats.org/drawingml/2006/compatibility" xmlns:p14="http://schemas.microsoft.com/office/powerpoint/2010/main" xmlns:p15="http://schemas.microsoft.com/office/powerpoint/2012/main" xmlns:ahyp="http://schemas.microsoft.com/office/drawing/2018/hyperlinkcolor">
-  <p:cSld>
-    <p:spTree>
-      <p:nvGrpSpPr>
-        <p:cNvPr id="53" name="Shape 53"/>
-        <p:cNvGrpSpPr/>
-        <p:nvPr/>
-      </p:nvGrpSpPr>
-      <p:grpSpPr>
-        <a:xfrm>
-          <a:off x="0" y="0"/>
-          <a:ext cx="0" cy="0"/>
-          <a:chOff x="0" y="0"/>
-          <a:chExt cx="0" cy="0"/>
-        </a:xfrm>
-      </p:grpSpPr>
-      <p:pic>
-        <p:nvPicPr>
-          <p:cNvPr id="54" name="Google Shape;54;p13"/>
-          <p:cNvPicPr preferRelativeResize="0"/>
-          <p:nvPr/>
-        </p:nvPicPr>
-        <p:blipFill rotWithShape="1">
-          <a:blip r:embed="rId3">
-            <a:alphaModFix/>
-          </a:blip>
-          <a:srcRect b="0" l="0" r="0" t="0"/>
-          <a:stretch/>
-        </p:blipFill>
-        <p:spPr>
-          <a:xfrm>
-            <a:off x="0" y="0"/>
-            <a:ext cx="9144003" cy="5143501"/>
-          </a:xfrm>
-          <a:prstGeom prst="rect">
-            <a:avLst/>
-          </a:prstGeom>
-          <a:noFill/>
-          <a:ln>
-            <a:noFill/>
-          </a:ln>
-        </p:spPr>
-      </p:pic>
-      <p:sp>
-        <p:nvSpPr>
-          <p:cNvPr id="55" name="Google Shape;55;p13"/>
-          <p:cNvSpPr/>
-          <p:nvPr/>
-        </p:nvSpPr>
-        <p:spPr>
-          <a:xfrm>
-            <a:off x="-21225" y="4810975"/>
-            <a:ext cx="9211500" cy="332400"/>
-          </a:xfrm>
-          <a:prstGeom prst="rect">
-            <a:avLst/>
-          </a:prstGeom>
-          <a:solidFill>
-            <a:srgbClr val="214F93"/>
-          </a:solidFill>
-          <a:ln>
-            <a:noFill/>
-          </a:ln>
-        </p:spPr>
-        <p:txBody>
-          <a:bodyPr anchorCtr="0" anchor="ctr" bIns="91425" lIns="91425" spcFirstLastPara="1" rIns="91425" wrap="square" tIns="91425">
-            <a:noAutofit/>
-          </a:bodyPr>
-          <a:lstStyle/>
-          <a:p>
-            <a:pPr indent="0" lvl="0" marL="0" marR="0" rtl="0" algn="ctr">
-              <a:lnSpc>
-                <a:spcPct val="100000"/>
-              </a:lnSpc>
-              <a:spcBef>
-                <a:spcPts val="0"/>
-              </a:spcBef>
-              <a:spcAft>
-                <a:spcPts val="0"/>
-              </a:spcAft>
-              <a:buClr>
-                <a:srgbClr val="000000"/>
-              </a:buClr>
-              <a:buSzPts val="1400"/>
-              <a:buFont typeface="Arial"/>
-              <a:buNone/>
-            </a:pPr>
-            <a:r>
-              <a:t/>
-            </a:r>
-            <a:endParaRPr b="0" i="0" sz="1400" u="none" cap="none" strike="noStrike">
-              <a:solidFill>
-                <a:srgbClr val="000000"/>
-              </a:solidFill>
-              <a:latin typeface="Overpass"/>
-              <a:ea typeface="Overpass"/>
-              <a:cs typeface="Overpass"/>
-              <a:sym typeface="Overpass"/>
-            </a:endParaRPr>
-          </a:p>
-        </p:txBody>
-      </p:sp>
-      <p:sp>
-        <p:nvSpPr>
-          <p:cNvPr id="56" name="Google Shape;56;p13"/>
-          <p:cNvSpPr txBox="1"/>
-          <p:nvPr>
-            <p:ph type="ctrTitle"/>
-          </p:nvPr>
-        </p:nvSpPr>
-        <p:spPr>
-          <a:xfrm>
-            <a:off x="880625" y="-239275"/>
-            <a:ext cx="7674300" cy="1071600"/>
-          </a:xfrm>
-          <a:prstGeom prst="rect">
-            <a:avLst/>
-          </a:prstGeom>
-          <a:noFill/>
-          <a:ln>
-            <a:noFill/>
-          </a:ln>
-        </p:spPr>
-        <p:txBody>
-          <a:bodyPr anchorCtr="0" anchor="ctr" bIns="91425" lIns="91425" spcFirstLastPara="1" rIns="91425" wrap="square" tIns="91425">
-            <a:noAutofit/>
-          </a:bodyPr>
-          <a:lstStyle/>
-          <a:p>
-            <a:pPr indent="0" lvl="0" marL="0" rtl="0" algn="ctr">
-              <a:lnSpc>
-                <a:spcPct val="100000"/>
-              </a:lnSpc>
-              <a:spcBef>
-                <a:spcPts val="0"/>
-              </a:spcBef>
-              <a:spcAft>
-                <a:spcPts val="0"/>
-              </a:spcAft>
-              <a:buSzPts val="4500"/>
-              <a:buNone/>
-            </a:pPr>
-            <a:r>
-              <a:rPr lang="en" sz="3000">
-                <a:solidFill>
-                  <a:srgbClr val="214F93"/>
-                </a:solidFill>
-              </a:rPr>
-              <a:t>Reading: Evidence Behind the Response</a:t>
-            </a:r>
-            <a:endParaRPr sz="3000">
-              <a:solidFill>
-                <a:srgbClr val="214F93"/>
-              </a:solidFill>
-            </a:endParaRPr>
-          </a:p>
-        </p:txBody>
-      </p:sp>
-      <p:sp>
-        <p:nvSpPr>
-          <p:cNvPr id="57" name="Google Shape;57;p13"/>
-          <p:cNvSpPr txBox="1"/>
-          <p:nvPr>
-            <p:ph idx="1" type="subTitle"/>
-          </p:nvPr>
-        </p:nvSpPr>
-        <p:spPr>
-          <a:xfrm>
-            <a:off x="218075" y="540000"/>
-            <a:ext cx="8581500" cy="420000"/>
-          </a:xfrm>
-          <a:prstGeom prst="rect">
-            <a:avLst/>
-          </a:prstGeom>
-          <a:noFill/>
-          <a:ln>
-            <a:noFill/>
-          </a:ln>
-        </p:spPr>
-        <p:txBody>
-          <a:bodyPr anchorCtr="0" anchor="t" bIns="91425" lIns="91425" spcFirstLastPara="1" rIns="91425" wrap="square" tIns="91425">
-            <a:noAutofit/>
-          </a:bodyPr>
-          <a:lstStyle/>
-          <a:p>
-            <a:pPr indent="0" lvl="0" marL="0" rtl="0" algn="ctr">
-              <a:spcBef>
-                <a:spcPts val="0"/>
-              </a:spcBef>
-              <a:spcAft>
-                <a:spcPts val="0"/>
-              </a:spcAft>
-              <a:buNone/>
-            </a:pPr>
-            <a:r>
-              <a:rPr lang="en" sz="900">
-                <a:solidFill>
-                  <a:srgbClr val="214F93"/>
-                </a:solidFill>
-              </a:rPr>
-              <a:t>Menchville HS · EOC Reading (2024) · Spring 2026 · English department, all sections combined</a:t>
-            </a:r>
-          </a:p>
-          <a:p>
-            <a:pPr indent="0" lvl="0" marL="0" rtl="0" algn="ctr">
-              <a:spcBef>
-                <a:spcPts val="0"/>
-              </a:spcBef>
-              <a:spcAft>
-                <a:spcPts val="0"/>
-              </a:spcAft>
-              <a:buNone/>
-            </a:pPr>
-            <a:r>
-              <a:rPr lang="en" sz="900">
-                <a:solidFill>
-                  <a:srgbClr val="214F93"/>
-                </a:solidFill>
-              </a:rPr>
-              <a:t>Three skills below 60% in every group, chosen by number of responses missed (all attempts). Overall % of items correct: all students 63%, SWD 49%, ELL 44%.</a:t>
-            </a:r>
-          </a:p>
-        </p:txBody>
-      </p:sp>
-      <p:graphicFrame>
-        <p:nvGraphicFramePr>
-          <p:cNvPr id="58" name="Google Shape;58;p13"/>
-          <p:cNvGraphicFramePr/>
-          <p:nvPr/>
-        </p:nvGraphicFramePr>
-        <p:xfrm>
-          <a:off x="293775" y="980000"/>
-          <a:ext cx="3000000" cy="3000000"/>
-        </p:xfrm>
-        <a:graphic>
-          <a:graphicData uri="http://schemas.openxmlformats.org/drawingml/2006/table">
-            <a:tbl>
-              <a:tblPr bandRow="1" firstRow="1">
-                <a:noFill/>
-                <a:tableStyleId>{A47E61B7-C1A4-47CA-91F6-83AEB93D0619}</a:tableStyleId>
-              </a:tblPr>
-              <a:tblGrid>
-                <a:gridCol w="1400000"/>
-                <a:gridCol w="3590750"/>
-                <a:gridCol w="3590750"/>
-              </a:tblGrid>
-              <a:tr h="420000">
-                <a:tc>
-                  <a:txBody>
-                    <a:bodyPr/>
-                    <a:lstStyle/>
-                    <a:p>
-                      <a:pPr indent="0" lvl="0" marL="0" marR="0" rtl="0" algn="ctr">
-                        <a:spcBef>
-                          <a:spcPts val="0"/>
-                        </a:spcBef>
-                        <a:spcAft>
-                          <a:spcPts val="0"/>
-                        </a:spcAft>
-                        <a:buNone/>
-                      </a:pPr>
-                      <a:r>
-                        <a:rPr b="0" lang="en" sz="1300">
-                          <a:solidFill>
-                            <a:schemeClr val="accent3"/>
-                          </a:solidFill>
-                          <a:latin typeface="Rubik"/>
-                          <a:ea typeface="Rubik"/>
-                          <a:cs typeface="Rubik"/>
-                          <a:sym typeface="Rubik"/>
-                        </a:rPr>
-                        <a:t>Skill to improve</a:t>
-                      </a:r>
-                    </a:p>
-                  </a:txBody>
-                  <a:tcPr marT="45725" marB="45725" marR="91450" marL="91450" anchor="ctr">
-                    <a:lnL cap="flat" cmpd="sng" w="9525">
-                      <a:solidFill>
-                        <a:srgbClr val="000000"/>
-                      </a:solidFill>
-                      <a:prstDash val="solid"/>
-                      <a:round/>
-                      <a:headEnd len="sm" w="sm" type="none"/>
-                      <a:tailEnd len="sm" w="sm" type="none"/>
-                    </a:lnL>
-                    <a:lnR cap="flat" cmpd="sng" w="9525">
-                      <a:solidFill>
-                        <a:srgbClr val="000000"/>
-                      </a:solidFill>
-                      <a:prstDash val="solid"/>
-                      <a:round/>
-                      <a:headEnd len="sm" w="sm" type="none"/>
-                      <a:tailEnd len="sm" w="sm" type="none"/>
-                    </a:lnR>
-                    <a:lnT cap="flat" cmpd="sng" w="9525">
-                      <a:solidFill>
-                        <a:srgbClr val="000000"/>
-                      </a:solidFill>
-                      <a:prstDash val="solid"/>
-                      <a:round/>
-                      <a:headEnd len="sm" w="sm" type="none"/>
-                      <a:tailEnd len="sm" w="sm" type="none"/>
-                    </a:lnT>
-                    <a:lnB cap="flat" cmpd="sng" w="9525">
-                      <a:solidFill>
-                        <a:srgbClr val="000000"/>
-                      </a:solidFill>
-                      <a:prstDash val="solid"/>
-                      <a:round/>
-                      <a:headEnd len="sm" w="sm" type="none"/>
-                      <a:tailEnd len="sm" w="sm" type="none"/>
-                    </a:lnB>
-                    <a:solidFill>
-                      <a:srgbClr val="214F93"/>
-                    </a:solidFill>
-                  </a:tcPr>
-                </a:tc>
-                <a:tc>
-                  <a:txBody>
-                    <a:bodyPr/>
-                    <a:lstStyle/>
-                    <a:p>
-                      <a:pPr indent="0" lvl="0" marL="0" marR="0" rtl="0" algn="ctr">
-                        <a:spcBef>
-                          <a:spcPts val="0"/>
-                        </a:spcBef>
-                        <a:spcAft>
-                          <a:spcPts val="0"/>
-                        </a:spcAft>
-                        <a:buNone/>
-                      </a:pPr>
-                      <a:r>
-                        <a:rPr b="0" lang="en" sz="1300">
-                          <a:solidFill>
-                            <a:schemeClr val="accent3"/>
-                          </a:solidFill>
-                          <a:latin typeface="Rubik"/>
-                          <a:ea typeface="Rubik"/>
-                          <a:cs typeface="Rubik"/>
-                          <a:sym typeface="Rubik"/>
-                        </a:rPr>
-                        <a:t>Spring 2026: % of items correct</a:t>
-                      </a:r>
-                    </a:p>
-                  </a:txBody>
-                  <a:tcPr marT="45725" marB="45725" marR="91450" marL="91450" anchor="ctr">
-                    <a:lnL cap="flat" cmpd="sng" w="9525">
-                      <a:solidFill>
-                        <a:srgbClr val="000000"/>
-                      </a:solidFill>
-                      <a:prstDash val="solid"/>
-                      <a:round/>
-                      <a:headEnd len="sm" w="sm" type="none"/>
-                      <a:tailEnd len="sm" w="sm" type="none"/>
-                    </a:lnL>
-                    <a:lnR cap="flat" cmpd="sng" w="9525">
-                      <a:solidFill>
-                        <a:srgbClr val="000000"/>
-                      </a:solidFill>
-                      <a:prstDash val="solid"/>
-                      <a:round/>
-                      <a:headEnd len="sm" w="sm" type="none"/>
-                      <a:tailEnd len="sm" w="sm" type="none"/>
-                    </a:lnR>
-                    <a:lnT cap="flat" cmpd="sng" w="9525">
-                      <a:solidFill>
-                        <a:srgbClr val="000000"/>
-                      </a:solidFill>
-                      <a:prstDash val="solid"/>
-                      <a:round/>
-                      <a:headEnd len="sm" w="sm" type="none"/>
-                      <a:tailEnd len="sm" w="sm" type="none"/>
-                    </a:lnT>
-                    <a:lnB cap="flat" cmpd="sng" w="9525">
-                      <a:solidFill>
-                        <a:srgbClr val="000000"/>
-                      </a:solidFill>
-                      <a:prstDash val="solid"/>
-                      <a:round/>
-                      <a:headEnd len="sm" w="sm" type="none"/>
-                      <a:tailEnd len="sm" w="sm" type="none"/>
-                    </a:lnB>
-                    <a:solidFill>
-                      <a:srgbClr val="214F93"/>
-                    </a:solidFill>
-                  </a:tcPr>
-                </a:tc>
-                <a:tc>
-                  <a:txBody>
-                    <a:bodyPr/>
-                    <a:lstStyle/>
-                    <a:p>
-                      <a:pPr indent="0" lvl="0" marL="0" marR="0" rtl="0" algn="ctr">
-                        <a:spcBef>
-                          <a:spcPts val="0"/>
-                        </a:spcBef>
-                        <a:spcAft>
-                          <a:spcPts val="0"/>
-                        </a:spcAft>
-                        <a:buNone/>
-                      </a:pPr>
-                      <a:r>
-                        <a:rPr b="0" lang="en" sz="1300">
-                          <a:solidFill>
-                            <a:schemeClr val="accent3"/>
-                          </a:solidFill>
-                          <a:latin typeface="Rubik"/>
-                          <a:ea typeface="Rubik"/>
-                          <a:cs typeface="Rubik"/>
-                          <a:sym typeface="Rubik"/>
-                        </a:rPr>
-                        <a:t>Tier 1 change and evidence</a:t>
-                      </a:r>
-                    </a:p>
-                  </a:txBody>
-                  <a:tcPr marT="45725" marB="45725" marR="91450" marL="91450" anchor="ctr">
-                    <a:lnL cap="flat" cmpd="sng" w="9525">
-                      <a:solidFill>
-                        <a:srgbClr val="000000"/>
-                      </a:solidFill>
-                      <a:prstDash val="solid"/>
-                      <a:round/>
-                      <a:headEnd len="sm" w="sm" type="none"/>
-                      <a:tailEnd len="sm" w="sm" type="none"/>
-                    </a:lnL>
-                    <a:lnR cap="flat" cmpd="sng" w="9525">
-                      <a:solidFill>
-                        <a:srgbClr val="000000"/>
-                      </a:solidFill>
-                      <a:prstDash val="solid"/>
-                      <a:round/>
-                      <a:headEnd len="sm" w="sm" type="none"/>
-                      <a:tailEnd len="sm" w="sm" type="none"/>
-                    </a:lnR>
-                    <a:lnT cap="flat" cmpd="sng" w="9525">
-                      <a:solidFill>
-                        <a:srgbClr val="000000"/>
-                      </a:solidFill>
-                      <a:prstDash val="solid"/>
-                      <a:round/>
-                      <a:headEnd len="sm" w="sm" type="none"/>
-                      <a:tailEnd len="sm" w="sm" type="none"/>
-                    </a:lnT>
-                    <a:lnB cap="flat" cmpd="sng" w="9525">
-                      <a:solidFill>
-                        <a:srgbClr val="000000"/>
-                      </a:solidFill>
-                      <a:prstDash val="solid"/>
-                      <a:round/>
-                      <a:headEnd len="sm" w="sm" type="none"/>
-                      <a:tailEnd len="sm" w="sm" type="none"/>
-                    </a:lnB>
-                    <a:solidFill>
-                      <a:srgbClr val="214F93"/>
-                    </a:solidFill>
-                  </a:tcPr>
-                </a:tc>
-              </a:tr>
-              <a:tr h="500000">
-                <a:tc>
-                  <a:txBody>
-                    <a:bodyPr/>
-                    <a:lstStyle/>
-                    <a:p>
-                      <a:pPr indent="0" lvl="0" marL="0" rtl="0" algn="l">
-                        <a:spcBef>
-                          <a:spcPts val="0"/>
-                        </a:spcBef>
-                        <a:spcAft>
-                          <a:spcPts val="0"/>
-                        </a:spcAft>
-                        <a:buNone/>
-                      </a:pPr>
-                      <a:r>
-                        <a:rPr lang="en" sz="800" b="1"/>
-                        <a:t>Evaluate details in a text, determining which could confirm or disprove an argument or position (10.RI.1.C)</a:t>
-                      </a:r>
-                      <a:endParaRPr sz="800"/>
-                    </a:p>
-                  </a:txBody>
-                  <a:tcPr marT="27432" marB="27432" marR="91450" marL="91450">
-                    <a:lnL cap="flat" cmpd="sng" w="9525">
-                      <a:solidFill>
-                        <a:srgbClr val="000000"/>
-                      </a:solidFill>
-                      <a:prstDash val="solid"/>
-                      <a:round/>
-                      <a:headEnd len="sm" w="sm" type="none"/>
-                      <a:tailEnd len="sm" w="sm" type="none"/>
-                    </a:lnL>
-                    <a:lnR cap="flat" cmpd="sng" w="9525">
-                      <a:solidFill>
-                        <a:srgbClr val="000000"/>
-                      </a:solidFill>
-                      <a:prstDash val="solid"/>
-                      <a:round/>
-                      <a:headEnd len="sm" w="sm" type="none"/>
-                      <a:tailEnd len="sm" w="sm" type="none"/>
-                    </a:lnR>
-                    <a:lnT cap="flat" cmpd="sng" w="9525">
-                      <a:solidFill>
-                        <a:srgbClr val="000000"/>
-                      </a:solidFill>
-                      <a:prstDash val="solid"/>
-                      <a:round/>
-                      <a:headEnd len="sm" w="sm" type="none"/>
-                      <a:tailEnd len="sm" w="sm" type="none"/>
-                    </a:lnT>
-                    <a:lnB cap="flat" cmpd="sng" w="9525">
-                      <a:solidFill>
-                        <a:srgbClr val="000000"/>
-                      </a:solidFill>
-                      <a:prstDash val="solid"/>
-                      <a:round/>
-                      <a:headEnd len="sm" w="sm" type="none"/>
-                      <a:tailEnd len="sm" w="sm" type="none"/>
-                    </a:lnB>
-                    <a:solidFill>
-                      <a:srgbClr val="FFFFFF"/>
-                    </a:solidFill>
-                  </a:tcPr>
-                </a:tc>
-                <a:tc>
-                  <a:txBody>
-                    <a:bodyPr/>
-                    <a:lstStyle/>
-                    <a:p>
-                      <a:pPr indent="0" lvl="0" marL="0" rtl="0" algn="l">
-                        <a:spcBef>
-                          <a:spcPts val="0"/>
-                        </a:spcBef>
-                        <a:spcAft>
-                          <a:spcPts val="0"/>
-                        </a:spcAft>
-                        <a:buNone/>
-                      </a:pPr>
-                      <a:r>
-                        <a:rPr lang="en" sz="800"/>
-                        <a:t xml:space="preserve">All students </a:t>
-                      </a:r>
-                      <a:r>
-                        <a:rPr lang="en" sz="800" b="1"/>
-                        <a:t>53%</a:t>
-                      </a:r>
-                      <a:r>
-                        <a:rPr lang="en" sz="800"/>
-                        <a:t xml:space="preserve"> (905 responses) · SWD </a:t>
-                      </a:r>
-                      <a:r>
-                        <a:rPr lang="en" sz="800" b="1"/>
-                        <a:t>40%</a:t>
-                      </a:r>
-                      <a:r>
-                        <a:rPr lang="en" sz="800"/>
-                        <a:t xml:space="preserve"> (118) · ELL </a:t>
-                      </a:r>
-                      <a:r>
-                        <a:rPr lang="en" sz="800" b="1"/>
-                        <a:t>32%</a:t>
-                      </a:r>
-                      <a:r>
-                        <a:rPr lang="en" sz="800"/>
-                        <a:t xml:space="preserve"> (25). Weakest high-volume skill in every group.</a:t>
-                      </a:r>
-                      <a:endParaRPr sz="800"/>
-                    </a:p>
-                  </a:txBody>
-                  <a:tcPr marT="27432" marB="27432" marR="91450" marL="91450">
-                    <a:lnL cap="flat" cmpd="sng" w="9525">
-                      <a:solidFill>
-                        <a:srgbClr val="000000"/>
-                      </a:solidFill>
-                      <a:prstDash val="solid"/>
-                      <a:round/>
-                      <a:headEnd len="sm" w="sm" type="none"/>
-                      <a:tailEnd len="sm" w="sm" type="none"/>
-                    </a:lnL>
-                    <a:lnR cap="flat" cmpd="sng" w="9525">
-                      <a:solidFill>
-                        <a:srgbClr val="000000"/>
-                      </a:solidFill>
-                      <a:prstDash val="solid"/>
-                      <a:round/>
-                      <a:headEnd len="sm" w="sm" type="none"/>
-                      <a:tailEnd len="sm" w="sm" type="none"/>
-                    </a:lnR>
-                    <a:lnT cap="flat" cmpd="sng" w="9525">
-                      <a:solidFill>
-                        <a:srgbClr val="000000"/>
-                      </a:solidFill>
-                      <a:prstDash val="solid"/>
-                      <a:round/>
-                      <a:headEnd len="sm" w="sm" type="none"/>
-                      <a:tailEnd len="sm" w="sm" type="none"/>
-                    </a:lnT>
-                    <a:lnB cap="flat" cmpd="sng" w="9525">
-                      <a:solidFill>
-                        <a:srgbClr val="000000"/>
-                      </a:solidFill>
-                      <a:prstDash val="solid"/>
-                      <a:round/>
-                      <a:headEnd len="sm" w="sm" type="none"/>
-                      <a:tailEnd len="sm" w="sm" type="none"/>
-                    </a:lnB>
-                    <a:solidFill>
-                      <a:srgbClr val="FFFFFF"/>
-                    </a:solidFill>
-                  </a:tcPr>
-                </a:tc>
-                <a:tc>
-                  <a:txBody>
-                    <a:bodyPr/>
-                    <a:lstStyle/>
-                    <a:p>
-                      <a:pPr indent="0" lvl="0" marL="0" rtl="0" algn="l">
-                        <a:spcBef>
-                          <a:spcPts val="0"/>
-                        </a:spcBef>
-                        <a:spcAft>
-                          <a:spcPts val="0"/>
-                        </a:spcAft>
-                        <a:buNone/>
-                      </a:pPr>
-                      <a:r>
-                        <a:rPr lang="en" sz="800"/>
-                        <a:t>Weekly paired-passage claim check: students decide which details confirm or disprove a claim and explain why (PEE/CER), after a teacher think-aloud.</a:t>
-                      </a:r>
-                      <a:endParaRPr sz="800"/>
-                    </a:p>
-                    <a:p>
-                      <a:pPr indent="0" lvl="0" marL="0" rtl="0" algn="l">
-                        <a:spcBef>
-                          <a:spcPts val="100"/>
-                        </a:spcBef>
-                        <a:spcAft>
-                          <a:spcPts val="0"/>
-                        </a:spcAft>
-                        <a:buNone/>
-                      </a:pPr>
-                      <a:r>
-                        <a:rPr lang="en" sz="800" b="1"/>
-                        <a:t xml:space="preserve">Evidence: </a:t>
-                      </a:r>
-                      <a:r>
-                        <a:rPr lang="en" sz="800"/>
-                        <a:t>5-item CFU every 3 weeks; MP1 benchmark.</a:t>
-                      </a:r>
-                      <a:endParaRPr sz="800"/>
-                    </a:p>
-                  </a:txBody>
-                  <a:tcPr marT="27432" marB="27432" marR="91450" marL="91450">
-                    <a:lnL cap="flat" cmpd="sng" w="9525">
-                      <a:solidFill>
-                        <a:srgbClr val="000000"/>
-                      </a:solidFill>
-                      <a:prstDash val="solid"/>
-                      <a:round/>
-                      <a:headEnd len="sm" w="sm" type="none"/>
-                      <a:tailEnd len="sm" w="sm" type="none"/>
-                    </a:lnL>
-                    <a:lnR cap="flat" cmpd="sng" w="9525">
-                      <a:solidFill>
-                        <a:srgbClr val="000000"/>
-                      </a:solidFill>
-                      <a:prstDash val="solid"/>
-                      <a:round/>
-                      <a:headEnd len="sm" w="sm" type="none"/>
-                      <a:tailEnd len="sm" w="sm" type="none"/>
-                    </a:lnR>
-                    <a:lnT cap="flat" cmpd="sng" w="9525">
-                      <a:solidFill>
-                        <a:srgbClr val="000000"/>
-                      </a:solidFill>
-                      <a:prstDash val="solid"/>
-                      <a:round/>
-                      <a:headEnd len="sm" w="sm" type="none"/>
-                      <a:tailEnd len="sm" w="sm" type="none"/>
-                    </a:lnT>
-                    <a:lnB cap="flat" cmpd="sng" w="9525">
-                      <a:solidFill>
-                        <a:srgbClr val="000000"/>
-                      </a:solidFill>
-                      <a:prstDash val="solid"/>
-                      <a:round/>
-                      <a:headEnd len="sm" w="sm" type="none"/>
-                      <a:tailEnd len="sm" w="sm" type="none"/>
-                    </a:lnB>
-                    <a:solidFill>
-                      <a:srgbClr val="FFFFFF"/>
-                    </a:solidFill>
-                  </a:tcPr>
-                </a:tc>
-              </a:tr>
-              <a:tr h="500000">
-                <a:tc>
-                  <a:txBody>
-                    <a:bodyPr/>
-                    <a:lstStyle/>
-                    <a:p>
-                      <a:pPr indent="0" lvl="0" marL="0" rtl="0" algn="l">
-                        <a:spcBef>
-                          <a:spcPts val="0"/>
-                        </a:spcBef>
-                        <a:spcAft>
-                          <a:spcPts val="0"/>
-                        </a:spcAft>
-                        <a:buNone/>
-                      </a:pPr>
-                      <a:r>
-                        <a:rPr lang="en" sz="800" b="1"/>
-                        <a:t>Analyze how characters are revealed through particular lines of dialogue or events (11.RL.1.C)</a:t>
-                      </a:r>
-                      <a:endParaRPr sz="800"/>
-                    </a:p>
-                  </a:txBody>
-                  <a:tcPr marT="27432" marB="27432" marR="91450" marL="91450">
-                    <a:lnL cap="flat" cmpd="sng" w="9525">
-                      <a:solidFill>
-                        <a:srgbClr val="000000"/>
-                      </a:solidFill>
-                      <a:prstDash val="solid"/>
-                      <a:round/>
-                      <a:headEnd len="sm" w="sm" type="none"/>
-                      <a:tailEnd len="sm" w="sm" type="none"/>
-                    </a:lnL>
-                    <a:lnR cap="flat" cmpd="sng" w="9525">
-                      <a:solidFill>
-                        <a:srgbClr val="000000"/>
-                      </a:solidFill>
-                      <a:prstDash val="solid"/>
-                      <a:round/>
-                      <a:headEnd len="sm" w="sm" type="none"/>
-                      <a:tailEnd len="sm" w="sm" type="none"/>
-                    </a:lnR>
-                    <a:lnT cap="flat" cmpd="sng" w="9525">
-                      <a:solidFill>
-                        <a:srgbClr val="000000"/>
-                      </a:solidFill>
-                      <a:prstDash val="solid"/>
-                      <a:round/>
-                      <a:headEnd len="sm" w="sm" type="none"/>
-                      <a:tailEnd len="sm" w="sm" type="none"/>
-                    </a:lnT>
-                    <a:lnB cap="flat" cmpd="sng" w="9525">
-                      <a:solidFill>
-                        <a:srgbClr val="000000"/>
-                      </a:solidFill>
-                      <a:prstDash val="solid"/>
-                      <a:round/>
-                      <a:headEnd len="sm" w="sm" type="none"/>
-                      <a:tailEnd len="sm" w="sm" type="none"/>
-                    </a:lnB>
-                    <a:solidFill>
-                      <a:srgbClr val="FFFFFF"/>
-                    </a:solidFill>
-                  </a:tcPr>
-                </a:tc>
-                <a:tc>
-                  <a:txBody>
-                    <a:bodyPr/>
-                    <a:lstStyle/>
-                    <a:p>
-                      <a:pPr indent="0" lvl="0" marL="0" rtl="0" algn="l">
-                        <a:spcBef>
-                          <a:spcPts val="0"/>
-                        </a:spcBef>
-                        <a:spcAft>
-                          <a:spcPts val="0"/>
-                        </a:spcAft>
-                        <a:buNone/>
-                      </a:pPr>
-                      <a:r>
-                        <a:rPr lang="en" sz="800"/>
-                        <a:t xml:space="preserve">All students </a:t>
-                      </a:r>
-                      <a:r>
-                        <a:rPr lang="en" sz="800" b="1"/>
-                        <a:t>61%</a:t>
-                      </a:r>
-                      <a:r>
-                        <a:rPr lang="en" sz="800"/>
-                        <a:t xml:space="preserve"> (1,338) · SWD </a:t>
-                      </a:r>
-                      <a:r>
-                        <a:rPr lang="en" sz="800" b="1"/>
-                        <a:t>53%</a:t>
-                      </a:r>
-                      <a:r>
-                        <a:rPr lang="en" sz="800"/>
-                        <a:t xml:space="preserve"> (196) · ELL </a:t>
-                      </a:r>
-                      <a:r>
-                        <a:rPr lang="en" sz="800" b="1"/>
-                        <a:t>30%</a:t>
-                      </a:r>
-                      <a:r>
-                        <a:rPr lang="en" sz="800"/>
-                        <a:t xml:space="preserve"> (20). Most-tested standard on the exam; most responses missed overall.</a:t>
-                      </a:r>
-                      <a:endParaRPr sz="800"/>
-                    </a:p>
-                  </a:txBody>
-                  <a:tcPr marT="27432" marB="27432" marR="91450" marL="91450">
-                    <a:lnL cap="flat" cmpd="sng" w="9525">
-                      <a:solidFill>
-                        <a:srgbClr val="000000"/>
-                      </a:solidFill>
-                      <a:prstDash val="solid"/>
-                      <a:round/>
-                      <a:headEnd len="sm" w="sm" type="none"/>
-                      <a:tailEnd len="sm" w="sm" type="none"/>
-                    </a:lnL>
-                    <a:lnR cap="flat" cmpd="sng" w="9525">
-                      <a:solidFill>
-                        <a:srgbClr val="000000"/>
-                      </a:solidFill>
-                      <a:prstDash val="solid"/>
-                      <a:round/>
-                      <a:headEnd len="sm" w="sm" type="none"/>
-                      <a:tailEnd len="sm" w="sm" type="none"/>
-                    </a:lnR>
-                    <a:lnT cap="flat" cmpd="sng" w="9525">
-                      <a:solidFill>
-                        <a:srgbClr val="000000"/>
-                      </a:solidFill>
-                      <a:prstDash val="solid"/>
-                      <a:round/>
-                      <a:headEnd len="sm" w="sm" type="none"/>
-                      <a:tailEnd len="sm" w="sm" type="none"/>
-                    </a:lnT>
-                    <a:lnB cap="flat" cmpd="sng" w="9525">
-                      <a:solidFill>
-                        <a:srgbClr val="000000"/>
-                      </a:solidFill>
-                      <a:prstDash val="solid"/>
-                      <a:round/>
-                      <a:headEnd len="sm" w="sm" type="none"/>
-                      <a:tailEnd len="sm" w="sm" type="none"/>
-                    </a:lnB>
-                    <a:solidFill>
-                      <a:srgbClr val="FFFFFF"/>
-                    </a:solidFill>
-                  </a:tcPr>
-                </a:tc>
-                <a:tc>
-                  <a:txBody>
-                    <a:bodyPr/>
-                    <a:lstStyle/>
-                    <a:p>
-                      <a:pPr indent="0" lvl="0" marL="0" rtl="0" algn="l">
-                        <a:spcBef>
-                          <a:spcPts val="0"/>
-                        </a:spcBef>
-                        <a:spcAft>
-                          <a:spcPts val="0"/>
-                        </a:spcAft>
-                        <a:buNone/>
-                      </a:pPr>
-                      <a:r>
-                        <a:rPr lang="en" sz="800"/>
-                        <a:t>Character annotation routine: mark a line of dialogue or an event, then write what it reveals about the character; graphic organizer for SWD and ELL.</a:t>
-                      </a:r>
-                      <a:endParaRPr sz="800"/>
-                    </a:p>
-                    <a:p>
-                      <a:pPr indent="0" lvl="0" marL="0" rtl="0" algn="l">
-                        <a:spcBef>
-                          <a:spcPts val="100"/>
-                        </a:spcBef>
-                        <a:spcAft>
-                          <a:spcPts val="0"/>
-                        </a:spcAft>
-                        <a:buNone/>
-                      </a:pPr>
-                      <a:r>
-                        <a:rPr lang="en" sz="800" b="1"/>
-                        <a:t xml:space="preserve">Evidence: </a:t>
-                      </a:r>
-                      <a:r>
-                        <a:rPr lang="en" sz="800"/>
-                        <a:t>annotated passages reviewed in PLC monthly; CFU every 3 weeks.</a:t>
-                      </a:r>
-                      <a:endParaRPr sz="800"/>
-                    </a:p>
-                  </a:txBody>
-                  <a:tcPr marT="27432" marB="27432" marR="91450" marL="91450">
-                    <a:lnL cap="flat" cmpd="sng" w="9525">
-                      <a:solidFill>
-                        <a:srgbClr val="000000"/>
-                      </a:solidFill>
-                      <a:prstDash val="solid"/>
-                      <a:round/>
-                      <a:headEnd len="sm" w="sm" type="none"/>
-                      <a:tailEnd len="sm" w="sm" type="none"/>
-                    </a:lnL>
-                    <a:lnR cap="flat" cmpd="sng" w="9525">
-                      <a:solidFill>
-                        <a:srgbClr val="000000"/>
-                      </a:solidFill>
-                      <a:prstDash val="solid"/>
-                      <a:round/>
-                      <a:headEnd len="sm" w="sm" type="none"/>
-                      <a:tailEnd len="sm" w="sm" type="none"/>
-                    </a:lnR>
-                    <a:lnT cap="flat" cmpd="sng" w="9525">
-                      <a:solidFill>
-                        <a:srgbClr val="000000"/>
-                      </a:solidFill>
-                      <a:prstDash val="solid"/>
-                      <a:round/>
-                      <a:headEnd len="sm" w="sm" type="none"/>
-                      <a:tailEnd len="sm" w="sm" type="none"/>
-                    </a:lnT>
-                    <a:lnB cap="flat" cmpd="sng" w="9525">
-                      <a:solidFill>
-                        <a:srgbClr val="000000"/>
-                      </a:solidFill>
-                      <a:prstDash val="solid"/>
-                      <a:round/>
-                      <a:headEnd len="sm" w="sm" type="none"/>
-                      <a:tailEnd len="sm" w="sm" type="none"/>
-                    </a:lnB>
-                    <a:solidFill>
-                      <a:srgbClr val="FFFFFF"/>
-                    </a:solidFill>
-                  </a:tcPr>
-                </a:tc>
-              </a:tr>
-              <a:tr h="500000">
-                <a:tc>
-                  <a:txBody>
-                    <a:bodyPr/>
-                    <a:lstStyle/>
-                    <a:p>
-                      <a:pPr indent="0" lvl="0" marL="0" rtl="0" algn="l">
-                        <a:spcBef>
-                          <a:spcPts val="0"/>
-                        </a:spcBef>
-                        <a:spcAft>
-                          <a:spcPts val="0"/>
-                        </a:spcAft>
-                        <a:buNone/>
-                      </a:pPr>
-                      <a:r>
-                        <a:rPr lang="en" sz="800" b="1"/>
-                        <a:t>Use context and sentence structure clues to clarify the meaning of words (11.RVN.1.B)</a:t>
-                      </a:r>
-                      <a:endParaRPr sz="800"/>
-                    </a:p>
-                  </a:txBody>
-                  <a:tcPr marT="27432" marB="27432" marR="91450" marL="91450">
-                    <a:lnL cap="flat" cmpd="sng" w="9525">
-                      <a:solidFill>
-                        <a:srgbClr val="000000"/>
-                      </a:solidFill>
-                      <a:prstDash val="solid"/>
-                      <a:round/>
-                      <a:headEnd len="sm" w="sm" type="none"/>
-                      <a:tailEnd len="sm" w="sm" type="none"/>
-                    </a:lnL>
-                    <a:lnR cap="flat" cmpd="sng" w="9525">
-                      <a:solidFill>
-                        <a:srgbClr val="000000"/>
-                      </a:solidFill>
-                      <a:prstDash val="solid"/>
-                      <a:round/>
-                      <a:headEnd len="sm" w="sm" type="none"/>
-                      <a:tailEnd len="sm" w="sm" type="none"/>
-                    </a:lnR>
-                    <a:lnT cap="flat" cmpd="sng" w="9525">
-                      <a:solidFill>
-                        <a:srgbClr val="000000"/>
-                      </a:solidFill>
-                      <a:prstDash val="solid"/>
-                      <a:round/>
-                      <a:headEnd len="sm" w="sm" type="none"/>
-                      <a:tailEnd len="sm" w="sm" type="none"/>
-                    </a:lnT>
-                    <a:lnB cap="flat" cmpd="sng" w="9525">
-                      <a:solidFill>
-                        <a:srgbClr val="000000"/>
-                      </a:solidFill>
-                      <a:prstDash val="solid"/>
-                      <a:round/>
-                      <a:headEnd len="sm" w="sm" type="none"/>
-                      <a:tailEnd len="sm" w="sm" type="none"/>
-                    </a:lnB>
-                    <a:solidFill>
-                      <a:srgbClr val="FFFFFF"/>
-                    </a:solidFill>
-                  </a:tcPr>
-                </a:tc>
-                <a:tc>
-                  <a:txBody>
-                    <a:bodyPr/>
-                    <a:lstStyle/>
-                    <a:p>
-                      <a:pPr indent="0" lvl="0" marL="0" rtl="0" algn="l">
-                        <a:spcBef>
-                          <a:spcPts val="0"/>
-                        </a:spcBef>
-                        <a:spcAft>
-                          <a:spcPts val="0"/>
-                        </a:spcAft>
-                        <a:buNone/>
-                      </a:pPr>
-                      <a:r>
-                        <a:rPr lang="en" sz="800"/>
-                        <a:t xml:space="preserve">All students </a:t>
-                      </a:r>
-                      <a:r>
-                        <a:rPr lang="en" sz="800" b="1"/>
-                        <a:t>52%</a:t>
-                      </a:r>
-                      <a:r>
-                        <a:rPr lang="en" sz="800"/>
-                        <a:t xml:space="preserve"> (402) · SWD </a:t>
-                      </a:r>
-                      <a:r>
-                        <a:rPr lang="en" sz="800" b="1"/>
-                        <a:t>51%</a:t>
-                      </a:r>
-                      <a:r>
-                        <a:rPr lang="en" sz="800"/>
-                        <a:t xml:space="preserve"> (63) · ELL </a:t>
-                      </a:r>
-                      <a:r>
-                        <a:rPr lang="en" sz="800" b="1"/>
-                        <a:t>40%</a:t>
-                      </a:r>
-                      <a:r>
-                        <a:rPr lang="en" sz="800"/>
-                        <a:t xml:space="preserve"> (5). Under 60% in every group.</a:t>
-                      </a:r>
-                      <a:endParaRPr sz="800"/>
-                    </a:p>
-                  </a:txBody>
-                  <a:tcPr marT="27432" marB="27432" marR="91450" marL="91450">
-                    <a:lnL cap="flat" cmpd="sng" w="9525">
-                      <a:solidFill>
-                        <a:srgbClr val="000000"/>
-                      </a:solidFill>
-                      <a:prstDash val="solid"/>
-                      <a:round/>
-                      <a:headEnd len="sm" w="sm" type="none"/>
-                      <a:tailEnd len="sm" w="sm" type="none"/>
-                    </a:lnL>
-                    <a:lnR cap="flat" cmpd="sng" w="9525">
-                      <a:solidFill>
-                        <a:srgbClr val="000000"/>
-                      </a:solidFill>
-                      <a:prstDash val="solid"/>
-                      <a:round/>
-                      <a:headEnd len="sm" w="sm" type="none"/>
-                      <a:tailEnd len="sm" w="sm" type="none"/>
-                    </a:lnR>
-                    <a:lnT cap="flat" cmpd="sng" w="9525">
-                      <a:solidFill>
-                        <a:srgbClr val="000000"/>
-                      </a:solidFill>
-                      <a:prstDash val="solid"/>
-                      <a:round/>
-                      <a:headEnd len="sm" w="sm" type="none"/>
-                      <a:tailEnd len="sm" w="sm" type="none"/>
-                    </a:lnT>
-                    <a:lnB cap="flat" cmpd="sng" w="9525">
-                      <a:solidFill>
-                        <a:srgbClr val="000000"/>
-                      </a:solidFill>
-                      <a:prstDash val="solid"/>
-                      <a:round/>
-                      <a:headEnd len="sm" w="sm" type="none"/>
-                      <a:tailEnd len="sm" w="sm" type="none"/>
-                    </a:lnB>
-                    <a:solidFill>
-                      <a:srgbClr val="FFFFFF"/>
-                    </a:solidFill>
-                  </a:tcPr>
-                </a:tc>
-                <a:tc>
-                  <a:txBody>
-                    <a:bodyPr/>
-                    <a:lstStyle/>
-                    <a:p>
-                      <a:pPr indent="0" lvl="0" marL="0" rtl="0" algn="l">
-                        <a:spcBef>
-                          <a:spcPts val="0"/>
-                        </a:spcBef>
-                        <a:spcAft>
-                          <a:spcPts val="0"/>
-                        </a:spcAft>
-                        <a:buNone/>
-                      </a:pPr>
-                      <a:r>
-                        <a:rPr lang="en" sz="800"/>
-                        <a:t>Daily 5-minute context-clue routine on words from the current text; pre-teach key words for ELL (ExC-ELL, Frayer).</a:t>
-                      </a:r>
-                      <a:endParaRPr sz="800"/>
-                    </a:p>
-                    <a:p>
-                      <a:pPr indent="0" lvl="0" marL="0" rtl="0" algn="l">
-                        <a:spcBef>
-                          <a:spcPts val="100"/>
-                        </a:spcBef>
-                        <a:spcAft>
-                          <a:spcPts val="0"/>
-                        </a:spcAft>
-                        <a:buNone/>
-                      </a:pPr>
-                      <a:r>
-                        <a:rPr lang="en" sz="800" b="1"/>
-                        <a:t xml:space="preserve">Evidence: </a:t>
-                      </a:r>
-                      <a:r>
-                        <a:rPr lang="en" sz="800"/>
-                        <a:t>vocabulary CFU every 3 weeks; MP1 benchmark.</a:t>
-                      </a:r>
-                      <a:endParaRPr sz="800"/>
-                    </a:p>
-                  </a:txBody>
-                  <a:tcPr marT="27432" marB="27432" marR="91450" marL="91450">
-                    <a:lnL cap="flat" cmpd="sng" w="9525">
-                      <a:solidFill>
-                        <a:srgbClr val="000000"/>
-                      </a:solidFill>
-                      <a:prstDash val="solid"/>
-                      <a:round/>
-                      <a:headEnd len="sm" w="sm" type="none"/>
-                      <a:tailEnd len="sm" w="sm" type="none"/>
-                    </a:lnL>
-                    <a:lnR cap="flat" cmpd="sng" w="9525">
-                      <a:solidFill>
-                        <a:srgbClr val="000000"/>
-                      </a:solidFill>
-                      <a:prstDash val="solid"/>
-                      <a:round/>
-                      <a:headEnd len="sm" w="sm" type="none"/>
-                      <a:tailEnd len="sm" w="sm" type="none"/>
-                    </a:lnR>
-                    <a:lnT cap="flat" cmpd="sng" w="9525">
-                      <a:solidFill>
-                        <a:srgbClr val="000000"/>
-                      </a:solidFill>
-                      <a:prstDash val="solid"/>
-                      <a:round/>
-                      <a:headEnd len="sm" w="sm" type="none"/>
-                      <a:tailEnd len="sm" w="sm" type="none"/>
-                    </a:lnT>
-                    <a:lnB cap="flat" cmpd="sng" w="9525">
-                      <a:solidFill>
-                        <a:srgbClr val="000000"/>
-                      </a:solidFill>
-                      <a:prstDash val="solid"/>
-                      <a:round/>
-                      <a:headEnd len="sm" w="sm" type="none"/>
-                      <a:tailEnd len="sm" w="sm" type="none"/>
-                    </a:lnB>
-                    <a:solidFill>
-                      <a:srgbClr val="FFFFFF"/>
-                    </a:solidFill>
-                  </a:tcPr>
-                </a:tc>
-              </a:tr>
-              <a:tr h="500000">
-                <a:tc>
-                  <a:txBody>
-                    <a:bodyPr/>
-                    <a:lstStyle/>
-                    <a:p>
-                      <a:pPr indent="0" lvl="0" marL="0" rtl="0" algn="l">
-                        <a:spcBef>
-                          <a:spcPts val="0"/>
-                        </a:spcBef>
-                        <a:spcAft>
-                          <a:spcPts val="0"/>
-                        </a:spcAft>
-                        <a:buNone/>
-                      </a:pPr>
-                      <a:r>
-                        <a:rPr lang="en" sz="800" b="1"/>
-                        <a:t>Students to track</a:t>
-                      </a:r>
-                      <a:endParaRPr sz="800"/>
-                    </a:p>
-                  </a:txBody>
-                  <a:tcPr marT="27432" marB="27432" marR="91450" marL="91450">
-                    <a:lnL cap="flat" cmpd="sng" w="9525">
-                      <a:solidFill>
-                        <a:srgbClr val="000000"/>
-                      </a:solidFill>
-                      <a:prstDash val="solid"/>
-                      <a:round/>
-                      <a:headEnd len="sm" w="sm" type="none"/>
-                      <a:tailEnd len="sm" w="sm" type="none"/>
-                    </a:lnL>
-                    <a:lnR cap="flat" cmpd="sng" w="9525">
-                      <a:solidFill>
-                        <a:srgbClr val="000000"/>
-                      </a:solidFill>
-                      <a:prstDash val="solid"/>
-                      <a:round/>
-                      <a:headEnd len="sm" w="sm" type="none"/>
-                      <a:tailEnd len="sm" w="sm" type="none"/>
-                    </a:lnR>
-                    <a:lnT cap="flat" cmpd="sng" w="9525">
-                      <a:solidFill>
-                        <a:srgbClr val="000000"/>
-                      </a:solidFill>
-                      <a:prstDash val="solid"/>
-                      <a:round/>
-                      <a:headEnd len="sm" w="sm" type="none"/>
-                      <a:tailEnd len="sm" w="sm" type="none"/>
-                    </a:lnT>
-                    <a:lnB cap="flat" cmpd="sng" w="9525">
-                      <a:solidFill>
-                        <a:srgbClr val="000000"/>
-                      </a:solidFill>
-                      <a:prstDash val="solid"/>
-                      <a:round/>
-                      <a:headEnd len="sm" w="sm" type="none"/>
-                      <a:tailEnd len="sm" w="sm" type="none"/>
-                    </a:lnB>
-                    <a:solidFill>
-                      <a:srgbClr val="FFFFFF"/>
-                    </a:solidFill>
-                  </a:tcPr>
-                </a:tc>
-                <a:tc>
-                  <a:txBody>
-                    <a:bodyPr/>
-                    <a:lstStyle/>
-                    <a:p>
-                      <a:pPr indent="0" lvl="0" marL="0" rtl="0" algn="l">
-                        <a:spcBef>
-                          <a:spcPts val="0"/>
-                        </a:spcBef>
-                        <a:spcAft>
-                          <a:spcPts val="0"/>
-                        </a:spcAft>
-                        <a:buNone/>
-                      </a:pPr>
-                      <a:r>
-                        <a:rPr lang="en" sz="800"/>
-                        <a:t>MHS pass rate 78%, SWD 54%, ELL 20%; 76 non-passers, 22 within 25 points of passing.</a:t>
-                      </a:r>
-                      <a:endParaRPr sz="800"/>
-                    </a:p>
-                  </a:txBody>
-                  <a:tcPr marT="27432" marB="27432" marR="91450" marL="91450">
-                    <a:lnL cap="flat" cmpd="sng" w="9525">
-                      <a:solidFill>
-                        <a:srgbClr val="000000"/>
-                      </a:solidFill>
-                      <a:prstDash val="solid"/>
-                      <a:round/>
-                      <a:headEnd len="sm" w="sm" type="none"/>
-                      <a:tailEnd len="sm" w="sm" type="none"/>
-                    </a:lnL>
-                    <a:lnR cap="flat" cmpd="sng" w="9525">
-                      <a:solidFill>
-                        <a:srgbClr val="000000"/>
-                      </a:solidFill>
-                      <a:prstDash val="solid"/>
-                      <a:round/>
-                      <a:headEnd len="sm" w="sm" type="none"/>
-                      <a:tailEnd len="sm" w="sm" type="none"/>
-                    </a:lnR>
-                    <a:lnT cap="flat" cmpd="sng" w="9525">
-                      <a:solidFill>
-                        <a:srgbClr val="000000"/>
-                      </a:solidFill>
-                      <a:prstDash val="solid"/>
-                      <a:round/>
-                      <a:headEnd len="sm" w="sm" type="none"/>
-                      <a:tailEnd len="sm" w="sm" type="none"/>
-                    </a:lnT>
-                    <a:lnB cap="flat" cmpd="sng" w="9525">
-                      <a:solidFill>
-                        <a:srgbClr val="000000"/>
-                      </a:solidFill>
-                      <a:prstDash val="solid"/>
-                      <a:round/>
-                      <a:headEnd len="sm" w="sm" type="none"/>
-                      <a:tailEnd len="sm" w="sm" type="none"/>
-                    </a:lnB>
-                    <a:solidFill>
-                      <a:srgbClr val="FFFFFF"/>
-                    </a:solidFill>
-                  </a:tcPr>
-                </a:tc>
-                <a:tc>
-                  <a:txBody>
-                    <a:bodyPr/>
-                    <a:lstStyle/>
-                    <a:p>
-                      <a:pPr indent="0" lvl="0" marL="0" rtl="0" algn="l">
-                        <a:spcBef>
-                          <a:spcPts val="0"/>
-                        </a:spcBef>
-                        <a:spcAft>
-                          <a:spcPts val="0"/>
-                        </a:spcAft>
-                        <a:buNone/>
-                      </a:pPr>
-                      <a:r>
-                        <a:rPr lang="en" sz="800"/>
-                        <a:t>Named tracking list; bi-weekly progress checks.</a:t>
-                      </a:r>
-                      <a:endParaRPr sz="800"/>
-                    </a:p>
-                  </a:txBody>
-                  <a:tcPr marT="27432" marB="27432" marR="91450" marL="91450">
-                    <a:lnL cap="flat" cmpd="sng" w="9525">
-                      <a:solidFill>
-                        <a:srgbClr val="000000"/>
-                      </a:solidFill>
-                      <a:prstDash val="solid"/>
-                      <a:round/>
-                      <a:headEnd len="sm" w="sm" type="none"/>
-                      <a:tailEnd len="sm" w="sm" type="none"/>
-                    </a:lnL>
-                    <a:lnR cap="flat" cmpd="sng" w="9525">
-                      <a:solidFill>
-                        <a:srgbClr val="000000"/>
-                      </a:solidFill>
-                      <a:prstDash val="solid"/>
-                      <a:round/>
-                      <a:headEnd len="sm" w="sm" type="none"/>
-                      <a:tailEnd len="sm" w="sm" type="none"/>
-                    </a:lnR>
-                    <a:lnT cap="flat" cmpd="sng" w="9525">
-                      <a:solidFill>
-                        <a:srgbClr val="000000"/>
-                      </a:solidFill>
-                      <a:prstDash val="solid"/>
-                      <a:round/>
-                      <a:headEnd len="sm" w="sm" type="none"/>
-                      <a:tailEnd len="sm" w="sm" type="none"/>
-                    </a:lnT>
-                    <a:lnB cap="flat" cmpd="sng" w="9525">
-                      <a:solidFill>
-                        <a:srgbClr val="000000"/>
-                      </a:solidFill>
-                      <a:prstDash val="solid"/>
-                      <a:round/>
-                      <a:headEnd len="sm" w="sm" type="none"/>
-                      <a:tailEnd len="sm" w="sm" type="none"/>
-                    </a:lnB>
-                    <a:solidFill>
-                      <a:srgbClr val="FFFFFF"/>
-                    </a:solidFill>
-                  </a:tcPr>
-                </a:tc>
-              </a:tr>
-            </a:tbl>
-          </a:graphicData>
-        </a:graphic>
-      </p:graphicFrame>
-    </p:spTree>
-  </p:cSld>
-  <p:clrMapOvr>
-    <a:masterClrMapping/>
-  </p:clrMapOvr>
-</p:sld>
-</file>
-
-<file path=ppt/slides/slide3.xml><?xml version="1.0" encoding="utf-8"?>
-<p:sld xmlns:a="http://schemas.openxmlformats.org/drawingml/2006/main" xmlns:r="http://schemas.openxmlformats.org/officeDocument/2006/relationships" xmlns:mc="http://schemas.openxmlformats.org/markup-compatibility/2006" xmlns:mv="urn:schemas-microsoft-com:mac:vml" xmlns:p="http://schemas.openxmlformats.org/presentationml/2006/main" xmlns:c="http://schemas.openxmlformats.org/drawingml/2006/chart" xmlns:dgm="http://schemas.openxmlformats.org/drawingml/2006/diagram" xmlns:o="urn:schemas-microsoft-com:office:office" xmlns:v="urn:schemas-microsoft-com:vml" xmlns:pvml="urn:schemas-microsoft-com:office:powerpoint" xmlns:com="http://schemas.openxmlformats.org/drawingml/2006/compatibility" xmlns:p14="http://schemas.microsoft.com/office/powerpoint/2010/main" xmlns:p15="http://schemas.microsoft.com/office/powerpoint/2012/main" xmlns:ahyp="http://schemas.microsoft.com/office/drawing/2018/hyperlinkcolor">
-  <p:cSld>
-    <p:spTree>
-      <p:nvGrpSpPr>
-        <p:cNvPr id="53" name="Shape 53"/>
-        <p:cNvGrpSpPr/>
-        <p:nvPr/>
-      </p:nvGrpSpPr>
-      <p:grpSpPr>
-        <a:xfrm>
-          <a:off x="0" y="0"/>
-          <a:ext cx="0" cy="0"/>
-          <a:chOff x="0" y="0"/>
-          <a:chExt cx="0" cy="0"/>
-        </a:xfrm>
-      </p:grpSpPr>
-      <p:pic>
-        <p:nvPicPr>
-          <p:cNvPr id="54" name="Google Shape;54;p13"/>
-          <p:cNvPicPr preferRelativeResize="0"/>
-          <p:nvPr/>
-        </p:nvPicPr>
-        <p:blipFill rotWithShape="1">
-          <a:blip r:embed="rId3">
-            <a:alphaModFix/>
-          </a:blip>
-          <a:srcRect b="0" l="0" r="0" t="0"/>
-          <a:stretch/>
-        </p:blipFill>
-        <p:spPr>
-          <a:xfrm>
-            <a:off x="0" y="0"/>
-            <a:ext cx="9144003" cy="5143501"/>
-          </a:xfrm>
-          <a:prstGeom prst="rect">
-            <a:avLst/>
-          </a:prstGeom>
-          <a:noFill/>
-          <a:ln>
-            <a:noFill/>
-          </a:ln>
-        </p:spPr>
-      </p:pic>
-      <p:sp>
-        <p:nvSpPr>
-          <p:cNvPr id="55" name="Google Shape;55;p13"/>
-          <p:cNvSpPr/>
-          <p:nvPr/>
-        </p:nvSpPr>
-        <p:spPr>
-          <a:xfrm>
-            <a:off x="-21225" y="4810975"/>
-            <a:ext cx="9211500" cy="332400"/>
-          </a:xfrm>
-          <a:prstGeom prst="rect">
-            <a:avLst/>
-          </a:prstGeom>
-          <a:solidFill>
-            <a:srgbClr val="214F93"/>
-          </a:solidFill>
-          <a:ln>
-            <a:noFill/>
-          </a:ln>
-        </p:spPr>
-        <p:txBody>
-          <a:bodyPr anchorCtr="0" anchor="ctr" bIns="91425" lIns="91425" spcFirstLastPara="1" rIns="91425" wrap="square" tIns="91425">
-            <a:noAutofit/>
-          </a:bodyPr>
-          <a:lstStyle/>
-          <a:p>
-            <a:pPr indent="0" lvl="0" marL="0" marR="0" rtl="0" algn="ctr">
-              <a:lnSpc>
-                <a:spcPct val="100000"/>
-              </a:lnSpc>
-              <a:spcBef>
-                <a:spcPts val="0"/>
-              </a:spcBef>
-              <a:spcAft>
-                <a:spcPts val="0"/>
-              </a:spcAft>
-              <a:buClr>
-                <a:srgbClr val="000000"/>
-              </a:buClr>
-              <a:buSzPts val="1400"/>
-              <a:buFont typeface="Arial"/>
-              <a:buNone/>
-            </a:pPr>
-            <a:r>
-              <a:t/>
-            </a:r>
-            <a:endParaRPr b="0" i="0" sz="1400" u="none" cap="none" strike="noStrike">
-              <a:solidFill>
-                <a:srgbClr val="000000"/>
-              </a:solidFill>
-              <a:latin typeface="Overpass"/>
-              <a:ea typeface="Overpass"/>
-              <a:cs typeface="Overpass"/>
-              <a:sym typeface="Overpass"/>
-            </a:endParaRPr>
-          </a:p>
-        </p:txBody>
-      </p:sp>
-      <p:sp>
-        <p:nvSpPr>
-          <p:cNvPr id="56" name="Google Shape;56;p13"/>
-          <p:cNvSpPr txBox="1"/>
-          <p:nvPr>
-            <p:ph type="ctrTitle"/>
-          </p:nvPr>
-        </p:nvSpPr>
-        <p:spPr>
-          <a:xfrm>
-            <a:off x="880625" y="-239275"/>
-            <a:ext cx="7674300" cy="1071600"/>
-          </a:xfrm>
-          <a:prstGeom prst="rect">
-            <a:avLst/>
-          </a:prstGeom>
-          <a:noFill/>
-          <a:ln>
-            <a:noFill/>
-          </a:ln>
-        </p:spPr>
-        <p:txBody>
-          <a:bodyPr anchorCtr="0" anchor="ctr" bIns="91425" lIns="91425" spcFirstLastPara="1" rIns="91425" wrap="square" tIns="91425">
-            <a:noAutofit/>
-          </a:bodyPr>
-          <a:lstStyle/>
-          <a:p>
-            <a:pPr indent="0" lvl="0" marL="0" rtl="0" algn="ctr">
-              <a:lnSpc>
-                <a:spcPct val="100000"/>
-              </a:lnSpc>
-              <a:spcBef>
-                <a:spcPts val="0"/>
-              </a:spcBef>
-              <a:spcAft>
-                <a:spcPts val="0"/>
-              </a:spcAft>
-              <a:buSzPts val="4500"/>
-              <a:buNone/>
-            </a:pPr>
-            <a:r>
-              <a:rPr lang="en" sz="3000">
-                <a:solidFill>
-                  <a:srgbClr val="214F93"/>
-                </a:solidFill>
-              </a:rPr>
-              <a:t>Reading at a Glance</a:t>
-            </a:r>
-            <a:endParaRPr sz="3000">
-              <a:solidFill>
-                <a:srgbClr val="214F93"/>
-              </a:solidFill>
-            </a:endParaRPr>
-          </a:p>
-        </p:txBody>
-      </p:sp>
-      <p:sp>
-        <p:nvSpPr>
-          <p:cNvPr id="901" name="Text 901"/>
-          <p:cNvSpPr txBox="1"/>
-          <p:nvPr/>
-        </p:nvSpPr>
-        <p:spPr>
-          <a:xfrm>
-            <a:off x="320040" y="530352"/>
-            <a:ext cx="8503920" cy="320040"/>
-          </a:xfrm>
-          <a:prstGeom prst="rect">
-            <a:avLst/>
-          </a:prstGeom>
-          <a:noFill/>
-        </p:spPr>
-        <p:txBody>
-          <a:bodyPr wrap="square" lIns="0" tIns="0" rIns="0" bIns="0" anchor="t">
-            <a:noAutofit/>
-          </a:bodyPr>
-          <a:lstStyle/>
-          <a:p>
-            <a:pPr algn="ctr">
-              <a:spcBef>
-                <a:spcPts val="0"/>
-              </a:spcBef>
-              <a:spcAft>
-                <a:spcPts val="0"/>
-              </a:spcAft>
-              <a:buNone/>
-            </a:pPr>
-            <a:r>
-              <a:rPr lang="en" sz="1400" b="1">
-                <a:solidFill>
-                  <a:srgbClr val="214F93"/>
-                </a:solidFill>
-              </a:rPr>
-              <a:t>Three Critical Skills to Improve</a:t>
-            </a:r>
-          </a:p>
-        </p:txBody>
-      </p:sp>
-      <p:sp>
-        <p:nvSpPr>
-          <p:cNvPr id="902" name="Text 902"/>
-          <p:cNvSpPr txBox="1"/>
-          <p:nvPr/>
-        </p:nvSpPr>
-        <p:spPr>
-          <a:xfrm>
-            <a:off x="320040" y="868680"/>
-            <a:ext cx="8503920" cy="164592"/>
-          </a:xfrm>
-          <a:prstGeom prst="rect">
-            <a:avLst/>
-          </a:prstGeom>
-          <a:noFill/>
-        </p:spPr>
-        <p:txBody>
-          <a:bodyPr wrap="square" lIns="0" tIns="0" rIns="0" bIns="0" anchor="t">
-            <a:noAutofit/>
-          </a:bodyPr>
-          <a:lstStyle/>
-          <a:p>
-            <a:pPr algn="ctr">
-              <a:spcBef>
-                <a:spcPts val="0"/>
-              </a:spcBef>
-              <a:spcAft>
-                <a:spcPts val="0"/>
-              </a:spcAft>
-              <a:buNone/>
-            </a:pPr>
-            <a:r>
-              <a:rPr lang="en" sz="750">
-                <a:solidFill>
-                  <a:srgbClr val="7A8398"/>
-                </a:solidFill>
-              </a:rPr>
-              <a:t>All students underperforming on these standards. Bars show % correct; goal line at 60%.</a:t>
-            </a:r>
-          </a:p>
-        </p:txBody>
-      </p:sp>
-      <p:sp>
-        <p:nvSpPr>
-          <p:cNvPr id="903" name="Shape 903"/>
-          <p:cNvSpPr/>
-          <p:nvPr/>
-        </p:nvSpPr>
-        <p:spPr>
-          <a:xfrm>
-            <a:off x="338328" y="1161288"/>
-            <a:ext cx="2697480" cy="3154680"/>
-          </a:xfrm>
-          <a:prstGeom prst="roundRect">
-            <a:avLst>
-              <a:gd name="adj" fmla="val 6000"/>
-            </a:avLst>
-          </a:prstGeom>
-          <a:solidFill>
-            <a:srgbClr val="E6E9EF"/>
-          </a:solidFill>
-          <a:ln>
-            <a:noFill/>
-          </a:ln>
-        </p:spPr>
-        <p:txBody>
-          <a:bodyPr/>
-          <a:lstStyle/>
-          <a:p>
-            <a:endParaRPr sz="800"/>
-          </a:p>
-        </p:txBody>
-      </p:sp>
-      <p:sp>
-        <p:nvSpPr>
-          <p:cNvPr id="904" name="Shape 904"/>
-          <p:cNvSpPr/>
-          <p:nvPr/>
-        </p:nvSpPr>
-        <p:spPr>
-          <a:xfrm>
-            <a:off x="320040" y="1143000"/>
-            <a:ext cx="2697480" cy="3154680"/>
-          </a:xfrm>
-          <a:prstGeom prst="roundRect">
-            <a:avLst>
-              <a:gd name="adj" fmla="val 6000"/>
-            </a:avLst>
-          </a:prstGeom>
-          <a:solidFill>
-            <a:srgbClr val="F8FAFB"/>
-          </a:solidFill>
-          <a:ln w="9525">
-            <a:solidFill>
-              <a:srgbClr val="CBD5E1"/>
-            </a:solidFill>
-          </a:ln>
-        </p:spPr>
-        <p:txBody>
-          <a:bodyPr/>
-          <a:lstStyle/>
-          <a:p>
-            <a:endParaRPr sz="800"/>
-          </a:p>
-        </p:txBody>
-      </p:sp>
-      <p:sp>
-        <p:nvSpPr>
-          <p:cNvPr id="905" name="Shape 905"/>
-          <p:cNvSpPr/>
-          <p:nvPr/>
-        </p:nvSpPr>
-        <p:spPr>
-          <a:xfrm>
-            <a:off x="2724912" y="1252728"/>
-            <a:ext cx="256032" cy="256032"/>
-          </a:xfrm>
-          <a:prstGeom prst="ellipse">
-            <a:avLst/>
-          </a:prstGeom>
-          <a:solidFill>
-            <a:srgbClr val="214F93"/>
-          </a:solidFill>
-          <a:ln>
-            <a:noFill/>
-          </a:ln>
-        </p:spPr>
-        <p:txBody>
-          <a:bodyPr/>
-          <a:lstStyle/>
-          <a:p>
-            <a:endParaRPr sz="800"/>
-          </a:p>
-        </p:txBody>
-      </p:sp>
-      <p:sp>
-        <p:nvSpPr>
-          <p:cNvPr id="906" name="Text 906"/>
-          <p:cNvSpPr txBox="1"/>
-          <p:nvPr/>
-        </p:nvSpPr>
-        <p:spPr>
-          <a:xfrm>
-            <a:off x="2724912" y="1252728"/>
-            <a:ext cx="256032" cy="256032"/>
-          </a:xfrm>
-          <a:prstGeom prst="rect">
-            <a:avLst/>
-          </a:prstGeom>
-          <a:noFill/>
-        </p:spPr>
-        <p:txBody>
-          <a:bodyPr wrap="square" lIns="0" tIns="0" rIns="0" bIns="0" anchor="ctr">
-            <a:noAutofit/>
-          </a:bodyPr>
-          <a:lstStyle/>
-          <a:p>
-            <a:pPr algn="ctr">
-              <a:spcBef>
-                <a:spcPts val="0"/>
-              </a:spcBef>
-              <a:spcAft>
-                <a:spcPts val="0"/>
-              </a:spcAft>
-              <a:buNone/>
-            </a:pPr>
-            <a:r>
-              <a:rPr lang="en" sz="900" b="1">
-                <a:solidFill>
-                  <a:srgbClr val="FFFFFF"/>
-                </a:solidFill>
-              </a:rPr>
-              <a:t>1</a:t>
-            </a:r>
-          </a:p>
-        </p:txBody>
-      </p:sp>
-      <p:sp>
-        <p:nvSpPr>
-          <p:cNvPr id="907" name="Text 907"/>
-          <p:cNvSpPr txBox="1"/>
-          <p:nvPr/>
-        </p:nvSpPr>
-        <p:spPr>
-          <a:xfrm>
-            <a:off x="466344" y="1289304"/>
-            <a:ext cx="2084832" cy="411480"/>
-          </a:xfrm>
-          <a:prstGeom prst="rect">
-            <a:avLst/>
-          </a:prstGeom>
-          <a:noFill/>
-        </p:spPr>
-        <p:txBody>
-          <a:bodyPr wrap="square" lIns="0" tIns="0" rIns="0" bIns="0" anchor="t">
-            <a:noAutofit/>
-          </a:bodyPr>
-          <a:lstStyle/>
-          <a:p>
-            <a:pPr algn="l">
-              <a:spcBef>
-                <a:spcPts val="0"/>
-              </a:spcBef>
-              <a:spcAft>
-                <a:spcPts val="0"/>
-              </a:spcAft>
-              <a:buNone/>
-            </a:pPr>
-            <a:r>
-              <a:rPr lang="en" sz="1100" b="1">
-                <a:solidFill>
-                  <a:srgbClr val="214F93"/>
-                </a:solidFill>
-              </a:rPr>
-              <a:t>Evaluate details in a text, determining which could confirm or disprove an argument or position</a:t>
-            </a:r>
-          </a:p>
-        </p:txBody>
-      </p:sp>
-      <p:sp>
-        <p:nvSpPr>
-          <p:cNvPr id="908" name="Text 908"/>
-          <p:cNvSpPr txBox="1"/>
-          <p:nvPr/>
-        </p:nvSpPr>
-        <p:spPr>
-          <a:xfrm>
-            <a:off x="466344" y="1709928"/>
-            <a:ext cx="2404872" cy="164592"/>
-          </a:xfrm>
-          <a:prstGeom prst="rect">
-            <a:avLst/>
-          </a:prstGeom>
-          <a:noFill/>
-        </p:spPr>
-        <p:txBody>
-          <a:bodyPr wrap="square" lIns="0" tIns="0" rIns="0" bIns="0" anchor="t">
-            <a:noAutofit/>
-          </a:bodyPr>
-          <a:lstStyle/>
-          <a:p>
-            <a:pPr algn="l">
-              <a:spcBef>
-                <a:spcPts val="0"/>
-              </a:spcBef>
-              <a:spcAft>
-                <a:spcPts val="0"/>
-              </a:spcAft>
-              <a:buNone/>
-            </a:pPr>
-            <a:r>
-              <a:rPr lang="en" sz="800">
-                <a:solidFill>
-                  <a:srgbClr val="7A8398"/>
-                </a:solidFill>
-              </a:rPr>
-              <a:t>Standard 10.RI.1.C</a:t>
-            </a:r>
-          </a:p>
-        </p:txBody>
-      </p:sp>
-      <p:sp>
-        <p:nvSpPr>
-          <p:cNvPr id="909" name="Text 909"/>
-          <p:cNvSpPr txBox="1"/>
-          <p:nvPr/>
-        </p:nvSpPr>
-        <p:spPr>
-          <a:xfrm>
-            <a:off x="466344" y="2057400"/>
-            <a:ext cx="1322680" cy="182880"/>
-          </a:xfrm>
-          <a:prstGeom prst="rect">
-            <a:avLst/>
-          </a:prstGeom>
-          <a:noFill/>
-        </p:spPr>
-        <p:txBody>
-          <a:bodyPr wrap="square" lIns="0" tIns="0" rIns="0" bIns="0" anchor="t">
-            <a:noAutofit/>
-          </a:bodyPr>
-          <a:lstStyle/>
-          <a:p>
-            <a:pPr algn="l">
-              <a:spcBef>
-                <a:spcPts val="0"/>
-              </a:spcBef>
-              <a:spcAft>
-                <a:spcPts val="0"/>
-              </a:spcAft>
-              <a:buNone/>
-            </a:pPr>
-            <a:r>
-              <a:rPr lang="en" sz="920" b="1">
-                <a:solidFill>
-                  <a:srgbClr val="1F2A44"/>
-                </a:solidFill>
-              </a:rPr>
-              <a:t>All students</a:t>
-            </a:r>
-          </a:p>
-        </p:txBody>
-      </p:sp>
-      <p:sp>
-        <p:nvSpPr>
-          <p:cNvPr id="910" name="Text 910"/>
-          <p:cNvSpPr txBox="1"/>
-          <p:nvPr/>
-        </p:nvSpPr>
-        <p:spPr>
-          <a:xfrm>
-            <a:off x="1789024" y="2057400"/>
-            <a:ext cx="721462" cy="182880"/>
-          </a:xfrm>
-          <a:prstGeom prst="rect">
-            <a:avLst/>
-          </a:prstGeom>
-          <a:noFill/>
-        </p:spPr>
-        <p:txBody>
-          <a:bodyPr wrap="square" lIns="0" tIns="0" rIns="0" bIns="0" anchor="t">
-            <a:noAutofit/>
-          </a:bodyPr>
-          <a:lstStyle/>
-          <a:p>
-            <a:pPr algn="r">
-              <a:spcBef>
-                <a:spcPts val="0"/>
-              </a:spcBef>
-              <a:spcAft>
-                <a:spcPts val="0"/>
-              </a:spcAft>
-              <a:buNone/>
-            </a:pPr>
-            <a:r>
-              <a:rPr lang="en" sz="700">
-                <a:solidFill>
-                  <a:srgbClr val="7A8398"/>
-                </a:solidFill>
-              </a:rPr>
-              <a:t>905 responses</a:t>
-            </a:r>
-          </a:p>
-        </p:txBody>
-      </p:sp>
-      <p:sp>
-        <p:nvSpPr>
-          <p:cNvPr id="911" name="Shape 911"/>
-          <p:cNvSpPr/>
-          <p:nvPr/>
-        </p:nvSpPr>
-        <p:spPr>
-          <a:xfrm>
-            <a:off x="466344" y="2286000"/>
-            <a:ext cx="1947672" cy="137160"/>
-          </a:xfrm>
-          <a:prstGeom prst="roundRect">
-            <a:avLst>
-              <a:gd name="adj" fmla="val 50000"/>
-            </a:avLst>
-          </a:prstGeom>
-          <a:solidFill>
-            <a:srgbClr val="E6E9EF"/>
-          </a:solidFill>
-          <a:ln>
-            <a:noFill/>
-          </a:ln>
-        </p:spPr>
-        <p:txBody>
-          <a:bodyPr/>
-          <a:lstStyle/>
-          <a:p>
-            <a:endParaRPr sz="800"/>
-          </a:p>
-        </p:txBody>
-      </p:sp>
-      <p:sp>
-        <p:nvSpPr>
-          <p:cNvPr id="912" name="Shape 912"/>
-          <p:cNvSpPr/>
-          <p:nvPr/>
-        </p:nvSpPr>
-        <p:spPr>
-          <a:xfrm>
-            <a:off x="466344" y="2286000"/>
-            <a:ext cx="1032266" cy="137160"/>
-          </a:xfrm>
-          <a:prstGeom prst="roundRect">
-            <a:avLst>
-              <a:gd name="adj" fmla="val 50000"/>
-            </a:avLst>
-          </a:prstGeom>
-          <a:solidFill>
-            <a:srgbClr val="F59E0B"/>
-          </a:solidFill>
-          <a:ln>
-            <a:noFill/>
-          </a:ln>
-        </p:spPr>
-        <p:txBody>
-          <a:bodyPr/>
-          <a:lstStyle/>
-          <a:p>
-            <a:endParaRPr sz="800"/>
-          </a:p>
-        </p:txBody>
-      </p:sp>
-      <p:sp>
-        <p:nvSpPr>
-          <p:cNvPr id="913" name="Shape 913"/>
-          <p:cNvSpPr/>
-          <p:nvPr/>
-        </p:nvSpPr>
-        <p:spPr>
-          <a:xfrm>
-            <a:off x="1634947" y="2258568"/>
-            <a:ext cx="12802" cy="210312"/>
-          </a:xfrm>
-          <a:prstGeom prst="rect">
-            <a:avLst/>
-          </a:prstGeom>
-          <a:solidFill>
-            <a:srgbClr val="94A3B8"/>
-          </a:solidFill>
-          <a:ln>
-            <a:noFill/>
-          </a:ln>
-        </p:spPr>
-        <p:txBody>
-          <a:bodyPr/>
-          <a:lstStyle/>
-          <a:p>
-            <a:endParaRPr sz="800"/>
-          </a:p>
-        </p:txBody>
-      </p:sp>
-      <p:sp>
-        <p:nvSpPr>
-          <p:cNvPr id="914" name="Text 914"/>
-          <p:cNvSpPr txBox="1"/>
-          <p:nvPr/>
-        </p:nvSpPr>
-        <p:spPr>
-          <a:xfrm>
-            <a:off x="2487168" y="2258568"/>
-            <a:ext cx="365760" cy="182880"/>
-          </a:xfrm>
-          <a:prstGeom prst="rect">
-            <a:avLst/>
-          </a:prstGeom>
-          <a:noFill/>
-        </p:spPr>
-        <p:txBody>
-          <a:bodyPr wrap="square" lIns="0" tIns="0" rIns="0" bIns="0" anchor="ctr">
-            <a:noAutofit/>
-          </a:bodyPr>
-          <a:lstStyle/>
-          <a:p>
-            <a:pPr algn="l">
-              <a:spcBef>
-                <a:spcPts val="0"/>
-              </a:spcBef>
-              <a:spcAft>
-                <a:spcPts val="0"/>
-              </a:spcAft>
-              <a:buNone/>
-            </a:pPr>
-            <a:r>
-              <a:rPr lang="en" sz="1050" b="1">
-                <a:solidFill>
-                  <a:srgbClr val="1F2A44"/>
-                </a:solidFill>
-              </a:rPr>
-              <a:t>53%</a:t>
-            </a:r>
-          </a:p>
-        </p:txBody>
-      </p:sp>
-      <p:sp>
-        <p:nvSpPr>
-          <p:cNvPr id="915" name="Text 915"/>
-          <p:cNvSpPr txBox="1"/>
-          <p:nvPr/>
-        </p:nvSpPr>
-        <p:spPr>
-          <a:xfrm>
-            <a:off x="466344" y="2715768"/>
-            <a:ext cx="1322680" cy="182880"/>
-          </a:xfrm>
-          <a:prstGeom prst="rect">
-            <a:avLst/>
-          </a:prstGeom>
-          <a:noFill/>
-        </p:spPr>
-        <p:txBody>
-          <a:bodyPr wrap="square" lIns="0" tIns="0" rIns="0" bIns="0" anchor="t">
-            <a:noAutofit/>
-          </a:bodyPr>
-          <a:lstStyle/>
-          <a:p>
-            <a:pPr algn="l">
-              <a:spcBef>
-                <a:spcPts val="0"/>
-              </a:spcBef>
-              <a:spcAft>
-                <a:spcPts val="0"/>
-              </a:spcAft>
-              <a:buNone/>
-            </a:pPr>
-            <a:r>
-              <a:rPr lang="en" sz="920" b="1">
-                <a:solidFill>
-                  <a:srgbClr val="1F2A44"/>
-                </a:solidFill>
-              </a:rPr>
-              <a:t>SWD</a:t>
-            </a:r>
-          </a:p>
-        </p:txBody>
-      </p:sp>
-      <p:sp>
-        <p:nvSpPr>
-          <p:cNvPr id="916" name="Text 916"/>
-          <p:cNvSpPr txBox="1"/>
-          <p:nvPr/>
-        </p:nvSpPr>
-        <p:spPr>
-          <a:xfrm>
-            <a:off x="1789024" y="2715768"/>
-            <a:ext cx="721462" cy="182880"/>
-          </a:xfrm>
-          <a:prstGeom prst="rect">
-            <a:avLst/>
-          </a:prstGeom>
-          <a:noFill/>
-        </p:spPr>
-        <p:txBody>
-          <a:bodyPr wrap="square" lIns="0" tIns="0" rIns="0" bIns="0" anchor="t">
-            <a:noAutofit/>
-          </a:bodyPr>
-          <a:lstStyle/>
-          <a:p>
-            <a:pPr algn="r">
-              <a:spcBef>
-                <a:spcPts val="0"/>
-              </a:spcBef>
-              <a:spcAft>
-                <a:spcPts val="0"/>
-              </a:spcAft>
-              <a:buNone/>
-            </a:pPr>
-            <a:r>
-              <a:rPr lang="en" sz="700">
-                <a:solidFill>
-                  <a:srgbClr val="7A8398"/>
-                </a:solidFill>
-              </a:rPr>
-              <a:t>118 responses</a:t>
-            </a:r>
-          </a:p>
-        </p:txBody>
-      </p:sp>
-      <p:sp>
-        <p:nvSpPr>
-          <p:cNvPr id="917" name="Shape 917"/>
-          <p:cNvSpPr/>
-          <p:nvPr/>
-        </p:nvSpPr>
-        <p:spPr>
-          <a:xfrm>
-            <a:off x="466344" y="2944368"/>
-            <a:ext cx="1947672" cy="137160"/>
-          </a:xfrm>
-          <a:prstGeom prst="roundRect">
-            <a:avLst>
-              <a:gd name="adj" fmla="val 50000"/>
-            </a:avLst>
-          </a:prstGeom>
-          <a:solidFill>
-            <a:srgbClr val="E6E9EF"/>
-          </a:solidFill>
-          <a:ln>
-            <a:noFill/>
-          </a:ln>
-        </p:spPr>
-        <p:txBody>
-          <a:bodyPr/>
-          <a:lstStyle/>
-          <a:p>
-            <a:endParaRPr sz="800"/>
-          </a:p>
-        </p:txBody>
-      </p:sp>
-      <p:sp>
-        <p:nvSpPr>
-          <p:cNvPr id="918" name="Shape 918"/>
-          <p:cNvSpPr/>
-          <p:nvPr/>
-        </p:nvSpPr>
-        <p:spPr>
-          <a:xfrm>
-            <a:off x="466344" y="2944368"/>
-            <a:ext cx="779069" cy="137160"/>
-          </a:xfrm>
-          <a:prstGeom prst="roundRect">
-            <a:avLst>
-              <a:gd name="adj" fmla="val 50000"/>
-            </a:avLst>
-          </a:prstGeom>
-          <a:solidFill>
-            <a:srgbClr val="EF4444"/>
-          </a:solidFill>
-          <a:ln>
-            <a:noFill/>
-          </a:ln>
-        </p:spPr>
-        <p:txBody>
-          <a:bodyPr/>
-          <a:lstStyle/>
-          <a:p>
-            <a:endParaRPr sz="800"/>
-          </a:p>
-        </p:txBody>
-      </p:sp>
-      <p:sp>
-        <p:nvSpPr>
-          <p:cNvPr id="919" name="Shape 919"/>
-          <p:cNvSpPr/>
-          <p:nvPr/>
-        </p:nvSpPr>
-        <p:spPr>
-          <a:xfrm>
-            <a:off x="1634947" y="2916936"/>
-            <a:ext cx="12802" cy="210312"/>
-          </a:xfrm>
-          <a:prstGeom prst="rect">
-            <a:avLst/>
-          </a:prstGeom>
-          <a:solidFill>
-            <a:srgbClr val="94A3B8"/>
-          </a:solidFill>
-          <a:ln>
-            <a:noFill/>
-          </a:ln>
-        </p:spPr>
-        <p:txBody>
-          <a:bodyPr/>
-          <a:lstStyle/>
-          <a:p>
-            <a:endParaRPr sz="800"/>
-          </a:p>
-        </p:txBody>
-      </p:sp>
-      <p:sp>
-        <p:nvSpPr>
-          <p:cNvPr id="920" name="Text 920"/>
-          <p:cNvSpPr txBox="1"/>
-          <p:nvPr/>
-        </p:nvSpPr>
-        <p:spPr>
-          <a:xfrm>
-            <a:off x="2487168" y="2916936"/>
-            <a:ext cx="365760" cy="182880"/>
-          </a:xfrm>
-          <a:prstGeom prst="rect">
-            <a:avLst/>
-          </a:prstGeom>
-          <a:noFill/>
-        </p:spPr>
-        <p:txBody>
-          <a:bodyPr wrap="square" lIns="0" tIns="0" rIns="0" bIns="0" anchor="ctr">
-            <a:noAutofit/>
-          </a:bodyPr>
-          <a:lstStyle/>
-          <a:p>
-            <a:pPr algn="l">
-              <a:spcBef>
-                <a:spcPts val="0"/>
-              </a:spcBef>
-              <a:spcAft>
-                <a:spcPts val="0"/>
-              </a:spcAft>
-              <a:buNone/>
-            </a:pPr>
-            <a:r>
-              <a:rPr lang="en" sz="1050" b="1">
-                <a:solidFill>
-                  <a:srgbClr val="1F2A44"/>
-                </a:solidFill>
-              </a:rPr>
-              <a:t>40%</a:t>
-            </a:r>
-          </a:p>
-        </p:txBody>
-      </p:sp>
-      <p:sp>
-        <p:nvSpPr>
-          <p:cNvPr id="921" name="Text 921"/>
-          <p:cNvSpPr txBox="1"/>
-          <p:nvPr/>
-        </p:nvSpPr>
-        <p:spPr>
-          <a:xfrm>
-            <a:off x="466344" y="3374136"/>
-            <a:ext cx="1322680" cy="182880"/>
-          </a:xfrm>
-          <a:prstGeom prst="rect">
-            <a:avLst/>
-          </a:prstGeom>
-          <a:noFill/>
-        </p:spPr>
-        <p:txBody>
-          <a:bodyPr wrap="square" lIns="0" tIns="0" rIns="0" bIns="0" anchor="t">
-            <a:noAutofit/>
-          </a:bodyPr>
-          <a:lstStyle/>
-          <a:p>
-            <a:pPr algn="l">
-              <a:spcBef>
-                <a:spcPts val="0"/>
-              </a:spcBef>
-              <a:spcAft>
-                <a:spcPts val="0"/>
-              </a:spcAft>
-              <a:buNone/>
-            </a:pPr>
-            <a:r>
-              <a:rPr lang="en" sz="920" b="1">
-                <a:solidFill>
-                  <a:srgbClr val="1F2A44"/>
-                </a:solidFill>
-              </a:rPr>
-              <a:t>ELL</a:t>
-            </a:r>
-          </a:p>
-        </p:txBody>
-      </p:sp>
-      <p:sp>
-        <p:nvSpPr>
-          <p:cNvPr id="922" name="Text 922"/>
-          <p:cNvSpPr txBox="1"/>
-          <p:nvPr/>
-        </p:nvSpPr>
-        <p:spPr>
-          <a:xfrm>
-            <a:off x="1789024" y="3374136"/>
-            <a:ext cx="721462" cy="182880"/>
-          </a:xfrm>
-          <a:prstGeom prst="rect">
-            <a:avLst/>
-          </a:prstGeom>
-          <a:noFill/>
-        </p:spPr>
-        <p:txBody>
-          <a:bodyPr wrap="square" lIns="0" tIns="0" rIns="0" bIns="0" anchor="t">
-            <a:noAutofit/>
-          </a:bodyPr>
-          <a:lstStyle/>
-          <a:p>
-            <a:pPr algn="r">
-              <a:spcBef>
-                <a:spcPts val="0"/>
-              </a:spcBef>
-              <a:spcAft>
-                <a:spcPts val="0"/>
-              </a:spcAft>
-              <a:buNone/>
-            </a:pPr>
-            <a:r>
-              <a:rPr lang="en" sz="700">
-                <a:solidFill>
-                  <a:srgbClr val="7A8398"/>
-                </a:solidFill>
-              </a:rPr>
-              <a:t>25 responses</a:t>
-            </a:r>
-          </a:p>
-        </p:txBody>
-      </p:sp>
-      <p:sp>
-        <p:nvSpPr>
-          <p:cNvPr id="923" name="Shape 923"/>
-          <p:cNvSpPr/>
-          <p:nvPr/>
-        </p:nvSpPr>
-        <p:spPr>
-          <a:xfrm>
-            <a:off x="466344" y="3602736"/>
-            <a:ext cx="1947672" cy="137160"/>
-          </a:xfrm>
-          <a:prstGeom prst="roundRect">
-            <a:avLst>
-              <a:gd name="adj" fmla="val 50000"/>
-            </a:avLst>
-          </a:prstGeom>
-          <a:solidFill>
-            <a:srgbClr val="E6E9EF"/>
-          </a:solidFill>
-          <a:ln>
-            <a:noFill/>
-          </a:ln>
-        </p:spPr>
-        <p:txBody>
-          <a:bodyPr/>
-          <a:lstStyle/>
-          <a:p>
-            <a:endParaRPr sz="800"/>
-          </a:p>
-        </p:txBody>
-      </p:sp>
-      <p:sp>
-        <p:nvSpPr>
-          <p:cNvPr id="924" name="Shape 924"/>
-          <p:cNvSpPr/>
-          <p:nvPr/>
-        </p:nvSpPr>
-        <p:spPr>
-          <a:xfrm>
-            <a:off x="466344" y="3602736"/>
-            <a:ext cx="623255" cy="137160"/>
-          </a:xfrm>
-          <a:prstGeom prst="roundRect">
-            <a:avLst>
-              <a:gd name="adj" fmla="val 50000"/>
-            </a:avLst>
-          </a:prstGeom>
-          <a:solidFill>
-            <a:srgbClr val="EF4444"/>
-          </a:solidFill>
-          <a:ln>
-            <a:noFill/>
-          </a:ln>
-        </p:spPr>
-        <p:txBody>
-          <a:bodyPr/>
-          <a:lstStyle/>
-          <a:p>
-            <a:endParaRPr sz="800"/>
-          </a:p>
-        </p:txBody>
-      </p:sp>
-      <p:sp>
-        <p:nvSpPr>
-          <p:cNvPr id="925" name="Shape 925"/>
-          <p:cNvSpPr/>
-          <p:nvPr/>
-        </p:nvSpPr>
-        <p:spPr>
-          <a:xfrm>
-            <a:off x="1634947" y="3575304"/>
-            <a:ext cx="12802" cy="210312"/>
-          </a:xfrm>
-          <a:prstGeom prst="rect">
-            <a:avLst/>
-          </a:prstGeom>
-          <a:solidFill>
-            <a:srgbClr val="94A3B8"/>
-          </a:solidFill>
-          <a:ln>
-            <a:noFill/>
-          </a:ln>
-        </p:spPr>
-        <p:txBody>
-          <a:bodyPr/>
-          <a:lstStyle/>
-          <a:p>
-            <a:endParaRPr sz="800"/>
-          </a:p>
-        </p:txBody>
-      </p:sp>
-      <p:sp>
-        <p:nvSpPr>
-          <p:cNvPr id="926" name="Text 926"/>
-          <p:cNvSpPr txBox="1"/>
-          <p:nvPr/>
-        </p:nvSpPr>
-        <p:spPr>
-          <a:xfrm>
-            <a:off x="2487168" y="3575304"/>
-            <a:ext cx="365760" cy="182880"/>
-          </a:xfrm>
-          <a:prstGeom prst="rect">
-            <a:avLst/>
-          </a:prstGeom>
-          <a:noFill/>
-        </p:spPr>
-        <p:txBody>
-          <a:bodyPr wrap="square" lIns="0" tIns="0" rIns="0" bIns="0" anchor="ctr">
-            <a:noAutofit/>
-          </a:bodyPr>
-          <a:lstStyle/>
-          <a:p>
-            <a:pPr algn="l">
-              <a:spcBef>
-                <a:spcPts val="0"/>
-              </a:spcBef>
-              <a:spcAft>
-                <a:spcPts val="0"/>
-              </a:spcAft>
-              <a:buNone/>
-            </a:pPr>
-            <a:r>
-              <a:rPr lang="en" sz="1050" b="1">
-                <a:solidFill>
-                  <a:srgbClr val="1F2A44"/>
-                </a:solidFill>
-              </a:rPr>
-              <a:t>32%</a:t>
-            </a:r>
-          </a:p>
-        </p:txBody>
-      </p:sp>
-      <p:sp>
-        <p:nvSpPr>
-          <p:cNvPr id="927" name="Text 927"/>
-          <p:cNvSpPr txBox="1"/>
-          <p:nvPr/>
-        </p:nvSpPr>
-        <p:spPr>
-          <a:xfrm>
-            <a:off x="1406347" y="3922776"/>
-            <a:ext cx="457200" cy="128016"/>
-          </a:xfrm>
-          <a:prstGeom prst="rect">
-            <a:avLst/>
-          </a:prstGeom>
-          <a:noFill/>
-        </p:spPr>
-        <p:txBody>
-          <a:bodyPr wrap="square" lIns="0" tIns="0" rIns="0" bIns="0" anchor="t">
-            <a:noAutofit/>
-          </a:bodyPr>
-          <a:lstStyle/>
-          <a:p>
-            <a:pPr algn="ctr">
-              <a:spcBef>
-                <a:spcPts val="0"/>
-              </a:spcBef>
-              <a:spcAft>
-                <a:spcPts val="0"/>
-              </a:spcAft>
-              <a:buNone/>
-            </a:pPr>
-            <a:r>
-              <a:rPr lang="en" sz="700">
-                <a:solidFill>
-                  <a:srgbClr val="94A3B8"/>
-                </a:solidFill>
-              </a:rPr>
-              <a:t>60%</a:t>
-            </a:r>
-          </a:p>
-        </p:txBody>
-      </p:sp>
-      <p:sp>
-        <p:nvSpPr>
-          <p:cNvPr id="928" name="Shape 928"/>
-          <p:cNvSpPr/>
-          <p:nvPr/>
-        </p:nvSpPr>
-        <p:spPr>
-          <a:xfrm>
-            <a:off x="3241548" y="1161288"/>
-            <a:ext cx="2697480" cy="3154680"/>
-          </a:xfrm>
-          <a:prstGeom prst="roundRect">
-            <a:avLst>
-              <a:gd name="adj" fmla="val 6000"/>
-            </a:avLst>
-          </a:prstGeom>
-          <a:solidFill>
-            <a:srgbClr val="E6E9EF"/>
-          </a:solidFill>
-          <a:ln>
-            <a:noFill/>
-          </a:ln>
-        </p:spPr>
-        <p:txBody>
-          <a:bodyPr/>
-          <a:lstStyle/>
-          <a:p>
-            <a:endParaRPr sz="800"/>
-          </a:p>
-        </p:txBody>
-      </p:sp>
-      <p:sp>
-        <p:nvSpPr>
-          <p:cNvPr id="929" name="Shape 929"/>
-          <p:cNvSpPr/>
-          <p:nvPr/>
-        </p:nvSpPr>
-        <p:spPr>
-          <a:xfrm>
-            <a:off x="3223260" y="1143000"/>
-            <a:ext cx="2697480" cy="3154680"/>
-          </a:xfrm>
-          <a:prstGeom prst="roundRect">
-            <a:avLst>
-              <a:gd name="adj" fmla="val 6000"/>
-            </a:avLst>
-          </a:prstGeom>
-          <a:solidFill>
-            <a:srgbClr val="F8FAFB"/>
-          </a:solidFill>
-          <a:ln w="9525">
-            <a:solidFill>
-              <a:srgbClr val="CBD5E1"/>
-            </a:solidFill>
-          </a:ln>
-        </p:spPr>
-        <p:txBody>
-          <a:bodyPr/>
-          <a:lstStyle/>
-          <a:p>
-            <a:endParaRPr sz="800"/>
-          </a:p>
-        </p:txBody>
-      </p:sp>
-      <p:sp>
-        <p:nvSpPr>
-          <p:cNvPr id="930" name="Shape 930"/>
-          <p:cNvSpPr/>
-          <p:nvPr/>
-        </p:nvSpPr>
-        <p:spPr>
-          <a:xfrm>
-            <a:off x="5628132" y="1252728"/>
-            <a:ext cx="256032" cy="256032"/>
-          </a:xfrm>
-          <a:prstGeom prst="ellipse">
-            <a:avLst/>
-          </a:prstGeom>
-          <a:solidFill>
-            <a:srgbClr val="214F93"/>
-          </a:solidFill>
-          <a:ln>
-            <a:noFill/>
-          </a:ln>
-        </p:spPr>
-        <p:txBody>
-          <a:bodyPr/>
-          <a:lstStyle/>
-          <a:p>
-            <a:endParaRPr sz="800"/>
-          </a:p>
-        </p:txBody>
-      </p:sp>
-      <p:sp>
-        <p:nvSpPr>
-          <p:cNvPr id="931" name="Text 931"/>
-          <p:cNvSpPr txBox="1"/>
-          <p:nvPr/>
-        </p:nvSpPr>
-        <p:spPr>
-          <a:xfrm>
-            <a:off x="5628132" y="1252728"/>
-            <a:ext cx="256032" cy="256032"/>
-          </a:xfrm>
-          <a:prstGeom prst="rect">
-            <a:avLst/>
-          </a:prstGeom>
-          <a:noFill/>
-        </p:spPr>
-        <p:txBody>
-          <a:bodyPr wrap="square" lIns="0" tIns="0" rIns="0" bIns="0" anchor="ctr">
-            <a:noAutofit/>
-          </a:bodyPr>
-          <a:lstStyle/>
-          <a:p>
-            <a:pPr algn="ctr">
-              <a:spcBef>
-                <a:spcPts val="0"/>
-              </a:spcBef>
-              <a:spcAft>
-                <a:spcPts val="0"/>
-              </a:spcAft>
-              <a:buNone/>
-            </a:pPr>
-            <a:r>
-              <a:rPr lang="en" sz="900" b="1">
-                <a:solidFill>
-                  <a:srgbClr val="FFFFFF"/>
-                </a:solidFill>
-              </a:rPr>
-              <a:t>2</a:t>
-            </a:r>
-          </a:p>
-        </p:txBody>
-      </p:sp>
-      <p:sp>
-        <p:nvSpPr>
-          <p:cNvPr id="932" name="Text 932"/>
-          <p:cNvSpPr txBox="1"/>
-          <p:nvPr/>
-        </p:nvSpPr>
-        <p:spPr>
-          <a:xfrm>
-            <a:off x="3369564" y="1289304"/>
-            <a:ext cx="2084832" cy="411480"/>
-          </a:xfrm>
-          <a:prstGeom prst="rect">
-            <a:avLst/>
-          </a:prstGeom>
-          <a:noFill/>
-        </p:spPr>
-        <p:txBody>
-          <a:bodyPr wrap="square" lIns="0" tIns="0" rIns="0" bIns="0" anchor="t">
-            <a:noAutofit/>
-          </a:bodyPr>
-          <a:lstStyle/>
-          <a:p>
-            <a:pPr algn="l">
-              <a:spcBef>
-                <a:spcPts val="0"/>
-              </a:spcBef>
-              <a:spcAft>
-                <a:spcPts val="0"/>
-              </a:spcAft>
-              <a:buNone/>
-            </a:pPr>
-            <a:r>
-              <a:rPr lang="en" sz="1100" b="1">
-                <a:solidFill>
-                  <a:srgbClr val="214F93"/>
-                </a:solidFill>
-              </a:rPr>
-              <a:t>Analyze how characters are revealed through particular lines of dialogue or events</a:t>
-            </a:r>
-          </a:p>
-        </p:txBody>
-      </p:sp>
-      <p:sp>
-        <p:nvSpPr>
-          <p:cNvPr id="933" name="Text 933"/>
-          <p:cNvSpPr txBox="1"/>
-          <p:nvPr/>
-        </p:nvSpPr>
-        <p:spPr>
-          <a:xfrm>
-            <a:off x="3369564" y="1709928"/>
-            <a:ext cx="2404872" cy="164592"/>
-          </a:xfrm>
-          <a:prstGeom prst="rect">
-            <a:avLst/>
-          </a:prstGeom>
-          <a:noFill/>
-        </p:spPr>
-        <p:txBody>
-          <a:bodyPr wrap="square" lIns="0" tIns="0" rIns="0" bIns="0" anchor="t">
-            <a:noAutofit/>
-          </a:bodyPr>
-          <a:lstStyle/>
-          <a:p>
-            <a:pPr algn="l">
-              <a:spcBef>
-                <a:spcPts val="0"/>
-              </a:spcBef>
-              <a:spcAft>
-                <a:spcPts val="0"/>
-              </a:spcAft>
-              <a:buNone/>
-            </a:pPr>
-            <a:r>
-              <a:rPr lang="en" sz="800">
-                <a:solidFill>
-                  <a:srgbClr val="7A8398"/>
-                </a:solidFill>
-              </a:rPr>
-              <a:t>Standard 11.RL.1.C</a:t>
-            </a:r>
-          </a:p>
-        </p:txBody>
-      </p:sp>
-      <p:sp>
-        <p:nvSpPr>
-          <p:cNvPr id="934" name="Text 934"/>
-          <p:cNvSpPr txBox="1"/>
-          <p:nvPr/>
-        </p:nvSpPr>
-        <p:spPr>
-          <a:xfrm>
-            <a:off x="3369564" y="2057400"/>
-            <a:ext cx="1322680" cy="182880"/>
-          </a:xfrm>
-          <a:prstGeom prst="rect">
-            <a:avLst/>
-          </a:prstGeom>
-          <a:noFill/>
-        </p:spPr>
-        <p:txBody>
-          <a:bodyPr wrap="square" lIns="0" tIns="0" rIns="0" bIns="0" anchor="t">
-            <a:noAutofit/>
-          </a:bodyPr>
-          <a:lstStyle/>
-          <a:p>
-            <a:pPr algn="l">
-              <a:spcBef>
-                <a:spcPts val="0"/>
-              </a:spcBef>
-              <a:spcAft>
-                <a:spcPts val="0"/>
-              </a:spcAft>
-              <a:buNone/>
-            </a:pPr>
-            <a:r>
-              <a:rPr lang="en" sz="920" b="1">
-                <a:solidFill>
-                  <a:srgbClr val="1F2A44"/>
-                </a:solidFill>
-              </a:rPr>
-              <a:t>All students</a:t>
-            </a:r>
-          </a:p>
-        </p:txBody>
-      </p:sp>
-      <p:sp>
-        <p:nvSpPr>
-          <p:cNvPr id="935" name="Text 935"/>
-          <p:cNvSpPr txBox="1"/>
-          <p:nvPr/>
-        </p:nvSpPr>
-        <p:spPr>
-          <a:xfrm>
-            <a:off x="4692244" y="2057400"/>
-            <a:ext cx="721462" cy="182880"/>
-          </a:xfrm>
-          <a:prstGeom prst="rect">
-            <a:avLst/>
-          </a:prstGeom>
-          <a:noFill/>
-        </p:spPr>
-        <p:txBody>
-          <a:bodyPr wrap="square" lIns="0" tIns="0" rIns="0" bIns="0" anchor="t">
-            <a:noAutofit/>
-          </a:bodyPr>
-          <a:lstStyle/>
-          <a:p>
-            <a:pPr algn="r">
-              <a:spcBef>
-                <a:spcPts val="0"/>
-              </a:spcBef>
-              <a:spcAft>
-                <a:spcPts val="0"/>
-              </a:spcAft>
-              <a:buNone/>
-            </a:pPr>
-            <a:r>
-              <a:rPr lang="en" sz="700">
-                <a:solidFill>
-                  <a:srgbClr val="7A8398"/>
-                </a:solidFill>
-              </a:rPr>
-              <a:t>1,338 responses</a:t>
-            </a:r>
-          </a:p>
-        </p:txBody>
-      </p:sp>
-      <p:sp>
-        <p:nvSpPr>
-          <p:cNvPr id="936" name="Shape 936"/>
-          <p:cNvSpPr/>
-          <p:nvPr/>
-        </p:nvSpPr>
-        <p:spPr>
-          <a:xfrm>
-            <a:off x="3369564" y="2286000"/>
-            <a:ext cx="1947672" cy="137160"/>
-          </a:xfrm>
-          <a:prstGeom prst="roundRect">
-            <a:avLst>
-              <a:gd name="adj" fmla="val 50000"/>
-            </a:avLst>
-          </a:prstGeom>
-          <a:solidFill>
-            <a:srgbClr val="E6E9EF"/>
-          </a:solidFill>
-          <a:ln>
-            <a:noFill/>
-          </a:ln>
-        </p:spPr>
-        <p:txBody>
-          <a:bodyPr/>
-          <a:lstStyle/>
-          <a:p>
-            <a:endParaRPr sz="800"/>
-          </a:p>
-        </p:txBody>
-      </p:sp>
-      <p:sp>
-        <p:nvSpPr>
-          <p:cNvPr id="937" name="Shape 937"/>
-          <p:cNvSpPr/>
-          <p:nvPr/>
-        </p:nvSpPr>
-        <p:spPr>
-          <a:xfrm>
-            <a:off x="3369564" y="2286000"/>
-            <a:ext cx="1188080" cy="137160"/>
-          </a:xfrm>
-          <a:prstGeom prst="roundRect">
-            <a:avLst>
-              <a:gd name="adj" fmla="val 50000"/>
-            </a:avLst>
-          </a:prstGeom>
-          <a:solidFill>
-            <a:srgbClr val="214F93"/>
-          </a:solidFill>
-          <a:ln>
-            <a:noFill/>
-          </a:ln>
-        </p:spPr>
-        <p:txBody>
-          <a:bodyPr/>
-          <a:lstStyle/>
-          <a:p>
-            <a:endParaRPr sz="800"/>
-          </a:p>
-        </p:txBody>
-      </p:sp>
-      <p:sp>
-        <p:nvSpPr>
-          <p:cNvPr id="938" name="Shape 938"/>
-          <p:cNvSpPr/>
-          <p:nvPr/>
-        </p:nvSpPr>
-        <p:spPr>
-          <a:xfrm>
-            <a:off x="4538167" y="2258568"/>
-            <a:ext cx="12802" cy="210312"/>
-          </a:xfrm>
-          <a:prstGeom prst="rect">
-            <a:avLst/>
-          </a:prstGeom>
-          <a:solidFill>
-            <a:srgbClr val="94A3B8"/>
-          </a:solidFill>
-          <a:ln>
-            <a:noFill/>
-          </a:ln>
-        </p:spPr>
-        <p:txBody>
-          <a:bodyPr/>
-          <a:lstStyle/>
-          <a:p>
-            <a:endParaRPr sz="800"/>
-          </a:p>
-        </p:txBody>
-      </p:sp>
-      <p:sp>
-        <p:nvSpPr>
-          <p:cNvPr id="939" name="Text 939"/>
-          <p:cNvSpPr txBox="1"/>
-          <p:nvPr/>
-        </p:nvSpPr>
-        <p:spPr>
-          <a:xfrm>
-            <a:off x="5390388" y="2258568"/>
-            <a:ext cx="365760" cy="182880"/>
-          </a:xfrm>
-          <a:prstGeom prst="rect">
-            <a:avLst/>
-          </a:prstGeom>
-          <a:noFill/>
-        </p:spPr>
-        <p:txBody>
-          <a:bodyPr wrap="square" lIns="0" tIns="0" rIns="0" bIns="0" anchor="ctr">
-            <a:noAutofit/>
-          </a:bodyPr>
-          <a:lstStyle/>
-          <a:p>
-            <a:pPr algn="l">
-              <a:spcBef>
-                <a:spcPts val="0"/>
-              </a:spcBef>
-              <a:spcAft>
-                <a:spcPts val="0"/>
-              </a:spcAft>
-              <a:buNone/>
-            </a:pPr>
-            <a:r>
-              <a:rPr lang="en" sz="1050" b="1">
-                <a:solidFill>
-                  <a:srgbClr val="1F2A44"/>
-                </a:solidFill>
-              </a:rPr>
-              <a:t>61%</a:t>
-            </a:r>
-          </a:p>
-        </p:txBody>
-      </p:sp>
-      <p:sp>
-        <p:nvSpPr>
-          <p:cNvPr id="940" name="Text 940"/>
-          <p:cNvSpPr txBox="1"/>
-          <p:nvPr/>
-        </p:nvSpPr>
-        <p:spPr>
-          <a:xfrm>
-            <a:off x="3369564" y="2715768"/>
-            <a:ext cx="1322680" cy="182880"/>
-          </a:xfrm>
-          <a:prstGeom prst="rect">
-            <a:avLst/>
-          </a:prstGeom>
-          <a:noFill/>
-        </p:spPr>
-        <p:txBody>
-          <a:bodyPr wrap="square" lIns="0" tIns="0" rIns="0" bIns="0" anchor="t">
-            <a:noAutofit/>
-          </a:bodyPr>
-          <a:lstStyle/>
-          <a:p>
-            <a:pPr algn="l">
-              <a:spcBef>
-                <a:spcPts val="0"/>
-              </a:spcBef>
-              <a:spcAft>
-                <a:spcPts val="0"/>
-              </a:spcAft>
-              <a:buNone/>
-            </a:pPr>
-            <a:r>
-              <a:rPr lang="en" sz="920" b="1">
-                <a:solidFill>
-                  <a:srgbClr val="1F2A44"/>
-                </a:solidFill>
-              </a:rPr>
-              <a:t>SWD</a:t>
-            </a:r>
-          </a:p>
-        </p:txBody>
-      </p:sp>
-      <p:sp>
-        <p:nvSpPr>
-          <p:cNvPr id="941" name="Text 941"/>
-          <p:cNvSpPr txBox="1"/>
-          <p:nvPr/>
-        </p:nvSpPr>
-        <p:spPr>
-          <a:xfrm>
-            <a:off x="4692244" y="2715768"/>
-            <a:ext cx="721462" cy="182880"/>
-          </a:xfrm>
-          <a:prstGeom prst="rect">
-            <a:avLst/>
-          </a:prstGeom>
-          <a:noFill/>
-        </p:spPr>
-        <p:txBody>
-          <a:bodyPr wrap="square" lIns="0" tIns="0" rIns="0" bIns="0" anchor="t">
-            <a:noAutofit/>
-          </a:bodyPr>
-          <a:lstStyle/>
-          <a:p>
-            <a:pPr algn="r">
-              <a:spcBef>
-                <a:spcPts val="0"/>
-              </a:spcBef>
-              <a:spcAft>
-                <a:spcPts val="0"/>
-              </a:spcAft>
-              <a:buNone/>
-            </a:pPr>
-            <a:r>
-              <a:rPr lang="en" sz="700">
-                <a:solidFill>
-                  <a:srgbClr val="7A8398"/>
-                </a:solidFill>
-              </a:rPr>
-              <a:t>196 responses</a:t>
-            </a:r>
-          </a:p>
-        </p:txBody>
-      </p:sp>
-      <p:sp>
-        <p:nvSpPr>
-          <p:cNvPr id="942" name="Shape 942"/>
-          <p:cNvSpPr/>
-          <p:nvPr/>
-        </p:nvSpPr>
-        <p:spPr>
-          <a:xfrm>
-            <a:off x="3369564" y="2944368"/>
-            <a:ext cx="1947672" cy="137160"/>
-          </a:xfrm>
-          <a:prstGeom prst="roundRect">
-            <a:avLst>
-              <a:gd name="adj" fmla="val 50000"/>
-            </a:avLst>
-          </a:prstGeom>
-          <a:solidFill>
-            <a:srgbClr val="E6E9EF"/>
-          </a:solidFill>
-          <a:ln>
-            <a:noFill/>
-          </a:ln>
-        </p:spPr>
-        <p:txBody>
-          <a:bodyPr/>
-          <a:lstStyle/>
-          <a:p>
-            <a:endParaRPr sz="800"/>
-          </a:p>
-        </p:txBody>
-      </p:sp>
-      <p:sp>
-        <p:nvSpPr>
-          <p:cNvPr id="943" name="Shape 943"/>
-          <p:cNvSpPr/>
-          <p:nvPr/>
-        </p:nvSpPr>
-        <p:spPr>
-          <a:xfrm>
-            <a:off x="3369564" y="2944368"/>
-            <a:ext cx="1032266" cy="137160"/>
-          </a:xfrm>
-          <a:prstGeom prst="roundRect">
-            <a:avLst>
-              <a:gd name="adj" fmla="val 50000"/>
-            </a:avLst>
-          </a:prstGeom>
-          <a:solidFill>
-            <a:srgbClr val="F59E0B"/>
-          </a:solidFill>
-          <a:ln>
-            <a:noFill/>
-          </a:ln>
-        </p:spPr>
-        <p:txBody>
-          <a:bodyPr/>
-          <a:lstStyle/>
-          <a:p>
-            <a:endParaRPr sz="800"/>
-          </a:p>
-        </p:txBody>
-      </p:sp>
-      <p:sp>
-        <p:nvSpPr>
-          <p:cNvPr id="944" name="Shape 944"/>
-          <p:cNvSpPr/>
-          <p:nvPr/>
-        </p:nvSpPr>
-        <p:spPr>
-          <a:xfrm>
-            <a:off x="4538167" y="2916936"/>
-            <a:ext cx="12802" cy="210312"/>
-          </a:xfrm>
-          <a:prstGeom prst="rect">
-            <a:avLst/>
-          </a:prstGeom>
-          <a:solidFill>
-            <a:srgbClr val="94A3B8"/>
-          </a:solidFill>
-          <a:ln>
-            <a:noFill/>
-          </a:ln>
-        </p:spPr>
-        <p:txBody>
-          <a:bodyPr/>
-          <a:lstStyle/>
-          <a:p>
-            <a:endParaRPr sz="800"/>
-          </a:p>
-        </p:txBody>
-      </p:sp>
-      <p:sp>
-        <p:nvSpPr>
-          <p:cNvPr id="945" name="Text 945"/>
-          <p:cNvSpPr txBox="1"/>
-          <p:nvPr/>
-        </p:nvSpPr>
-        <p:spPr>
-          <a:xfrm>
-            <a:off x="5390388" y="2916936"/>
-            <a:ext cx="365760" cy="182880"/>
-          </a:xfrm>
-          <a:prstGeom prst="rect">
-            <a:avLst/>
-          </a:prstGeom>
-          <a:noFill/>
-        </p:spPr>
-        <p:txBody>
-          <a:bodyPr wrap="square" lIns="0" tIns="0" rIns="0" bIns="0" anchor="ctr">
-            <a:noAutofit/>
-          </a:bodyPr>
-          <a:lstStyle/>
-          <a:p>
-            <a:pPr algn="l">
-              <a:spcBef>
-                <a:spcPts val="0"/>
-              </a:spcBef>
-              <a:spcAft>
-                <a:spcPts val="0"/>
-              </a:spcAft>
-              <a:buNone/>
-            </a:pPr>
-            <a:r>
-              <a:rPr lang="en" sz="1050" b="1">
-                <a:solidFill>
-                  <a:srgbClr val="1F2A44"/>
-                </a:solidFill>
-              </a:rPr>
-              <a:t>53%</a:t>
-            </a:r>
-          </a:p>
-        </p:txBody>
-      </p:sp>
-      <p:sp>
-        <p:nvSpPr>
-          <p:cNvPr id="946" name="Text 946"/>
-          <p:cNvSpPr txBox="1"/>
-          <p:nvPr/>
-        </p:nvSpPr>
-        <p:spPr>
-          <a:xfrm>
-            <a:off x="3369564" y="3374136"/>
-            <a:ext cx="1322680" cy="182880"/>
-          </a:xfrm>
-          <a:prstGeom prst="rect">
-            <a:avLst/>
-          </a:prstGeom>
-          <a:noFill/>
-        </p:spPr>
-        <p:txBody>
-          <a:bodyPr wrap="square" lIns="0" tIns="0" rIns="0" bIns="0" anchor="t">
-            <a:noAutofit/>
-          </a:bodyPr>
-          <a:lstStyle/>
-          <a:p>
-            <a:pPr algn="l">
-              <a:spcBef>
-                <a:spcPts val="0"/>
-              </a:spcBef>
-              <a:spcAft>
-                <a:spcPts val="0"/>
-              </a:spcAft>
-              <a:buNone/>
-            </a:pPr>
-            <a:r>
-              <a:rPr lang="en" sz="920" b="1">
-                <a:solidFill>
-                  <a:srgbClr val="1F2A44"/>
-                </a:solidFill>
-              </a:rPr>
-              <a:t>ELL</a:t>
-            </a:r>
-          </a:p>
-        </p:txBody>
-      </p:sp>
-      <p:sp>
-        <p:nvSpPr>
-          <p:cNvPr id="947" name="Text 947"/>
-          <p:cNvSpPr txBox="1"/>
-          <p:nvPr/>
-        </p:nvSpPr>
-        <p:spPr>
-          <a:xfrm>
-            <a:off x="4692244" y="3374136"/>
-            <a:ext cx="721462" cy="182880"/>
-          </a:xfrm>
-          <a:prstGeom prst="rect">
-            <a:avLst/>
-          </a:prstGeom>
-          <a:noFill/>
-        </p:spPr>
-        <p:txBody>
-          <a:bodyPr wrap="square" lIns="0" tIns="0" rIns="0" bIns="0" anchor="t">
-            <a:noAutofit/>
-          </a:bodyPr>
-          <a:lstStyle/>
-          <a:p>
-            <a:pPr algn="r">
-              <a:spcBef>
-                <a:spcPts val="0"/>
-              </a:spcBef>
-              <a:spcAft>
-                <a:spcPts val="0"/>
-              </a:spcAft>
-              <a:buNone/>
-            </a:pPr>
-            <a:r>
-              <a:rPr lang="en" sz="700">
-                <a:solidFill>
-                  <a:srgbClr val="7A8398"/>
-                </a:solidFill>
-              </a:rPr>
-              <a:t>20 responses</a:t>
-            </a:r>
-          </a:p>
-        </p:txBody>
-      </p:sp>
-      <p:sp>
-        <p:nvSpPr>
-          <p:cNvPr id="948" name="Shape 948"/>
-          <p:cNvSpPr/>
-          <p:nvPr/>
-        </p:nvSpPr>
-        <p:spPr>
-          <a:xfrm>
-            <a:off x="3369564" y="3602736"/>
-            <a:ext cx="1947672" cy="137160"/>
-          </a:xfrm>
-          <a:prstGeom prst="roundRect">
-            <a:avLst>
-              <a:gd name="adj" fmla="val 50000"/>
-            </a:avLst>
-          </a:prstGeom>
-          <a:solidFill>
-            <a:srgbClr val="E6E9EF"/>
-          </a:solidFill>
-          <a:ln>
-            <a:noFill/>
-          </a:ln>
-        </p:spPr>
-        <p:txBody>
-          <a:bodyPr/>
-          <a:lstStyle/>
-          <a:p>
-            <a:endParaRPr sz="800"/>
-          </a:p>
-        </p:txBody>
-      </p:sp>
-      <p:sp>
-        <p:nvSpPr>
-          <p:cNvPr id="949" name="Shape 949"/>
-          <p:cNvSpPr/>
-          <p:nvPr/>
-        </p:nvSpPr>
-        <p:spPr>
-          <a:xfrm>
-            <a:off x="3369564" y="3602736"/>
-            <a:ext cx="584302" cy="137160"/>
-          </a:xfrm>
-          <a:prstGeom prst="roundRect">
-            <a:avLst>
-              <a:gd name="adj" fmla="val 50000"/>
-            </a:avLst>
-          </a:prstGeom>
-          <a:solidFill>
-            <a:srgbClr val="EF4444"/>
-          </a:solidFill>
-          <a:ln>
-            <a:noFill/>
-          </a:ln>
-        </p:spPr>
-        <p:txBody>
-          <a:bodyPr/>
-          <a:lstStyle/>
-          <a:p>
-            <a:endParaRPr sz="800"/>
-          </a:p>
-        </p:txBody>
-      </p:sp>
-      <p:sp>
-        <p:nvSpPr>
-          <p:cNvPr id="950" name="Shape 950"/>
-          <p:cNvSpPr/>
-          <p:nvPr/>
-        </p:nvSpPr>
-        <p:spPr>
-          <a:xfrm>
-            <a:off x="4538167" y="3575304"/>
-            <a:ext cx="12802" cy="210312"/>
-          </a:xfrm>
-          <a:prstGeom prst="rect">
-            <a:avLst/>
-          </a:prstGeom>
-          <a:solidFill>
-            <a:srgbClr val="94A3B8"/>
-          </a:solidFill>
-          <a:ln>
-            <a:noFill/>
-          </a:ln>
-        </p:spPr>
-        <p:txBody>
-          <a:bodyPr/>
-          <a:lstStyle/>
-          <a:p>
-            <a:endParaRPr sz="800"/>
-          </a:p>
-        </p:txBody>
-      </p:sp>
-      <p:sp>
-        <p:nvSpPr>
-          <p:cNvPr id="951" name="Text 951"/>
-          <p:cNvSpPr txBox="1"/>
-          <p:nvPr/>
-        </p:nvSpPr>
-        <p:spPr>
-          <a:xfrm>
-            <a:off x="5390388" y="3575304"/>
-            <a:ext cx="365760" cy="182880"/>
-          </a:xfrm>
-          <a:prstGeom prst="rect">
-            <a:avLst/>
-          </a:prstGeom>
-          <a:noFill/>
-        </p:spPr>
-        <p:txBody>
-          <a:bodyPr wrap="square" lIns="0" tIns="0" rIns="0" bIns="0" anchor="ctr">
-            <a:noAutofit/>
-          </a:bodyPr>
-          <a:lstStyle/>
-          <a:p>
-            <a:pPr algn="l">
-              <a:spcBef>
-                <a:spcPts val="0"/>
-              </a:spcBef>
-              <a:spcAft>
-                <a:spcPts val="0"/>
-              </a:spcAft>
-              <a:buNone/>
-            </a:pPr>
-            <a:r>
-              <a:rPr lang="en" sz="1050" b="1">
-                <a:solidFill>
-                  <a:srgbClr val="1F2A44"/>
-                </a:solidFill>
-              </a:rPr>
-              <a:t>30%</a:t>
-            </a:r>
-          </a:p>
-        </p:txBody>
-      </p:sp>
-      <p:sp>
-        <p:nvSpPr>
-          <p:cNvPr id="952" name="Text 952"/>
-          <p:cNvSpPr txBox="1"/>
-          <p:nvPr/>
-        </p:nvSpPr>
-        <p:spPr>
-          <a:xfrm>
-            <a:off x="4309567" y="3922776"/>
-            <a:ext cx="457200" cy="128016"/>
-          </a:xfrm>
-          <a:prstGeom prst="rect">
-            <a:avLst/>
-          </a:prstGeom>
-          <a:noFill/>
-        </p:spPr>
-        <p:txBody>
-          <a:bodyPr wrap="square" lIns="0" tIns="0" rIns="0" bIns="0" anchor="t">
-            <a:noAutofit/>
-          </a:bodyPr>
-          <a:lstStyle/>
-          <a:p>
-            <a:pPr algn="ctr">
-              <a:spcBef>
-                <a:spcPts val="0"/>
-              </a:spcBef>
-              <a:spcAft>
-                <a:spcPts val="0"/>
-              </a:spcAft>
-              <a:buNone/>
-            </a:pPr>
-            <a:r>
-              <a:rPr lang="en" sz="700">
-                <a:solidFill>
-                  <a:srgbClr val="94A3B8"/>
-                </a:solidFill>
-              </a:rPr>
-              <a:t>60%</a:t>
-            </a:r>
-          </a:p>
-        </p:txBody>
-      </p:sp>
-      <p:sp>
-        <p:nvSpPr>
-          <p:cNvPr id="953" name="Shape 953"/>
-          <p:cNvSpPr/>
-          <p:nvPr/>
-        </p:nvSpPr>
-        <p:spPr>
-          <a:xfrm>
-            <a:off x="6144768" y="1161288"/>
-            <a:ext cx="2697480" cy="3154680"/>
-          </a:xfrm>
-          <a:prstGeom prst="roundRect">
-            <a:avLst>
-              <a:gd name="adj" fmla="val 6000"/>
-            </a:avLst>
-          </a:prstGeom>
-          <a:solidFill>
-            <a:srgbClr val="E6E9EF"/>
-          </a:solidFill>
-          <a:ln>
-            <a:noFill/>
-          </a:ln>
-        </p:spPr>
-        <p:txBody>
-          <a:bodyPr/>
-          <a:lstStyle/>
-          <a:p>
-            <a:endParaRPr sz="800"/>
-          </a:p>
-        </p:txBody>
-      </p:sp>
-      <p:sp>
-        <p:nvSpPr>
-          <p:cNvPr id="954" name="Shape 954"/>
-          <p:cNvSpPr/>
-          <p:nvPr/>
-        </p:nvSpPr>
-        <p:spPr>
-          <a:xfrm>
-            <a:off x="6126480" y="1143000"/>
-            <a:ext cx="2697480" cy="3154680"/>
-          </a:xfrm>
-          <a:prstGeom prst="roundRect">
-            <a:avLst>
-              <a:gd name="adj" fmla="val 6000"/>
-            </a:avLst>
-          </a:prstGeom>
-          <a:solidFill>
-            <a:srgbClr val="F8FAFB"/>
-          </a:solidFill>
-          <a:ln w="9525">
-            <a:solidFill>
-              <a:srgbClr val="CBD5E1"/>
-            </a:solidFill>
-          </a:ln>
-        </p:spPr>
-        <p:txBody>
-          <a:bodyPr/>
-          <a:lstStyle/>
-          <a:p>
-            <a:endParaRPr sz="800"/>
-          </a:p>
-        </p:txBody>
-      </p:sp>
-      <p:sp>
-        <p:nvSpPr>
-          <p:cNvPr id="955" name="Shape 955"/>
-          <p:cNvSpPr/>
-          <p:nvPr/>
-        </p:nvSpPr>
-        <p:spPr>
-          <a:xfrm>
-            <a:off x="8531352" y="1252728"/>
-            <a:ext cx="256032" cy="256032"/>
-          </a:xfrm>
-          <a:prstGeom prst="ellipse">
-            <a:avLst/>
-          </a:prstGeom>
-          <a:solidFill>
-            <a:srgbClr val="214F93"/>
-          </a:solidFill>
-          <a:ln>
-            <a:noFill/>
-          </a:ln>
-        </p:spPr>
-        <p:txBody>
-          <a:bodyPr/>
-          <a:lstStyle/>
-          <a:p>
-            <a:endParaRPr sz="800"/>
-          </a:p>
-        </p:txBody>
-      </p:sp>
-      <p:sp>
-        <p:nvSpPr>
-          <p:cNvPr id="956" name="Text 956"/>
-          <p:cNvSpPr txBox="1"/>
-          <p:nvPr/>
-        </p:nvSpPr>
-        <p:spPr>
-          <a:xfrm>
-            <a:off x="8531352" y="1252728"/>
-            <a:ext cx="256032" cy="256032"/>
-          </a:xfrm>
-          <a:prstGeom prst="rect">
-            <a:avLst/>
-          </a:prstGeom>
-          <a:noFill/>
-        </p:spPr>
-        <p:txBody>
-          <a:bodyPr wrap="square" lIns="0" tIns="0" rIns="0" bIns="0" anchor="ctr">
-            <a:noAutofit/>
-          </a:bodyPr>
-          <a:lstStyle/>
-          <a:p>
-            <a:pPr algn="ctr">
-              <a:spcBef>
-                <a:spcPts val="0"/>
-              </a:spcBef>
-              <a:spcAft>
-                <a:spcPts val="0"/>
-              </a:spcAft>
-              <a:buNone/>
-            </a:pPr>
-            <a:r>
-              <a:rPr lang="en" sz="900" b="1">
-                <a:solidFill>
-                  <a:srgbClr val="FFFFFF"/>
-                </a:solidFill>
-              </a:rPr>
-              <a:t>3</a:t>
-            </a:r>
-          </a:p>
-        </p:txBody>
-      </p:sp>
-      <p:sp>
-        <p:nvSpPr>
-          <p:cNvPr id="957" name="Text 957"/>
-          <p:cNvSpPr txBox="1"/>
-          <p:nvPr/>
-        </p:nvSpPr>
-        <p:spPr>
-          <a:xfrm>
-            <a:off x="6272784" y="1289304"/>
-            <a:ext cx="2084832" cy="411480"/>
-          </a:xfrm>
-          <a:prstGeom prst="rect">
-            <a:avLst/>
-          </a:prstGeom>
-          <a:noFill/>
-        </p:spPr>
-        <p:txBody>
-          <a:bodyPr wrap="square" lIns="0" tIns="0" rIns="0" bIns="0" anchor="t">
-            <a:noAutofit/>
-          </a:bodyPr>
-          <a:lstStyle/>
-          <a:p>
-            <a:pPr algn="l">
-              <a:spcBef>
-                <a:spcPts val="0"/>
-              </a:spcBef>
-              <a:spcAft>
-                <a:spcPts val="0"/>
-              </a:spcAft>
-              <a:buNone/>
-            </a:pPr>
-            <a:r>
-              <a:rPr lang="en" sz="1100" b="1">
-                <a:solidFill>
-                  <a:srgbClr val="214F93"/>
-                </a:solidFill>
-              </a:rPr>
-              <a:t>Use context and sentence structure clues to clarify the meaning of words</a:t>
-            </a:r>
-          </a:p>
-        </p:txBody>
-      </p:sp>
-      <p:sp>
-        <p:nvSpPr>
-          <p:cNvPr id="958" name="Text 958"/>
-          <p:cNvSpPr txBox="1"/>
-          <p:nvPr/>
-        </p:nvSpPr>
-        <p:spPr>
-          <a:xfrm>
-            <a:off x="6272784" y="1709928"/>
-            <a:ext cx="2404872" cy="164592"/>
-          </a:xfrm>
-          <a:prstGeom prst="rect">
-            <a:avLst/>
-          </a:prstGeom>
-          <a:noFill/>
-        </p:spPr>
-        <p:txBody>
-          <a:bodyPr wrap="square" lIns="0" tIns="0" rIns="0" bIns="0" anchor="t">
-            <a:noAutofit/>
-          </a:bodyPr>
-          <a:lstStyle/>
-          <a:p>
-            <a:pPr algn="l">
-              <a:spcBef>
-                <a:spcPts val="0"/>
-              </a:spcBef>
-              <a:spcAft>
-                <a:spcPts val="0"/>
-              </a:spcAft>
-              <a:buNone/>
-            </a:pPr>
-            <a:r>
-              <a:rPr lang="en" sz="800">
-                <a:solidFill>
-                  <a:srgbClr val="7A8398"/>
-                </a:solidFill>
-              </a:rPr>
-              <a:t>Standard 11.RVN.1.B</a:t>
-            </a:r>
-          </a:p>
-        </p:txBody>
-      </p:sp>
-      <p:sp>
-        <p:nvSpPr>
-          <p:cNvPr id="959" name="Text 959"/>
-          <p:cNvSpPr txBox="1"/>
-          <p:nvPr/>
-        </p:nvSpPr>
-        <p:spPr>
-          <a:xfrm>
-            <a:off x="6272784" y="2057400"/>
-            <a:ext cx="1322680" cy="182880"/>
-          </a:xfrm>
-          <a:prstGeom prst="rect">
-            <a:avLst/>
-          </a:prstGeom>
-          <a:noFill/>
-        </p:spPr>
-        <p:txBody>
-          <a:bodyPr wrap="square" lIns="0" tIns="0" rIns="0" bIns="0" anchor="t">
-            <a:noAutofit/>
-          </a:bodyPr>
-          <a:lstStyle/>
-          <a:p>
-            <a:pPr algn="l">
-              <a:spcBef>
-                <a:spcPts val="0"/>
-              </a:spcBef>
-              <a:spcAft>
-                <a:spcPts val="0"/>
-              </a:spcAft>
-              <a:buNone/>
-            </a:pPr>
-            <a:r>
-              <a:rPr lang="en" sz="920" b="1">
-                <a:solidFill>
-                  <a:srgbClr val="1F2A44"/>
-                </a:solidFill>
-              </a:rPr>
-              <a:t>All students</a:t>
-            </a:r>
-          </a:p>
-        </p:txBody>
-      </p:sp>
-      <p:sp>
-        <p:nvSpPr>
-          <p:cNvPr id="960" name="Text 960"/>
-          <p:cNvSpPr txBox="1"/>
-          <p:nvPr/>
-        </p:nvSpPr>
-        <p:spPr>
-          <a:xfrm>
-            <a:off x="7595464" y="2057400"/>
-            <a:ext cx="721462" cy="182880"/>
-          </a:xfrm>
-          <a:prstGeom prst="rect">
-            <a:avLst/>
-          </a:prstGeom>
-          <a:noFill/>
-        </p:spPr>
-        <p:txBody>
-          <a:bodyPr wrap="square" lIns="0" tIns="0" rIns="0" bIns="0" anchor="t">
-            <a:noAutofit/>
-          </a:bodyPr>
-          <a:lstStyle/>
-          <a:p>
-            <a:pPr algn="r">
-              <a:spcBef>
-                <a:spcPts val="0"/>
-              </a:spcBef>
-              <a:spcAft>
-                <a:spcPts val="0"/>
-              </a:spcAft>
-              <a:buNone/>
-            </a:pPr>
-            <a:r>
-              <a:rPr lang="en" sz="700">
-                <a:solidFill>
-                  <a:srgbClr val="7A8398"/>
-                </a:solidFill>
-              </a:rPr>
-              <a:t>402 responses</a:t>
-            </a:r>
-          </a:p>
-        </p:txBody>
-      </p:sp>
-      <p:sp>
-        <p:nvSpPr>
-          <p:cNvPr id="961" name="Shape 961"/>
-          <p:cNvSpPr/>
-          <p:nvPr/>
-        </p:nvSpPr>
-        <p:spPr>
-          <a:xfrm>
-            <a:off x="6272784" y="2286000"/>
-            <a:ext cx="1947672" cy="137160"/>
-          </a:xfrm>
-          <a:prstGeom prst="roundRect">
-            <a:avLst>
-              <a:gd name="adj" fmla="val 50000"/>
-            </a:avLst>
-          </a:prstGeom>
-          <a:solidFill>
-            <a:srgbClr val="E6E9EF"/>
-          </a:solidFill>
-          <a:ln>
-            <a:noFill/>
-          </a:ln>
-        </p:spPr>
-        <p:txBody>
-          <a:bodyPr/>
-          <a:lstStyle/>
-          <a:p>
-            <a:endParaRPr sz="800"/>
-          </a:p>
-        </p:txBody>
-      </p:sp>
-      <p:sp>
-        <p:nvSpPr>
-          <p:cNvPr id="962" name="Shape 962"/>
-          <p:cNvSpPr/>
-          <p:nvPr/>
-        </p:nvSpPr>
-        <p:spPr>
-          <a:xfrm>
-            <a:off x="6272784" y="2286000"/>
-            <a:ext cx="1012789" cy="137160"/>
-          </a:xfrm>
-          <a:prstGeom prst="roundRect">
-            <a:avLst>
-              <a:gd name="adj" fmla="val 50000"/>
-            </a:avLst>
-          </a:prstGeom>
-          <a:solidFill>
-            <a:srgbClr val="F59E0B"/>
-          </a:solidFill>
-          <a:ln>
-            <a:noFill/>
-          </a:ln>
-        </p:spPr>
-        <p:txBody>
-          <a:bodyPr/>
-          <a:lstStyle/>
-          <a:p>
-            <a:endParaRPr sz="800"/>
-          </a:p>
-        </p:txBody>
-      </p:sp>
-      <p:sp>
-        <p:nvSpPr>
-          <p:cNvPr id="963" name="Shape 963"/>
-          <p:cNvSpPr/>
-          <p:nvPr/>
-        </p:nvSpPr>
-        <p:spPr>
-          <a:xfrm>
-            <a:off x="7441387" y="2258568"/>
-            <a:ext cx="12802" cy="210312"/>
-          </a:xfrm>
-          <a:prstGeom prst="rect">
-            <a:avLst/>
-          </a:prstGeom>
-          <a:solidFill>
-            <a:srgbClr val="94A3B8"/>
-          </a:solidFill>
-          <a:ln>
-            <a:noFill/>
-          </a:ln>
-        </p:spPr>
-        <p:txBody>
-          <a:bodyPr/>
-          <a:lstStyle/>
-          <a:p>
-            <a:endParaRPr sz="800"/>
-          </a:p>
-        </p:txBody>
-      </p:sp>
-      <p:sp>
-        <p:nvSpPr>
-          <p:cNvPr id="964" name="Text 964"/>
-          <p:cNvSpPr txBox="1"/>
-          <p:nvPr/>
-        </p:nvSpPr>
-        <p:spPr>
-          <a:xfrm>
-            <a:off x="8293608" y="2258568"/>
-            <a:ext cx="365760" cy="182880"/>
-          </a:xfrm>
-          <a:prstGeom prst="rect">
-            <a:avLst/>
-          </a:prstGeom>
-          <a:noFill/>
-        </p:spPr>
-        <p:txBody>
-          <a:bodyPr wrap="square" lIns="0" tIns="0" rIns="0" bIns="0" anchor="ctr">
-            <a:noAutofit/>
-          </a:bodyPr>
-          <a:lstStyle/>
-          <a:p>
-            <a:pPr algn="l">
-              <a:spcBef>
-                <a:spcPts val="0"/>
-              </a:spcBef>
-              <a:spcAft>
-                <a:spcPts val="0"/>
-              </a:spcAft>
-              <a:buNone/>
-            </a:pPr>
-            <a:r>
-              <a:rPr lang="en" sz="1050" b="1">
-                <a:solidFill>
-                  <a:srgbClr val="1F2A44"/>
-                </a:solidFill>
-              </a:rPr>
-              <a:t>52%</a:t>
-            </a:r>
-          </a:p>
-        </p:txBody>
-      </p:sp>
-      <p:sp>
-        <p:nvSpPr>
-          <p:cNvPr id="965" name="Text 965"/>
-          <p:cNvSpPr txBox="1"/>
-          <p:nvPr/>
-        </p:nvSpPr>
-        <p:spPr>
-          <a:xfrm>
-            <a:off x="6272784" y="2715768"/>
-            <a:ext cx="1322680" cy="182880"/>
-          </a:xfrm>
-          <a:prstGeom prst="rect">
-            <a:avLst/>
-          </a:prstGeom>
-          <a:noFill/>
-        </p:spPr>
-        <p:txBody>
-          <a:bodyPr wrap="square" lIns="0" tIns="0" rIns="0" bIns="0" anchor="t">
-            <a:noAutofit/>
-          </a:bodyPr>
-          <a:lstStyle/>
-          <a:p>
-            <a:pPr algn="l">
-              <a:spcBef>
-                <a:spcPts val="0"/>
-              </a:spcBef>
-              <a:spcAft>
-                <a:spcPts val="0"/>
-              </a:spcAft>
-              <a:buNone/>
-            </a:pPr>
-            <a:r>
-              <a:rPr lang="en" sz="920" b="1">
-                <a:solidFill>
-                  <a:srgbClr val="1F2A44"/>
-                </a:solidFill>
-              </a:rPr>
-              <a:t>SWD</a:t>
-            </a:r>
-          </a:p>
-        </p:txBody>
-      </p:sp>
-      <p:sp>
-        <p:nvSpPr>
-          <p:cNvPr id="966" name="Text 966"/>
-          <p:cNvSpPr txBox="1"/>
-          <p:nvPr/>
-        </p:nvSpPr>
-        <p:spPr>
-          <a:xfrm>
-            <a:off x="7595464" y="2715768"/>
-            <a:ext cx="721462" cy="182880"/>
-          </a:xfrm>
-          <a:prstGeom prst="rect">
-            <a:avLst/>
-          </a:prstGeom>
-          <a:noFill/>
-        </p:spPr>
-        <p:txBody>
-          <a:bodyPr wrap="square" lIns="0" tIns="0" rIns="0" bIns="0" anchor="t">
-            <a:noAutofit/>
-          </a:bodyPr>
-          <a:lstStyle/>
-          <a:p>
-            <a:pPr algn="r">
-              <a:spcBef>
-                <a:spcPts val="0"/>
-              </a:spcBef>
-              <a:spcAft>
-                <a:spcPts val="0"/>
-              </a:spcAft>
-              <a:buNone/>
-            </a:pPr>
-            <a:r>
-              <a:rPr lang="en" sz="700">
-                <a:solidFill>
-                  <a:srgbClr val="7A8398"/>
-                </a:solidFill>
-              </a:rPr>
-              <a:t>63 responses</a:t>
-            </a:r>
-          </a:p>
-        </p:txBody>
-      </p:sp>
-      <p:sp>
-        <p:nvSpPr>
-          <p:cNvPr id="967" name="Shape 967"/>
-          <p:cNvSpPr/>
-          <p:nvPr/>
-        </p:nvSpPr>
-        <p:spPr>
-          <a:xfrm>
-            <a:off x="6272784" y="2944368"/>
-            <a:ext cx="1947672" cy="137160"/>
-          </a:xfrm>
-          <a:prstGeom prst="roundRect">
-            <a:avLst>
-              <a:gd name="adj" fmla="val 50000"/>
-            </a:avLst>
-          </a:prstGeom>
-          <a:solidFill>
-            <a:srgbClr val="E6E9EF"/>
-          </a:solidFill>
-          <a:ln>
-            <a:noFill/>
-          </a:ln>
-        </p:spPr>
-        <p:txBody>
-          <a:bodyPr/>
-          <a:lstStyle/>
-          <a:p>
-            <a:endParaRPr sz="800"/>
-          </a:p>
-        </p:txBody>
-      </p:sp>
-      <p:sp>
-        <p:nvSpPr>
-          <p:cNvPr id="968" name="Shape 968"/>
-          <p:cNvSpPr/>
-          <p:nvPr/>
-        </p:nvSpPr>
-        <p:spPr>
-          <a:xfrm>
-            <a:off x="6272784" y="2944368"/>
-            <a:ext cx="993313" cy="137160"/>
-          </a:xfrm>
-          <a:prstGeom prst="roundRect">
-            <a:avLst>
-              <a:gd name="adj" fmla="val 50000"/>
-            </a:avLst>
-          </a:prstGeom>
-          <a:solidFill>
-            <a:srgbClr val="F59E0B"/>
-          </a:solidFill>
-          <a:ln>
-            <a:noFill/>
-          </a:ln>
-        </p:spPr>
-        <p:txBody>
-          <a:bodyPr/>
-          <a:lstStyle/>
-          <a:p>
-            <a:endParaRPr sz="800"/>
-          </a:p>
-        </p:txBody>
-      </p:sp>
-      <p:sp>
-        <p:nvSpPr>
-          <p:cNvPr id="969" name="Shape 969"/>
-          <p:cNvSpPr/>
-          <p:nvPr/>
-        </p:nvSpPr>
-        <p:spPr>
-          <a:xfrm>
-            <a:off x="7441387" y="2916936"/>
-            <a:ext cx="12802" cy="210312"/>
-          </a:xfrm>
-          <a:prstGeom prst="rect">
-            <a:avLst/>
-          </a:prstGeom>
-          <a:solidFill>
-            <a:srgbClr val="94A3B8"/>
-          </a:solidFill>
-          <a:ln>
-            <a:noFill/>
-          </a:ln>
-        </p:spPr>
-        <p:txBody>
-          <a:bodyPr/>
-          <a:lstStyle/>
-          <a:p>
-            <a:endParaRPr sz="800"/>
-          </a:p>
-        </p:txBody>
-      </p:sp>
-      <p:sp>
-        <p:nvSpPr>
-          <p:cNvPr id="970" name="Text 970"/>
-          <p:cNvSpPr txBox="1"/>
-          <p:nvPr/>
-        </p:nvSpPr>
-        <p:spPr>
-          <a:xfrm>
-            <a:off x="8293608" y="2916936"/>
-            <a:ext cx="365760" cy="182880"/>
-          </a:xfrm>
-          <a:prstGeom prst="rect">
-            <a:avLst/>
-          </a:prstGeom>
-          <a:noFill/>
-        </p:spPr>
-        <p:txBody>
-          <a:bodyPr wrap="square" lIns="0" tIns="0" rIns="0" bIns="0" anchor="ctr">
-            <a:noAutofit/>
-          </a:bodyPr>
-          <a:lstStyle/>
-          <a:p>
-            <a:pPr algn="l">
-              <a:spcBef>
-                <a:spcPts val="0"/>
-              </a:spcBef>
-              <a:spcAft>
-                <a:spcPts val="0"/>
-              </a:spcAft>
-              <a:buNone/>
-            </a:pPr>
-            <a:r>
-              <a:rPr lang="en" sz="1050" b="1">
-                <a:solidFill>
-                  <a:srgbClr val="1F2A44"/>
-                </a:solidFill>
-              </a:rPr>
-              <a:t>51%</a:t>
-            </a:r>
-          </a:p>
-        </p:txBody>
-      </p:sp>
-      <p:sp>
-        <p:nvSpPr>
-          <p:cNvPr id="971" name="Text 971"/>
-          <p:cNvSpPr txBox="1"/>
-          <p:nvPr/>
-        </p:nvSpPr>
-        <p:spPr>
-          <a:xfrm>
-            <a:off x="6272784" y="3374136"/>
-            <a:ext cx="1322680" cy="182880"/>
-          </a:xfrm>
-          <a:prstGeom prst="rect">
-            <a:avLst/>
-          </a:prstGeom>
-          <a:noFill/>
-        </p:spPr>
-        <p:txBody>
-          <a:bodyPr wrap="square" lIns="0" tIns="0" rIns="0" bIns="0" anchor="t">
-            <a:noAutofit/>
-          </a:bodyPr>
-          <a:lstStyle/>
-          <a:p>
-            <a:pPr algn="l">
-              <a:spcBef>
-                <a:spcPts val="0"/>
-              </a:spcBef>
-              <a:spcAft>
-                <a:spcPts val="0"/>
-              </a:spcAft>
-              <a:buNone/>
-            </a:pPr>
-            <a:r>
-              <a:rPr lang="en" sz="920" b="1">
-                <a:solidFill>
-                  <a:srgbClr val="1F2A44"/>
-                </a:solidFill>
-              </a:rPr>
-              <a:t>ELL</a:t>
-            </a:r>
-          </a:p>
-        </p:txBody>
-      </p:sp>
-      <p:sp>
-        <p:nvSpPr>
-          <p:cNvPr id="972" name="Text 972"/>
-          <p:cNvSpPr txBox="1"/>
-          <p:nvPr/>
-        </p:nvSpPr>
-        <p:spPr>
-          <a:xfrm>
-            <a:off x="7595464" y="3374136"/>
-            <a:ext cx="721462" cy="182880"/>
-          </a:xfrm>
-          <a:prstGeom prst="rect">
-            <a:avLst/>
-          </a:prstGeom>
-          <a:noFill/>
-        </p:spPr>
-        <p:txBody>
-          <a:bodyPr wrap="square" lIns="0" tIns="0" rIns="0" bIns="0" anchor="t">
-            <a:noAutofit/>
-          </a:bodyPr>
-          <a:lstStyle/>
-          <a:p>
-            <a:pPr algn="r">
-              <a:spcBef>
-                <a:spcPts val="0"/>
-              </a:spcBef>
-              <a:spcAft>
-                <a:spcPts val="0"/>
-              </a:spcAft>
-              <a:buNone/>
-            </a:pPr>
-            <a:r>
-              <a:rPr lang="en" sz="700">
-                <a:solidFill>
-                  <a:srgbClr val="7A8398"/>
-                </a:solidFill>
-              </a:rPr>
-              <a:t>5 responses</a:t>
-            </a:r>
-          </a:p>
-        </p:txBody>
-      </p:sp>
-      <p:sp>
-        <p:nvSpPr>
-          <p:cNvPr id="973" name="Shape 973"/>
-          <p:cNvSpPr/>
-          <p:nvPr/>
-        </p:nvSpPr>
-        <p:spPr>
-          <a:xfrm>
-            <a:off x="6272784" y="3602736"/>
-            <a:ext cx="1947672" cy="137160"/>
-          </a:xfrm>
-          <a:prstGeom prst="roundRect">
-            <a:avLst>
-              <a:gd name="adj" fmla="val 50000"/>
-            </a:avLst>
-          </a:prstGeom>
-          <a:solidFill>
-            <a:srgbClr val="E6E9EF"/>
-          </a:solidFill>
-          <a:ln>
-            <a:noFill/>
-          </a:ln>
-        </p:spPr>
-        <p:txBody>
-          <a:bodyPr/>
-          <a:lstStyle/>
-          <a:p>
-            <a:endParaRPr sz="800"/>
-          </a:p>
-        </p:txBody>
-      </p:sp>
-      <p:sp>
-        <p:nvSpPr>
-          <p:cNvPr id="974" name="Shape 974"/>
-          <p:cNvSpPr/>
-          <p:nvPr/>
-        </p:nvSpPr>
-        <p:spPr>
-          <a:xfrm>
-            <a:off x="6272784" y="3602736"/>
-            <a:ext cx="779069" cy="137160"/>
-          </a:xfrm>
-          <a:prstGeom prst="roundRect">
-            <a:avLst>
-              <a:gd name="adj" fmla="val 50000"/>
-            </a:avLst>
-          </a:prstGeom>
-          <a:solidFill>
-            <a:srgbClr val="EF4444"/>
-          </a:solidFill>
-          <a:ln>
-            <a:noFill/>
-          </a:ln>
-        </p:spPr>
-        <p:txBody>
-          <a:bodyPr/>
-          <a:lstStyle/>
-          <a:p>
-            <a:endParaRPr sz="800"/>
-          </a:p>
-        </p:txBody>
-      </p:sp>
-      <p:sp>
-        <p:nvSpPr>
-          <p:cNvPr id="975" name="Shape 975"/>
-          <p:cNvSpPr/>
-          <p:nvPr/>
-        </p:nvSpPr>
-        <p:spPr>
-          <a:xfrm>
-            <a:off x="7441387" y="3575304"/>
-            <a:ext cx="12802" cy="210312"/>
-          </a:xfrm>
-          <a:prstGeom prst="rect">
-            <a:avLst/>
-          </a:prstGeom>
-          <a:solidFill>
-            <a:srgbClr val="94A3B8"/>
-          </a:solidFill>
-          <a:ln>
-            <a:noFill/>
-          </a:ln>
-        </p:spPr>
-        <p:txBody>
-          <a:bodyPr/>
-          <a:lstStyle/>
-          <a:p>
-            <a:endParaRPr sz="800"/>
-          </a:p>
-        </p:txBody>
-      </p:sp>
-      <p:sp>
-        <p:nvSpPr>
-          <p:cNvPr id="976" name="Text 976"/>
-          <p:cNvSpPr txBox="1"/>
-          <p:nvPr/>
-        </p:nvSpPr>
-        <p:spPr>
-          <a:xfrm>
-            <a:off x="8293608" y="3575304"/>
-            <a:ext cx="365760" cy="182880"/>
-          </a:xfrm>
-          <a:prstGeom prst="rect">
-            <a:avLst/>
-          </a:prstGeom>
-          <a:noFill/>
-        </p:spPr>
-        <p:txBody>
-          <a:bodyPr wrap="square" lIns="0" tIns="0" rIns="0" bIns="0" anchor="ctr">
-            <a:noAutofit/>
-          </a:bodyPr>
-          <a:lstStyle/>
-          <a:p>
-            <a:pPr algn="l">
-              <a:spcBef>
-                <a:spcPts val="0"/>
-              </a:spcBef>
-              <a:spcAft>
-                <a:spcPts val="0"/>
-              </a:spcAft>
-              <a:buNone/>
-            </a:pPr>
-            <a:r>
-              <a:rPr lang="en" sz="1050" b="1">
-                <a:solidFill>
-                  <a:srgbClr val="1F2A44"/>
-                </a:solidFill>
-              </a:rPr>
-              <a:t>40%</a:t>
-            </a:r>
-          </a:p>
-        </p:txBody>
-      </p:sp>
-      <p:sp>
-        <p:nvSpPr>
-          <p:cNvPr id="977" name="Text 977"/>
-          <p:cNvSpPr txBox="1"/>
-          <p:nvPr/>
-        </p:nvSpPr>
-        <p:spPr>
-          <a:xfrm>
-            <a:off x="7212787" y="3922776"/>
-            <a:ext cx="457200" cy="128016"/>
-          </a:xfrm>
-          <a:prstGeom prst="rect">
-            <a:avLst/>
-          </a:prstGeom>
-          <a:noFill/>
-        </p:spPr>
-        <p:txBody>
-          <a:bodyPr wrap="square" lIns="0" tIns="0" rIns="0" bIns="0" anchor="t">
-            <a:noAutofit/>
-          </a:bodyPr>
-          <a:lstStyle/>
-          <a:p>
-            <a:pPr algn="ctr">
-              <a:spcBef>
-                <a:spcPts val="0"/>
-              </a:spcBef>
-              <a:spcAft>
-                <a:spcPts val="0"/>
-              </a:spcAft>
-              <a:buNone/>
-            </a:pPr>
-            <a:r>
-              <a:rPr lang="en" sz="700">
-                <a:solidFill>
-                  <a:srgbClr val="94A3B8"/>
-                </a:solidFill>
-              </a:rPr>
-              <a:t>60%</a:t>
-            </a:r>
-          </a:p>
-        </p:txBody>
-      </p:sp>
-      <p:sp>
-        <p:nvSpPr>
-          <p:cNvPr id="978" name="Shape 978"/>
-          <p:cNvSpPr/>
-          <p:nvPr/>
-        </p:nvSpPr>
-        <p:spPr>
-          <a:xfrm>
-            <a:off x="320040" y="4251960"/>
-            <a:ext cx="8503920" cy="7315"/>
-          </a:xfrm>
-          <a:prstGeom prst="rect">
-            <a:avLst/>
-          </a:prstGeom>
-          <a:solidFill>
-            <a:srgbClr val="CBD5E1"/>
-          </a:solidFill>
-          <a:ln>
-            <a:noFill/>
-          </a:ln>
-        </p:spPr>
-        <p:txBody>
-          <a:bodyPr/>
-          <a:lstStyle/>
-          <a:p>
-            <a:endParaRPr sz="800"/>
-          </a:p>
-        </p:txBody>
-      </p:sp>
-      <p:sp>
-        <p:nvSpPr>
-          <p:cNvPr id="979" name="Text 979"/>
-          <p:cNvSpPr txBox="1"/>
-          <p:nvPr/>
-        </p:nvSpPr>
-        <p:spPr>
-          <a:xfrm>
-            <a:off x="320040" y="4315968"/>
-            <a:ext cx="8503920" cy="146304"/>
-          </a:xfrm>
-          <a:prstGeom prst="rect">
-            <a:avLst/>
-          </a:prstGeom>
-          <a:noFill/>
-        </p:spPr>
-        <p:txBody>
-          <a:bodyPr wrap="square" lIns="0" tIns="0" rIns="0" bIns="0" anchor="t">
-            <a:noAutofit/>
-          </a:bodyPr>
-          <a:lstStyle/>
-          <a:p>
-            <a:pPr algn="ctr">
-              <a:spcBef>
-                <a:spcPts val="0"/>
-              </a:spcBef>
-              <a:spcAft>
-                <a:spcPts val="0"/>
-              </a:spcAft>
-              <a:buNone/>
-            </a:pPr>
-            <a:r>
-              <a:rPr lang="en" sz="900" b="1">
-                <a:solidFill>
-                  <a:srgbClr val="214F93"/>
-                </a:solidFill>
-              </a:rPr>
-              <a:t>Overall Performance by Population</a:t>
-            </a:r>
-          </a:p>
-        </p:txBody>
-      </p:sp>
-      <p:sp>
-        <p:nvSpPr>
-          <p:cNvPr id="980" name="Text 980"/>
-          <p:cNvSpPr txBox="1"/>
-          <p:nvPr/>
-        </p:nvSpPr>
-        <p:spPr>
-          <a:xfrm>
-            <a:off x="320040" y="4471416"/>
-            <a:ext cx="8503920" cy="219456"/>
-          </a:xfrm>
-          <a:prstGeom prst="rect">
-            <a:avLst/>
-          </a:prstGeom>
-          <a:noFill/>
-        </p:spPr>
-        <p:txBody>
-          <a:bodyPr wrap="square" lIns="0" tIns="0" rIns="0" bIns="0" anchor="t">
-            <a:noAutofit/>
-          </a:bodyPr>
-          <a:lstStyle/>
-          <a:p>
-            <a:pPr algn="ctr">
-              <a:spcBef>
-                <a:spcPts val="0"/>
-              </a:spcBef>
-              <a:spcAft>
-                <a:spcPts val="0"/>
-              </a:spcAft>
-              <a:buNone/>
-            </a:pPr>
-            <a:r>
-              <a:rPr lang="en" sz="820">
-                <a:solidFill>
-                  <a:srgbClr val="1F2A44"/>
-                </a:solidFill>
-              </a:rPr>
-              <a:t>All students </a:t>
-            </a:r>
-            <a:r>
-              <a:rPr lang="en" sz="820" b="1">
-                <a:solidFill>
-                  <a:srgbClr val="214F93"/>
-                </a:solidFill>
-              </a:rPr>
-              <a:t>63%</a:t>
-            </a:r>
-            <a:r>
-              <a:rPr lang="en" sz="820">
-                <a:solidFill>
-                  <a:srgbClr val="1F2A44"/>
-                </a:solidFill>
-              </a:rPr>
-              <a:t>  |  SWD </a:t>
-            </a:r>
-            <a:r>
-              <a:rPr lang="en" sz="820" b="1">
-                <a:solidFill>
-                  <a:srgbClr val="EF4444"/>
-                </a:solidFill>
-              </a:rPr>
-              <a:t>49%</a:t>
-            </a:r>
-            <a:r>
-              <a:rPr lang="en" sz="820">
-                <a:solidFill>
-                  <a:srgbClr val="1F2A44"/>
-                </a:solidFill>
-              </a:rPr>
-              <a:t>  |  ELL </a:t>
-            </a:r>
-            <a:r>
-              <a:rPr lang="en" sz="820" b="1">
-                <a:solidFill>
-                  <a:srgbClr val="EF4444"/>
-                </a:solidFill>
-              </a:rPr>
-              <a:t>44%</a:t>
-            </a:r>
-          </a:p>
-        </p:txBody>
-      </p:sp>
-      <p:sp>
-        <p:nvSpPr>
-          <p:cNvPr id="981" name="Text 981"/>
-          <p:cNvSpPr txBox="1"/>
-          <p:nvPr/>
-        </p:nvSpPr>
-        <p:spPr>
-          <a:xfrm>
-            <a:off x="320040" y="4709160"/>
-            <a:ext cx="8503920" cy="146304"/>
-          </a:xfrm>
-          <a:prstGeom prst="rect">
-            <a:avLst/>
-          </a:prstGeom>
-          <a:noFill/>
-        </p:spPr>
-        <p:txBody>
-          <a:bodyPr wrap="square" lIns="0" tIns="0" rIns="0" bIns="0" anchor="t">
-            <a:noAutofit/>
-          </a:bodyPr>
-          <a:lstStyle/>
-          <a:p>
-            <a:pPr algn="ctr">
-              <a:spcBef>
-                <a:spcPts val="0"/>
-              </a:spcBef>
-              <a:spcAft>
-                <a:spcPts val="0"/>
-              </a:spcAft>
-              <a:buNone/>
-            </a:pPr>
-            <a:r>
-              <a:rPr lang="en" sz="900" b="1">
-                <a:solidFill>
-                  <a:srgbClr val="214F93"/>
-                </a:solidFill>
-              </a:rPr>
-              <a:t>School Pass Rates (EOC threshold)</a:t>
-            </a:r>
-          </a:p>
-        </p:txBody>
-      </p:sp>
-      <p:sp>
-        <p:nvSpPr>
-          <p:cNvPr id="982" name="Text 982"/>
-          <p:cNvSpPr txBox="1"/>
-          <p:nvPr/>
-        </p:nvSpPr>
-        <p:spPr>
-          <a:xfrm>
-            <a:off x="320040" y="4855464"/>
-            <a:ext cx="8503920" cy="219456"/>
-          </a:xfrm>
-          <a:prstGeom prst="rect">
-            <a:avLst/>
-          </a:prstGeom>
-          <a:noFill/>
-        </p:spPr>
-        <p:txBody>
-          <a:bodyPr wrap="square" lIns="0" tIns="0" rIns="0" bIns="0" anchor="t">
-            <a:noAutofit/>
-          </a:bodyPr>
-          <a:lstStyle/>
-          <a:p>
-            <a:pPr algn="ctr">
-              <a:spcBef>
-                <a:spcPts val="0"/>
-              </a:spcBef>
-              <a:spcAft>
-                <a:spcPts val="0"/>
-              </a:spcAft>
-              <a:buNone/>
-            </a:pPr>
-            <a:r>
-              <a:rPr lang="en" sz="820">
-                <a:solidFill>
-                  <a:srgbClr val="10B981"/>
-                </a:solidFill>
-              </a:rPr>
-              <a:t>All 78%</a:t>
-            </a:r>
-            <a:r>
-              <a:rPr lang="en" sz="820">
-                <a:solidFill>
-                  <a:srgbClr val="1F2A44"/>
-                </a:solidFill>
-              </a:rPr>
-              <a:t>  |  SWD 54%</a:t>
-            </a:r>
-            <a:r>
-              <a:rPr lang="en" sz="820">
-                <a:solidFill>
-                  <a:srgbClr val="EF4444"/>
-                </a:solidFill>
-              </a:rPr>
-              <a:t>  |  ELL 20%</a:t>
-            </a:r>
-          </a:p>
-        </p:txBody>
-      </p:sp>
     </p:spTree>
   </p:cSld>
   <p:clrMapOvr>

--- a/Instructional_Response_to_SOL_Data_Reading.pptx
+++ b/Instructional_Response_to_SOL_Data_Reading.pptx
@@ -6669,7 +6669,7 @@
                           <a:cs typeface="Arial"/>
                           <a:sym typeface="Arial"/>
                         </a:rPr>
-                        <a:t>Claim check:</a:t>
+                        <a:t>Claim check (10.RI.1.C):</a:t>
                       </a:r>
                       <a:r>
                         <a:rPr lang="en" sz="650">
@@ -6681,7 +6681,7 @@
                           <a:cs typeface="Arial"/>
                           <a:sym typeface="Arial"/>
                         </a:rPr>
-                        <a:t> bi-weekly paired-passage task analyzing details to confirm or disprove a claim; teacher think-aloud + PEE/CER.</a:t>
+                        <a:t> weekly paired-passage task sorting details that confirm vs. disprove a claim; teacher think-aloud + PEE/CER.</a:t>
                       </a:r>
                       <a:endParaRPr sz="650">
                         <a:solidFill>
@@ -6733,7 +6733,7 @@
                           <a:cs typeface="Arial"/>
                           <a:sym typeface="Arial"/>
                         </a:rPr>
-                        <a:t>Character annotation:</a:t>
+                        <a:t>Purpose &amp; technique analysis (11.RI.2.C):</a:t>
                       </a:r>
                       <a:r>
                         <a:rPr lang="en" sz="650">
@@ -6745,7 +6745,7 @@
                           <a:cs typeface="Arial"/>
                           <a:sym typeface="Arial"/>
                         </a:rPr>
-                        <a:t> written analytical paragraph of dialogue or an event explaining what  it reveals; organizer for SWD/ELL.</a:t>
+                        <a:t> students mark one literary technique and write: “The author uses [technique] to [effect]; this reveals [purpose].” Organizer + sentence starters for SWD/ELL.</a:t>
                       </a:r>
                       <a:endParaRPr sz="650">
                         <a:solidFill>
@@ -6797,7 +6797,7 @@
                           <a:cs typeface="Arial"/>
                           <a:sym typeface="Arial"/>
                         </a:rPr>
-                        <a:t>Context-clue routine:</a:t>
+                        <a:t>Word choice &amp; tone routine (11.RL.2.B):</a:t>
                       </a:r>
                       <a:r>
                         <a:rPr lang="en" sz="650">
@@ -6809,7 +6809,7 @@
                           <a:cs typeface="Arial"/>
                           <a:sym typeface="Arial"/>
                         </a:rPr>
-                        <a:t> weekly 5-10 minute word-meaning practice using context or word structure; pre-teach key words for ELL.</a:t>
+                        <a:t> daily 5-minute annotation of one word, syntax, or tone choice explaining how it conveys the author’s viewpoint; pre-teach key words for ELL.</a:t>
                       </a:r>
                       <a:endParaRPr sz="650">
                         <a:solidFill>

--- a/Instructional_Response_to_SOL_Data_Reading.pptx
+++ b/Instructional_Response_to_SOL_Data_Reading.pptx
@@ -6385,7 +6385,7 @@
                           <a:cs typeface="Arial"/>
                           <a:sym typeface="Arial"/>
                         </a:rPr>
-                        <a:t>% of items correct: all students 63%, SWD 49%, ELL 44%. Three skills to improve (all / SWD / ELL):</a:t>
+                        <a:t>% of items correct: all students 62%, SWD 49%, MLL 44%. Three priority skills (all / SWD / MLL; MLL reflects five students, shown with correct/total):</a:t>
                       </a:r>
                       <a:endParaRPr sz="650">
                         <a:solidFill>
@@ -6449,7 +6449,7 @@
                           <a:cs typeface="Arial"/>
                           <a:sym typeface="Arial"/>
                         </a:rPr>
-                        <a:t> (10.RI.1.C): 52% / 41% / 32%.</a:t>
+                        <a:t> (10.RI.1.C): 52% / 41% / 32% (8/25).</a:t>
                       </a:r>
                       <a:endParaRPr sz="650">
                         <a:solidFill>
@@ -6513,7 +6513,7 @@
                           <a:cs typeface="Arial"/>
                           <a:sym typeface="Arial"/>
                         </a:rPr>
-                        <a:t> (11.RI.2.C): 36% / 20% / 100%.</a:t>
+                        <a:t> (11.RI.2.C): 36% / 20% / 100% (5/5, one low-difficulty item).</a:t>
                       </a:r>
                       <a:endParaRPr sz="650">
                         <a:solidFill>
@@ -6577,7 +6577,7 @@
                           <a:cs typeface="Arial"/>
                           <a:sym typeface="Arial"/>
                         </a:rPr>
-                        <a:t> (11.RL.2.B): 58% / 41% / 20%.</a:t>
+                        <a:t> (11.RL.2.B): 58% / 41% / 20% (2/10).</a:t>
                       </a:r>
                       <a:endParaRPr sz="650">
                         <a:solidFill>
@@ -6745,7 +6745,7 @@
                           <a:cs typeface="Arial"/>
                           <a:sym typeface="Arial"/>
                         </a:rPr>
-                        <a:t> students mark one literary technique and write: “The author uses [technique] to [effect]; this reveals [purpose].” Organizer + sentence starters for SWD/ELL.</a:t>
+                        <a:t> students mark one literary technique and write: “The author uses [technique] to [effect]; this reveals [purpose].” Organizer + sentence starters for SWD/MLL.</a:t>
                       </a:r>
                       <a:endParaRPr sz="650">
                         <a:solidFill>
@@ -6809,7 +6809,7 @@
                           <a:cs typeface="Arial"/>
                           <a:sym typeface="Arial"/>
                         </a:rPr>
-                        <a:t> daily 5-minute annotation of one word, syntax, or tone choice explaining how it conveys the author’s viewpoint; pre-teach key words for ELL.</a:t>
+                        <a:t> daily 5-minute annotation of one word, syntax, or tone choice explaining how it conveys the author’s viewpoint; pre-teach key words for MLL.</a:t>
                       </a:r>
                       <a:endParaRPr sz="650">
                         <a:solidFill>
@@ -6889,7 +6889,7 @@
                           <a:cs typeface="Arial"/>
                           <a:sym typeface="Arial"/>
                         </a:rPr>
-                        <a:t>•One 5-item CFU per skill every 3 weeks; MP1 benchmark on these three SOLs for all/SWD/ELL.</a:t>
+                        <a:t>•One 5-item CFU per skill every 3 weeks; MP1 benchmark on these three SOLs for all/SWD/MLL.</a:t>
                       </a:r>
                       <a:endParaRPr sz="650">
                         <a:solidFill>

--- a/Instructional_Response_to_SOL_Data_Reading.pptx
+++ b/Instructional_Response_to_SOL_Data_Reading.pptx
@@ -6385,7 +6385,7 @@
                           <a:cs typeface="Arial"/>
                           <a:sym typeface="Arial"/>
                         </a:rPr>
-                        <a:t>% of items correct: all students 62%, SWD 49%, MLL 44%. Three priority skills (all / SWD / MLL; MLL reflects five students, shown with correct/total):</a:t>
+                        <a:t>% correct: all 62%, SWD 49%, MLL 44% (five MLL students). Priority skills (all / SWD / MLL):</a:t>
                       </a:r>
                       <a:endParaRPr sz="650">
                         <a:solidFill>
@@ -6578,6 +6578,58 @@
                           <a:sym typeface="Arial"/>
                         </a:rPr>
                         <a:t> (11.RL.2.B): 58% / 41% / 20% (2/10).</a:t>
+                      </a:r>
+                      <a:endParaRPr sz="650">
+                        <a:solidFill>
+                          <a:schemeClr val="dk1"/>
+                        </a:solidFill>
+                        <a:latin typeface="Arial"/>
+                        <a:ea typeface="Arial"/>
+                        <a:cs typeface="Arial"/>
+                        <a:sym typeface="Arial"/>
+                      </a:endParaRPr>
+                    </a:p>
+                    <a:p>
+                      <a:pPr indent="0" lvl="0" marL="0" rtl="0" algn="l">
+                        <a:lnSpc>
+                          <a:spcPct val="115000"/>
+                        </a:lnSpc>
+                        <a:spcBef>
+                          <a:spcPts val="100"/>
+                        </a:spcBef>
+                        <a:spcAft>
+                          <a:spcPts val="0"/>
+                        </a:spcAft>
+                        <a:buClr>
+                          <a:schemeClr val="dk1"/>
+                        </a:buClr>
+                        <a:buSzPts val="1100"/>
+                        <a:buFont typeface="Arial"/>
+                        <a:buNone/>
+                      </a:pPr>
+                      <a:r>
+                        <a:rPr b="1" lang="en" sz="650">
+                          <a:solidFill>
+                            <a:schemeClr val="dk1"/>
+                          </a:solidFill>
+                          <a:latin typeface="Arial"/>
+                          <a:ea typeface="Arial"/>
+                          <a:cs typeface="Arial"/>
+                          <a:sym typeface="Arial"/>
+                        </a:rPr>
+                        <a:t>Bloom’s:</a:t>
+                      </a:r>
+                      <a:r>
+                        <a:rPr lang="en" sz="650">
+                          <a:solidFill>
+                            <a:schemeClr val="dk1"/>
+                          </a:solidFill>
+                          <a:latin typeface="Arial"/>
+                          <a:ea typeface="Arial"/>
+                          <a:cs typeface="Arial"/>
+                          <a:sym typeface="Arial"/>
+                        </a:rPr>
+                        <a:t xml:space="preserve"> all three are higher-order; evaluate items fell 64% to 55%, analyze held at 62%.</a:t>
                       </a:r>
                       <a:endParaRPr sz="650">
                         <a:solidFill>
@@ -6809,7 +6861,7 @@
                           <a:cs typeface="Arial"/>
                           <a:sym typeface="Arial"/>
                         </a:rPr>
-                        <a:t> daily 5-minute annotation of one word, syntax, or tone choice explaining how it conveys the author’s viewpoint; pre-teach key words for MLL.</a:t>
+                        <a:t> daily 5-minute annotation of one word or tone choice and the viewpoint it shows; pre-teach key words for MLL.</a:t>
                       </a:r>
                       <a:endParaRPr sz="650">
                         <a:solidFill>
